--- a/docs/cahier-des-charges/Cahier-des-charges-Koji-Web.pptx
+++ b/docs/cahier-des-charges/Cahier-des-charges-Koji-Web.pptx
@@ -8760,7 +8760,7 @@
                 <a:ea typeface="Georgia" pitchFamily="34" charset="-122"/>
                 <a:cs typeface="Georgia" pitchFamily="34" charset="-120"/>
               </a:rPr>
-              <a:t>KÔJI</a:t>
+              <a:t>KOJI</a:t>
             </a:r>
             <a:endParaRPr lang="en-US" sz="2000" dirty="0"/>
           </a:p>
@@ -8838,7 +8838,7 @@
                 <a:ea typeface="Segoe UI" pitchFamily="34" charset="-122"/>
                 <a:cs typeface="Segoe UI" pitchFamily="34" charset="-120"/>
               </a:rPr>
-              <a:t>Application Web Kôji — Gestion d'entreprise du bâtiment</a:t>
+              <a:t>Application Web Koji — Gestion d'entreprise du bâtiment</a:t>
             </a:r>
             <a:endParaRPr lang="en-US" sz="1700" dirty="0"/>
           </a:p>
@@ -8955,7 +8955,7 @@
                 <a:ea typeface="Segoe UI" pitchFamily="34" charset="-122"/>
                 <a:cs typeface="Segoe UI" pitchFamily="34" charset="-120"/>
               </a:rPr>
-              <a:t>Application Kôji Web développée par : BOUHOUCHI Amira</a:t>
+              <a:t>Application Koji Web développée par : BOUHOUCHI Amira</a:t>
             </a:r>
             <a:endParaRPr lang="en-US" sz="1200" dirty="0"/>
           </a:p>
@@ -9505,7 +9505,7 @@
                 <a:ea typeface="Segoe UI" pitchFamily="34" charset="-122"/>
                 <a:cs typeface="Segoe UI" pitchFamily="34" charset="-120"/>
               </a:rPr>
-              <a:t>Kôji Web — Cahier des charges</a:t>
+              <a:t>Koji Web — Cahier des charges</a:t>
             </a:r>
             <a:endParaRPr lang="en-US" sz="850" dirty="0"/>
           </a:p>
@@ -10094,7 +10094,7 @@
                 <a:ea typeface="Segoe UI" pitchFamily="34" charset="-122"/>
                 <a:cs typeface="Segoe UI" pitchFamily="34" charset="-120"/>
               </a:rPr>
-              <a:t>Kôji Web — Cahier des charges</a:t>
+              <a:t>Koji Web — Cahier des charges</a:t>
             </a:r>
             <a:endParaRPr lang="en-US" sz="850" dirty="0"/>
           </a:p>
@@ -10683,7 +10683,7 @@
                 <a:ea typeface="Segoe UI" pitchFamily="34" charset="-122"/>
                 <a:cs typeface="Segoe UI" pitchFamily="34" charset="-120"/>
               </a:rPr>
-              <a:t>Kôji Web — Cahier des charges</a:t>
+              <a:t>Koji Web — Cahier des charges</a:t>
             </a:r>
             <a:endParaRPr lang="en-US" sz="850" dirty="0"/>
           </a:p>
@@ -11272,7 +11272,7 @@
                 <a:ea typeface="Segoe UI" pitchFamily="34" charset="-122"/>
                 <a:cs typeface="Segoe UI" pitchFamily="34" charset="-120"/>
               </a:rPr>
-              <a:t>Kôji Web — Cahier des charges</a:t>
+              <a:t>Koji Web — Cahier des charges</a:t>
             </a:r>
             <a:endParaRPr lang="en-US" sz="850" dirty="0"/>
           </a:p>
@@ -11532,7 +11532,7 @@
                 <a:ea typeface="Segoe UI" pitchFamily="34" charset="-122"/>
                 <a:cs typeface="Segoe UI" pitchFamily="34" charset="-120"/>
               </a:rPr>
-              <a:t>Période d'essai de 14 jours ; à l'expiration, l'entreprise est redirigée vers une page présentant 3 formules (Kôji GO / Premium / Business).</a:t>
+              <a:t>Période d'essai de 14 jours ; à l'expiration, l'entreprise est redirigée vers une page présentant 3 formules (Koji GO / Premium / Business).</a:t>
             </a:r>
             <a:endParaRPr lang="en-US" sz="1150" dirty="0"/>
           </a:p>
@@ -11652,7 +11652,7 @@
                 <a:ea typeface="Segoe UI" pitchFamily="34" charset="-122"/>
                 <a:cs typeface="Segoe UI" pitchFamily="34" charset="-120"/>
               </a:rPr>
-              <a:t>Kôji Web — Cahier des charges</a:t>
+              <a:t>Koji Web — Cahier des charges</a:t>
             </a:r>
             <a:endParaRPr lang="en-US" sz="850" dirty="0"/>
           </a:p>
@@ -11902,7 +11902,7 @@
                 <a:ea typeface="Segoe UI" pitchFamily="34" charset="-122"/>
                 <a:cs typeface="Segoe UI" pitchFamily="34" charset="-120"/>
               </a:rPr>
-              <a:t>Kôji Web — Cahier des charges</a:t>
+              <a:t>Koji Web — Cahier des charges</a:t>
             </a:r>
             <a:endParaRPr lang="en-US" sz="850" dirty="0"/>
           </a:p>
@@ -12491,7 +12491,7 @@
                 <a:ea typeface="Segoe UI" pitchFamily="34" charset="-122"/>
                 <a:cs typeface="Segoe UI" pitchFamily="34" charset="-120"/>
               </a:rPr>
-              <a:t>Kôji Web — Cahier des charges</a:t>
+              <a:t>Koji Web — Cahier des charges</a:t>
             </a:r>
             <a:endParaRPr lang="en-US" sz="850" dirty="0"/>
           </a:p>
@@ -13080,7 +13080,7 @@
                 <a:ea typeface="Segoe UI" pitchFamily="34" charset="-122"/>
                 <a:cs typeface="Segoe UI" pitchFamily="34" charset="-120"/>
               </a:rPr>
-              <a:t>Kôji Web — Cahier des charges</a:t>
+              <a:t>Koji Web — Cahier des charges</a:t>
             </a:r>
             <a:endParaRPr lang="en-US" sz="850" dirty="0"/>
           </a:p>
@@ -13669,7 +13669,7 @@
                 <a:ea typeface="Segoe UI" pitchFamily="34" charset="-122"/>
                 <a:cs typeface="Segoe UI" pitchFamily="34" charset="-120"/>
               </a:rPr>
-              <a:t>Kôji Web — Cahier des charges</a:t>
+              <a:t>Koji Web — Cahier des charges</a:t>
             </a:r>
             <a:endParaRPr lang="en-US" sz="850" dirty="0"/>
           </a:p>
@@ -14258,7 +14258,7 @@
                 <a:ea typeface="Segoe UI" pitchFamily="34" charset="-122"/>
                 <a:cs typeface="Segoe UI" pitchFamily="34" charset="-120"/>
               </a:rPr>
-              <a:t>Kôji Web — Cahier des charges</a:t>
+              <a:t>Koji Web — Cahier des charges</a:t>
             </a:r>
             <a:endParaRPr lang="en-US" sz="850" dirty="0"/>
           </a:p>
@@ -14410,7 +14410,7 @@
                 <a:ea typeface="Segoe UI" pitchFamily="34" charset="-122"/>
                 <a:cs typeface="Segoe UI" pitchFamily="34" charset="-120"/>
               </a:rPr>
-              <a:t>Kôji Web est une application de gestion destinée aux entreprises du bâtiment (plomberie, électricité, climatisation, tous corps d'état) : elle couvre l'ensemble du cycle d'activité, de la création d'un devis jusqu'à la facturation, en passant par le suivi de chantier, la gestion de l'équipe et le pointage des heures. Trois profils l'utilisent : l'entreprise (gérant/administratif), le client particulier (portail de suivi) et l'ouvrier/sous-traitant (portail terrain). Ce document décrit, module par module, chaque fonctionnalité de l'application, ce qu'elle permet de faire et comment elle a été réalisée techniquement.</a:t>
+              <a:t>Koji Web est une application de gestion destinée aux entreprises du bâtiment (plomberie, électricité, climatisation, tous corps d'état) : elle couvre l'ensemble du cycle d'activité, de la création d'un devis jusqu'à la facturation, en passant par le suivi de chantier, la gestion de l'équipe et le pointage des heures. Trois profils l'utilisent : l'entreprise (gérant/administratif), le client particulier (portail de suivi) et l'ouvrier/sous-traitant (portail terrain). Ce document décrit, module par module, chaque fonctionnalité de l'application, ce qu'elle permet de faire et comment elle a été réalisée techniquement.</a:t>
             </a:r>
             <a:endParaRPr lang="en-US" sz="1200" dirty="0"/>
           </a:p>
@@ -14654,7 +14654,7 @@
                 <a:ea typeface="Segoe UI" pitchFamily="34" charset="-122"/>
                 <a:cs typeface="Segoe UI" pitchFamily="34" charset="-120"/>
               </a:rPr>
-              <a:t>Kôji Web — Cahier des charges</a:t>
+              <a:t>Koji Web — Cahier des charges</a:t>
             </a:r>
             <a:endParaRPr lang="en-US" sz="850" dirty="0"/>
           </a:p>
@@ -14904,7 +14904,7 @@
                 <a:ea typeface="Segoe UI" pitchFamily="34" charset="-122"/>
                 <a:cs typeface="Segoe UI" pitchFamily="34" charset="-120"/>
               </a:rPr>
-              <a:t>Kôji Web — Cahier des charges</a:t>
+              <a:t>Koji Web — Cahier des charges</a:t>
             </a:r>
             <a:endParaRPr lang="en-US" sz="850" dirty="0"/>
           </a:p>
@@ -15493,7 +15493,7 @@
                 <a:ea typeface="Segoe UI" pitchFamily="34" charset="-122"/>
                 <a:cs typeface="Segoe UI" pitchFamily="34" charset="-120"/>
               </a:rPr>
-              <a:t>Kôji Web — Cahier des charges</a:t>
+              <a:t>Koji Web — Cahier des charges</a:t>
             </a:r>
             <a:endParaRPr lang="en-US" sz="850" dirty="0"/>
           </a:p>
@@ -16082,7 +16082,7 @@
                 <a:ea typeface="Segoe UI" pitchFamily="34" charset="-122"/>
                 <a:cs typeface="Segoe UI" pitchFamily="34" charset="-120"/>
               </a:rPr>
-              <a:t>Kôji Web — Cahier des charges</a:t>
+              <a:t>Koji Web — Cahier des charges</a:t>
             </a:r>
             <a:endParaRPr lang="en-US" sz="850" dirty="0"/>
           </a:p>
@@ -16332,7 +16332,7 @@
                 <a:ea typeface="Segoe UI" pitchFamily="34" charset="-122"/>
                 <a:cs typeface="Segoe UI" pitchFamily="34" charset="-120"/>
               </a:rPr>
-              <a:t>Kôji Web — Cahier des charges</a:t>
+              <a:t>Koji Web — Cahier des charges</a:t>
             </a:r>
             <a:endParaRPr lang="en-US" sz="850" dirty="0"/>
           </a:p>
@@ -16921,7 +16921,7 @@
                 <a:ea typeface="Segoe UI" pitchFamily="34" charset="-122"/>
                 <a:cs typeface="Segoe UI" pitchFamily="34" charset="-120"/>
               </a:rPr>
-              <a:t>Kôji Web — Cahier des charges</a:t>
+              <a:t>Koji Web — Cahier des charges</a:t>
             </a:r>
             <a:endParaRPr lang="en-US" sz="850" dirty="0"/>
           </a:p>
@@ -17348,7 +17348,7 @@
                 <a:ea typeface="Segoe UI" pitchFamily="34" charset="-122"/>
                 <a:cs typeface="Segoe UI" pitchFamily="34" charset="-120"/>
               </a:rPr>
-              <a:t>Kôji Web — Cahier des charges</a:t>
+              <a:t>Koji Web — Cahier des charges</a:t>
             </a:r>
             <a:endParaRPr lang="en-US" sz="850" dirty="0"/>
           </a:p>
@@ -17775,7 +17775,7 @@
                 <a:ea typeface="Segoe UI" pitchFamily="34" charset="-122"/>
                 <a:cs typeface="Segoe UI" pitchFamily="34" charset="-120"/>
               </a:rPr>
-              <a:t>Kôji Web — Cahier des charges</a:t>
+              <a:t>Koji Web — Cahier des charges</a:t>
             </a:r>
             <a:endParaRPr lang="en-US" sz="850" dirty="0"/>
           </a:p>
@@ -18202,7 +18202,7 @@
                 <a:ea typeface="Segoe UI" pitchFamily="34" charset="-122"/>
                 <a:cs typeface="Segoe UI" pitchFamily="34" charset="-120"/>
               </a:rPr>
-              <a:t>Kôji Web — Cahier des charges</a:t>
+              <a:t>Koji Web — Cahier des charges</a:t>
             </a:r>
             <a:endParaRPr lang="en-US" sz="850" dirty="0"/>
           </a:p>
@@ -18629,7 +18629,7 @@
                 <a:ea typeface="Segoe UI" pitchFamily="34" charset="-122"/>
                 <a:cs typeface="Segoe UI" pitchFamily="34" charset="-120"/>
               </a:rPr>
-              <a:t>Kôji Web — Cahier des charges</a:t>
+              <a:t>Koji Web — Cahier des charges</a:t>
             </a:r>
             <a:endParaRPr lang="en-US" sz="850" dirty="0"/>
           </a:p>
@@ -18928,7 +18928,7 @@
                 <a:ea typeface="Segoe UI" pitchFamily="34" charset="-122"/>
                 <a:cs typeface="Segoe UI" pitchFamily="34" charset="-120"/>
               </a:rPr>
-              <a:t>Kôji Web — Cahier des charges</a:t>
+              <a:t>Koji Web — Cahier des charges</a:t>
             </a:r>
             <a:endParaRPr lang="en-US" sz="850" dirty="0"/>
           </a:p>
@@ -20637,7 +20637,7 @@
                 <a:ea typeface="Segoe UI" pitchFamily="34" charset="-122"/>
                 <a:cs typeface="Segoe UI" pitchFamily="34" charset="-120"/>
               </a:rPr>
-              <a:t>Kôji Web — Cahier des charges</a:t>
+              <a:t>Koji Web — Cahier des charges</a:t>
             </a:r>
             <a:endParaRPr lang="en-US" sz="850" dirty="0"/>
           </a:p>
@@ -20887,7 +20887,7 @@
                 <a:ea typeface="Segoe UI" pitchFamily="34" charset="-122"/>
                 <a:cs typeface="Segoe UI" pitchFamily="34" charset="-120"/>
               </a:rPr>
-              <a:t>Kôji Web — Cahier des charges</a:t>
+              <a:t>Koji Web — Cahier des charges</a:t>
             </a:r>
             <a:endParaRPr lang="en-US" sz="850" dirty="0"/>
           </a:p>
@@ -21395,7 +21395,7 @@
                 <a:ea typeface="Segoe UI" pitchFamily="34" charset="-122"/>
                 <a:cs typeface="Segoe UI" pitchFamily="34" charset="-120"/>
               </a:rPr>
-              <a:t>Kôji Web — Cahier des charges</a:t>
+              <a:t>Koji Web — Cahier des charges</a:t>
             </a:r>
             <a:endParaRPr lang="en-US" sz="850" dirty="0"/>
           </a:p>
@@ -21736,7 +21736,7 @@
                 <a:ea typeface="Segoe UI" pitchFamily="34" charset="-122"/>
                 <a:cs typeface="Segoe UI" pitchFamily="34" charset="-120"/>
               </a:rPr>
-              <a:t>Page publique /signature/[jeton] ; API /api/signatures/[jeton] ; accès via une clé technique dédiée (le client n'a pas de session Kôji).</a:t>
+              <a:t>Page publique /signature/[jeton] ; API /api/signatures/[jeton] ; accès via une clé technique dédiée (le client n'a pas de session Koji).</a:t>
             </a:r>
             <a:endParaRPr lang="en-US" sz="1000" dirty="0"/>
           </a:p>
@@ -21984,7 +21984,7 @@
                 <a:ea typeface="Segoe UI" pitchFamily="34" charset="-122"/>
                 <a:cs typeface="Segoe UI" pitchFamily="34" charset="-120"/>
               </a:rPr>
-              <a:t>Kôji Web — Cahier des charges</a:t>
+              <a:t>Koji Web — Cahier des charges</a:t>
             </a:r>
             <a:endParaRPr lang="en-US" sz="850" dirty="0"/>
           </a:p>
@@ -22283,7 +22283,7 @@
                 <a:ea typeface="Segoe UI" pitchFamily="34" charset="-122"/>
                 <a:cs typeface="Segoe UI" pitchFamily="34" charset="-120"/>
               </a:rPr>
-              <a:t>Kôji Web — Cahier des charges</a:t>
+              <a:t>Koji Web — Cahier des charges</a:t>
             </a:r>
             <a:endParaRPr lang="en-US" sz="850" dirty="0"/>
           </a:p>
@@ -22533,7 +22533,7 @@
                 <a:ea typeface="Segoe UI" pitchFamily="34" charset="-122"/>
                 <a:cs typeface="Segoe UI" pitchFamily="34" charset="-120"/>
               </a:rPr>
-              <a:t>Kôji Web — Cahier des charges</a:t>
+              <a:t>Koji Web — Cahier des charges</a:t>
             </a:r>
             <a:endParaRPr lang="en-US" sz="850" dirty="0"/>
           </a:p>
@@ -23041,7 +23041,7 @@
                 <a:ea typeface="Segoe UI" pitchFamily="34" charset="-122"/>
                 <a:cs typeface="Segoe UI" pitchFamily="34" charset="-120"/>
               </a:rPr>
-              <a:t>Kôji Web — Cahier des charges</a:t>
+              <a:t>Koji Web — Cahier des charges</a:t>
             </a:r>
             <a:endParaRPr lang="en-US" sz="850" dirty="0"/>
           </a:p>
@@ -23468,7 +23468,7 @@
                 <a:ea typeface="Segoe UI" pitchFamily="34" charset="-122"/>
                 <a:cs typeface="Segoe UI" pitchFamily="34" charset="-120"/>
               </a:rPr>
-              <a:t>Kôji Web — Cahier des charges</a:t>
+              <a:t>Koji Web — Cahier des charges</a:t>
             </a:r>
             <a:endParaRPr lang="en-US" sz="850" dirty="0"/>
           </a:p>
@@ -23895,7 +23895,7 @@
                 <a:ea typeface="Segoe UI" pitchFamily="34" charset="-122"/>
                 <a:cs typeface="Segoe UI" pitchFamily="34" charset="-120"/>
               </a:rPr>
-              <a:t>Kôji Web — Cahier des charges</a:t>
+              <a:t>Koji Web — Cahier des charges</a:t>
             </a:r>
             <a:endParaRPr lang="en-US" sz="850" dirty="0"/>
           </a:p>
@@ -24322,7 +24322,7 @@
                 <a:ea typeface="Segoe UI" pitchFamily="34" charset="-122"/>
                 <a:cs typeface="Segoe UI" pitchFamily="34" charset="-120"/>
               </a:rPr>
-              <a:t>Kôji Web — Cahier des charges</a:t>
+              <a:t>Koji Web — Cahier des charges</a:t>
             </a:r>
             <a:endParaRPr lang="en-US" sz="850" dirty="0"/>
           </a:p>
@@ -24749,7 +24749,7 @@
                 <a:ea typeface="Segoe UI" pitchFamily="34" charset="-122"/>
                 <a:cs typeface="Segoe UI" pitchFamily="34" charset="-120"/>
               </a:rPr>
-              <a:t>Kôji Web — Cahier des charges</a:t>
+              <a:t>Koji Web — Cahier des charges</a:t>
             </a:r>
             <a:endParaRPr lang="en-US" sz="850" dirty="0"/>
           </a:p>
@@ -24960,7 +24960,7 @@
                 <a:ea typeface="Segoe UI" pitchFamily="34" charset="-122"/>
                 <a:cs typeface="Segoe UI" pitchFamily="34" charset="-120"/>
               </a:rPr>
-              <a:t>Vue d'ensemble des langages, frameworks et services utilisés pour construire et faire fonctionner Kôji Web.</a:t>
+              <a:t>Vue d'ensemble des langages, frameworks et services utilisés pour construire et faire fonctionner Koji Web.</a:t>
             </a:r>
             <a:endParaRPr lang="en-US" sz="1300" dirty="0"/>
           </a:p>
@@ -24999,7 +24999,7 @@
                 <a:ea typeface="Segoe UI" pitchFamily="34" charset="-122"/>
                 <a:cs typeface="Segoe UI" pitchFamily="34" charset="-120"/>
               </a:rPr>
-              <a:t>Kôji Web — Cahier des charges</a:t>
+              <a:t>Koji Web — Cahier des charges</a:t>
             </a:r>
             <a:endParaRPr lang="en-US" sz="850" dirty="0"/>
           </a:p>
@@ -25249,7 +25249,7 @@
                 <a:ea typeface="Segoe UI" pitchFamily="34" charset="-122"/>
                 <a:cs typeface="Segoe UI" pitchFamily="34" charset="-120"/>
               </a:rPr>
-              <a:t>Kôji Web — Cahier des charges</a:t>
+              <a:t>Koji Web — Cahier des charges</a:t>
             </a:r>
             <a:endParaRPr lang="en-US" sz="850" dirty="0"/>
           </a:p>
@@ -25757,7 +25757,7 @@
                 <a:ea typeface="Segoe UI" pitchFamily="34" charset="-122"/>
                 <a:cs typeface="Segoe UI" pitchFamily="34" charset="-120"/>
               </a:rPr>
-              <a:t>Kôji Web — Cahier des charges</a:t>
+              <a:t>Koji Web — Cahier des charges</a:t>
             </a:r>
             <a:endParaRPr lang="en-US" sz="850" dirty="0"/>
           </a:p>
@@ -26265,7 +26265,7 @@
                 <a:ea typeface="Segoe UI" pitchFamily="34" charset="-122"/>
                 <a:cs typeface="Segoe UI" pitchFamily="34" charset="-120"/>
               </a:rPr>
-              <a:t>Kôji Web — Cahier des charges</a:t>
+              <a:t>Koji Web — Cahier des charges</a:t>
             </a:r>
             <a:endParaRPr lang="en-US" sz="850" dirty="0"/>
           </a:p>
@@ -26692,7 +26692,7 @@
                 <a:ea typeface="Segoe UI" pitchFamily="34" charset="-122"/>
                 <a:cs typeface="Segoe UI" pitchFamily="34" charset="-120"/>
               </a:rPr>
-              <a:t>Kôji Web — Cahier des charges</a:t>
+              <a:t>Koji Web — Cahier des charges</a:t>
             </a:r>
             <a:endParaRPr lang="en-US" sz="850" dirty="0"/>
           </a:p>
@@ -26991,7 +26991,7 @@
                 <a:ea typeface="Segoe UI" pitchFamily="34" charset="-122"/>
                 <a:cs typeface="Segoe UI" pitchFamily="34" charset="-120"/>
               </a:rPr>
-              <a:t>Kôji Web — Cahier des charges</a:t>
+              <a:t>Koji Web — Cahier des charges</a:t>
             </a:r>
             <a:endParaRPr lang="en-US" sz="850" dirty="0"/>
           </a:p>
@@ -27241,7 +27241,7 @@
                 <a:ea typeface="Segoe UI" pitchFamily="34" charset="-122"/>
                 <a:cs typeface="Segoe UI" pitchFamily="34" charset="-120"/>
               </a:rPr>
-              <a:t>Kôji Web — Cahier des charges</a:t>
+              <a:t>Koji Web — Cahier des charges</a:t>
             </a:r>
             <a:endParaRPr lang="en-US" sz="850" dirty="0"/>
           </a:p>
@@ -27830,7 +27830,7 @@
                 <a:ea typeface="Segoe UI" pitchFamily="34" charset="-122"/>
                 <a:cs typeface="Segoe UI" pitchFamily="34" charset="-120"/>
               </a:rPr>
-              <a:t>Kôji Web — Cahier des charges</a:t>
+              <a:t>Koji Web — Cahier des charges</a:t>
             </a:r>
             <a:endParaRPr lang="en-US" sz="850" dirty="0"/>
           </a:p>
@@ -28129,7 +28129,7 @@
                 <a:ea typeface="Segoe UI" pitchFamily="34" charset="-122"/>
                 <a:cs typeface="Segoe UI" pitchFamily="34" charset="-120"/>
               </a:rPr>
-              <a:t>Kôji Web — Cahier des charges</a:t>
+              <a:t>Koji Web — Cahier des charges</a:t>
             </a:r>
             <a:endParaRPr lang="en-US" sz="850" dirty="0"/>
           </a:p>
@@ -28379,7 +28379,7 @@
                 <a:ea typeface="Segoe UI" pitchFamily="34" charset="-122"/>
                 <a:cs typeface="Segoe UI" pitchFamily="34" charset="-120"/>
               </a:rPr>
-              <a:t>Kôji Web — Cahier des charges</a:t>
+              <a:t>Koji Web — Cahier des charges</a:t>
             </a:r>
             <a:endParaRPr lang="en-US" sz="850" dirty="0"/>
           </a:p>
@@ -28968,7 +28968,7 @@
                 <a:ea typeface="Segoe UI" pitchFamily="34" charset="-122"/>
                 <a:cs typeface="Segoe UI" pitchFamily="34" charset="-120"/>
               </a:rPr>
-              <a:t>Kôji Web — Cahier des charges</a:t>
+              <a:t>Koji Web — Cahier des charges</a:t>
             </a:r>
             <a:endParaRPr lang="en-US" sz="850" dirty="0"/>
           </a:p>
@@ -29557,7 +29557,7 @@
                 <a:ea typeface="Segoe UI" pitchFamily="34" charset="-122"/>
                 <a:cs typeface="Segoe UI" pitchFamily="34" charset="-120"/>
               </a:rPr>
-              <a:t>Kôji Web — Cahier des charges</a:t>
+              <a:t>Koji Web — Cahier des charges</a:t>
             </a:r>
             <a:endParaRPr lang="en-US" sz="850" dirty="0"/>
           </a:p>
@@ -29984,7 +29984,7 @@
                 <a:ea typeface="Segoe UI" pitchFamily="34" charset="-122"/>
                 <a:cs typeface="Segoe UI" pitchFamily="34" charset="-120"/>
               </a:rPr>
-              <a:t>Kôji Web — Cahier des charges</a:t>
+              <a:t>Koji Web — Cahier des charges</a:t>
             </a:r>
             <a:endParaRPr lang="en-US" sz="850" dirty="0"/>
           </a:p>
@@ -30234,7 +30234,7 @@
                 <a:ea typeface="Segoe UI" pitchFamily="34" charset="-122"/>
                 <a:cs typeface="Segoe UI" pitchFamily="34" charset="-120"/>
               </a:rPr>
-              <a:t>Kôji Web — Cahier des charges</a:t>
+              <a:t>Koji Web — Cahier des charges</a:t>
             </a:r>
             <a:endParaRPr lang="en-US" sz="850" dirty="0"/>
           </a:p>
@@ -30742,7 +30742,7 @@
                 <a:ea typeface="Segoe UI" pitchFamily="34" charset="-122"/>
                 <a:cs typeface="Segoe UI" pitchFamily="34" charset="-120"/>
               </a:rPr>
-              <a:t>Kôji Web — Cahier des charges</a:t>
+              <a:t>Koji Web — Cahier des charges</a:t>
             </a:r>
             <a:endParaRPr lang="en-US" sz="850" dirty="0"/>
           </a:p>
@@ -31169,7 +31169,7 @@
                 <a:ea typeface="Segoe UI" pitchFamily="34" charset="-122"/>
                 <a:cs typeface="Segoe UI" pitchFamily="34" charset="-120"/>
               </a:rPr>
-              <a:t>Kôji Web — Cahier des charges</a:t>
+              <a:t>Koji Web — Cahier des charges</a:t>
             </a:r>
             <a:endParaRPr lang="en-US" sz="850" dirty="0"/>
           </a:p>
@@ -31468,7 +31468,7 @@
                 <a:ea typeface="Segoe UI" pitchFamily="34" charset="-122"/>
                 <a:cs typeface="Segoe UI" pitchFamily="34" charset="-120"/>
               </a:rPr>
-              <a:t>Kôji Web — Cahier des charges</a:t>
+              <a:t>Koji Web — Cahier des charges</a:t>
             </a:r>
             <a:endParaRPr lang="en-US" sz="850" dirty="0"/>
           </a:p>
@@ -31718,7 +31718,7 @@
                 <a:ea typeface="Segoe UI" pitchFamily="34" charset="-122"/>
                 <a:cs typeface="Segoe UI" pitchFamily="34" charset="-120"/>
               </a:rPr>
-              <a:t>Kôji Web — Cahier des charges</a:t>
+              <a:t>Koji Web — Cahier des charges</a:t>
             </a:r>
             <a:endParaRPr lang="en-US" sz="850" dirty="0"/>
           </a:p>
@@ -32226,7 +32226,7 @@
                 <a:ea typeface="Segoe UI" pitchFamily="34" charset="-122"/>
                 <a:cs typeface="Segoe UI" pitchFamily="34" charset="-120"/>
               </a:rPr>
-              <a:t>Kôji Web — Cahier des charges</a:t>
+              <a:t>Koji Web — Cahier des charges</a:t>
             </a:r>
             <a:endParaRPr lang="en-US" sz="850" dirty="0"/>
           </a:p>
@@ -32653,7 +32653,7 @@
                 <a:ea typeface="Segoe UI" pitchFamily="34" charset="-122"/>
                 <a:cs typeface="Segoe UI" pitchFamily="34" charset="-120"/>
               </a:rPr>
-              <a:t>Kôji Web — Cahier des charges</a:t>
+              <a:t>Koji Web — Cahier des charges</a:t>
             </a:r>
             <a:endParaRPr lang="en-US" sz="850" dirty="0"/>
           </a:p>
@@ -33080,7 +33080,7 @@
                 <a:ea typeface="Segoe UI" pitchFamily="34" charset="-122"/>
                 <a:cs typeface="Segoe UI" pitchFamily="34" charset="-120"/>
               </a:rPr>
-              <a:t>Kôji Web — Cahier des charges</a:t>
+              <a:t>Koji Web — Cahier des charges</a:t>
             </a:r>
             <a:endParaRPr lang="en-US" sz="850" dirty="0"/>
           </a:p>
@@ -33507,7 +33507,7 @@
                 <a:ea typeface="Segoe UI" pitchFamily="34" charset="-122"/>
                 <a:cs typeface="Segoe UI" pitchFamily="34" charset="-120"/>
               </a:rPr>
-              <a:t>Kôji Web — Cahier des charges</a:t>
+              <a:t>Koji Web — Cahier des charges</a:t>
             </a:r>
             <a:endParaRPr lang="en-US" sz="850" dirty="0"/>
           </a:p>
@@ -34096,7 +34096,7 @@
                 <a:ea typeface="Segoe UI" pitchFamily="34" charset="-122"/>
                 <a:cs typeface="Segoe UI" pitchFamily="34" charset="-120"/>
               </a:rPr>
-              <a:t>Kôji Web — Cahier des charges</a:t>
+              <a:t>Koji Web — Cahier des charges</a:t>
             </a:r>
             <a:endParaRPr lang="en-US" sz="850" dirty="0"/>
           </a:p>
@@ -34395,7 +34395,7 @@
                 <a:ea typeface="Segoe UI" pitchFamily="34" charset="-122"/>
                 <a:cs typeface="Segoe UI" pitchFamily="34" charset="-120"/>
               </a:rPr>
-              <a:t>Kôji Web — Cahier des charges</a:t>
+              <a:t>Koji Web — Cahier des charges</a:t>
             </a:r>
             <a:endParaRPr lang="en-US" sz="850" dirty="0"/>
           </a:p>
@@ -34645,7 +34645,7 @@
                 <a:ea typeface="Segoe UI" pitchFamily="34" charset="-122"/>
                 <a:cs typeface="Segoe UI" pitchFamily="34" charset="-120"/>
               </a:rPr>
-              <a:t>Kôji Web — Cahier des charges</a:t>
+              <a:t>Koji Web — Cahier des charges</a:t>
             </a:r>
             <a:endParaRPr lang="en-US" sz="850" dirty="0"/>
           </a:p>
@@ -35153,7 +35153,7 @@
                 <a:ea typeface="Segoe UI" pitchFamily="34" charset="-122"/>
                 <a:cs typeface="Segoe UI" pitchFamily="34" charset="-120"/>
               </a:rPr>
-              <a:t>Kôji Web — Cahier des charges</a:t>
+              <a:t>Koji Web — Cahier des charges</a:t>
             </a:r>
             <a:endParaRPr lang="en-US" sz="850" dirty="0"/>
           </a:p>
@@ -35580,7 +35580,7 @@
                 <a:ea typeface="Segoe UI" pitchFamily="34" charset="-122"/>
                 <a:cs typeface="Segoe UI" pitchFamily="34" charset="-120"/>
               </a:rPr>
-              <a:t>Kôji Web — Cahier des charges</a:t>
+              <a:t>Koji Web — Cahier des charges</a:t>
             </a:r>
             <a:endParaRPr lang="en-US" sz="850" dirty="0"/>
           </a:p>
@@ -35830,7 +35830,7 @@
                 <a:ea typeface="Segoe UI" pitchFamily="34" charset="-122"/>
                 <a:cs typeface="Segoe UI" pitchFamily="34" charset="-120"/>
               </a:rPr>
-              <a:t>Kôji Web — Cahier des charges</a:t>
+              <a:t>Koji Web — Cahier des charges</a:t>
             </a:r>
             <a:endParaRPr lang="en-US" sz="850" dirty="0"/>
           </a:p>
@@ -36338,7 +36338,7 @@
                 <a:ea typeface="Segoe UI" pitchFamily="34" charset="-122"/>
                 <a:cs typeface="Segoe UI" pitchFamily="34" charset="-120"/>
               </a:rPr>
-              <a:t>Kôji Web — Cahier des charges</a:t>
+              <a:t>Koji Web — Cahier des charges</a:t>
             </a:r>
             <a:endParaRPr lang="en-US" sz="850" dirty="0"/>
           </a:p>
@@ -36637,7 +36637,7 @@
                 <a:ea typeface="Segoe UI" pitchFamily="34" charset="-122"/>
                 <a:cs typeface="Segoe UI" pitchFamily="34" charset="-120"/>
               </a:rPr>
-              <a:t>Kôji Web — Cahier des charges</a:t>
+              <a:t>Koji Web — Cahier des charges</a:t>
             </a:r>
             <a:endParaRPr lang="en-US" sz="850" dirty="0"/>
           </a:p>
@@ -36887,7 +36887,7 @@
                 <a:ea typeface="Segoe UI" pitchFamily="34" charset="-122"/>
                 <a:cs typeface="Segoe UI" pitchFamily="34" charset="-120"/>
               </a:rPr>
-              <a:t>Kôji Web — Cahier des charges</a:t>
+              <a:t>Koji Web — Cahier des charges</a:t>
             </a:r>
             <a:endParaRPr lang="en-US" sz="850" dirty="0"/>
           </a:p>
@@ -37476,7 +37476,7 @@
                 <a:ea typeface="Segoe UI" pitchFamily="34" charset="-122"/>
                 <a:cs typeface="Segoe UI" pitchFamily="34" charset="-120"/>
               </a:rPr>
-              <a:t>Kôji Web — Cahier des charges</a:t>
+              <a:t>Koji Web — Cahier des charges</a:t>
             </a:r>
             <a:endParaRPr lang="en-US" sz="850" dirty="0"/>
           </a:p>
@@ -37984,7 +37984,7 @@
                 <a:ea typeface="Segoe UI" pitchFamily="34" charset="-122"/>
                 <a:cs typeface="Segoe UI" pitchFamily="34" charset="-120"/>
               </a:rPr>
-              <a:t>Kôji Web — Cahier des charges</a:t>
+              <a:t>Koji Web — Cahier des charges</a:t>
             </a:r>
             <a:endParaRPr lang="en-US" sz="850" dirty="0"/>
           </a:p>
@@ -38573,7 +38573,7 @@
                 <a:ea typeface="Segoe UI" pitchFamily="34" charset="-122"/>
                 <a:cs typeface="Segoe UI" pitchFamily="34" charset="-120"/>
               </a:rPr>
-              <a:t>Kôji Web — Cahier des charges</a:t>
+              <a:t>Koji Web — Cahier des charges</a:t>
             </a:r>
             <a:endParaRPr lang="en-US" sz="850" dirty="0"/>
           </a:p>
@@ -39000,7 +39000,7 @@
                 <a:ea typeface="Segoe UI" pitchFamily="34" charset="-122"/>
                 <a:cs typeface="Segoe UI" pitchFamily="34" charset="-120"/>
               </a:rPr>
-              <a:t>Kôji Web — Cahier des charges</a:t>
+              <a:t>Koji Web — Cahier des charges</a:t>
             </a:r>
             <a:endParaRPr lang="en-US" sz="850" dirty="0"/>
           </a:p>
@@ -39380,7 +39380,7 @@
                 <a:ea typeface="Segoe UI" pitchFamily="34" charset="-122"/>
                 <a:cs typeface="Segoe UI" pitchFamily="34" charset="-120"/>
               </a:rPr>
-              <a:t>Kôji Web — Cahier des charges</a:t>
+              <a:t>Koji Web — Cahier des charges</a:t>
             </a:r>
             <a:endParaRPr lang="en-US" sz="850" dirty="0"/>
           </a:p>
@@ -39630,7 +39630,7 @@
                 <a:ea typeface="Segoe UI" pitchFamily="34" charset="-122"/>
                 <a:cs typeface="Segoe UI" pitchFamily="34" charset="-120"/>
               </a:rPr>
-              <a:t>Kôji Web — Cahier des charges</a:t>
+              <a:t>Koji Web — Cahier des charges</a:t>
             </a:r>
             <a:endParaRPr lang="en-US" sz="850" dirty="0"/>
           </a:p>
@@ -40219,7 +40219,7 @@
                 <a:ea typeface="Segoe UI" pitchFamily="34" charset="-122"/>
                 <a:cs typeface="Segoe UI" pitchFamily="34" charset="-120"/>
               </a:rPr>
-              <a:t>Kôji Web — Cahier des charges</a:t>
+              <a:t>Koji Web — Cahier des charges</a:t>
             </a:r>
             <a:endParaRPr lang="en-US" sz="850" dirty="0"/>
           </a:p>
@@ -40646,7 +40646,7 @@
                 <a:ea typeface="Segoe UI" pitchFamily="34" charset="-122"/>
                 <a:cs typeface="Segoe UI" pitchFamily="34" charset="-120"/>
               </a:rPr>
-              <a:t>Kôji Web — Cahier des charges</a:t>
+              <a:t>Koji Web — Cahier des charges</a:t>
             </a:r>
             <a:endParaRPr lang="en-US" sz="850" dirty="0"/>
           </a:p>
@@ -41073,7 +41073,7 @@
                 <a:ea typeface="Segoe UI" pitchFamily="34" charset="-122"/>
                 <a:cs typeface="Segoe UI" pitchFamily="34" charset="-120"/>
               </a:rPr>
-              <a:t>Kôji Web — Cahier des charges</a:t>
+              <a:t>Koji Web — Cahier des charges</a:t>
             </a:r>
             <a:endParaRPr lang="en-US" sz="850" dirty="0"/>
           </a:p>
@@ -41372,7 +41372,7 @@
                 <a:ea typeface="Segoe UI" pitchFamily="34" charset="-122"/>
                 <a:cs typeface="Segoe UI" pitchFamily="34" charset="-120"/>
               </a:rPr>
-              <a:t>Kôji Web — Cahier des charges</a:t>
+              <a:t>Koji Web — Cahier des charges</a:t>
             </a:r>
             <a:endParaRPr lang="en-US" sz="850" dirty="0"/>
           </a:p>
@@ -41622,7 +41622,7 @@
                 <a:ea typeface="Segoe UI" pitchFamily="34" charset="-122"/>
                 <a:cs typeface="Segoe UI" pitchFamily="34" charset="-120"/>
               </a:rPr>
-              <a:t>Kôji Web — Cahier des charges</a:t>
+              <a:t>Koji Web — Cahier des charges</a:t>
             </a:r>
             <a:endParaRPr lang="en-US" sz="850" dirty="0"/>
           </a:p>
@@ -42130,7 +42130,7 @@
                 <a:ea typeface="Segoe UI" pitchFamily="34" charset="-122"/>
                 <a:cs typeface="Segoe UI" pitchFamily="34" charset="-120"/>
               </a:rPr>
-              <a:t>Kôji Web — Cahier des charges</a:t>
+              <a:t>Koji Web — Cahier des charges</a:t>
             </a:r>
             <a:endParaRPr lang="en-US" sz="850" dirty="0"/>
           </a:p>
@@ -42557,7 +42557,7 @@
                 <a:ea typeface="Segoe UI" pitchFamily="34" charset="-122"/>
                 <a:cs typeface="Segoe UI" pitchFamily="34" charset="-120"/>
               </a:rPr>
-              <a:t>Kôji Web — Cahier des charges</a:t>
+              <a:t>Koji Web — Cahier des charges</a:t>
             </a:r>
             <a:endParaRPr lang="en-US" sz="850" dirty="0"/>
           </a:p>
@@ -43146,7 +43146,7 @@
                 <a:ea typeface="Segoe UI" pitchFamily="34" charset="-122"/>
                 <a:cs typeface="Segoe UI" pitchFamily="34" charset="-120"/>
               </a:rPr>
-              <a:t>Kôji Web — Cahier des charges</a:t>
+              <a:t>Koji Web — Cahier des charges</a:t>
             </a:r>
             <a:endParaRPr lang="en-US" sz="850" dirty="0"/>
           </a:p>
@@ -43445,7 +43445,7 @@
                 <a:ea typeface="Segoe UI" pitchFamily="34" charset="-122"/>
                 <a:cs typeface="Segoe UI" pitchFamily="34" charset="-120"/>
               </a:rPr>
-              <a:t>Kôji Web — Cahier des charges</a:t>
+              <a:t>Koji Web — Cahier des charges</a:t>
             </a:r>
             <a:endParaRPr lang="en-US" sz="850" dirty="0"/>
           </a:p>
@@ -43695,7 +43695,7 @@
                 <a:ea typeface="Segoe UI" pitchFamily="34" charset="-122"/>
                 <a:cs typeface="Segoe UI" pitchFamily="34" charset="-120"/>
               </a:rPr>
-              <a:t>Kôji Web — Cahier des charges</a:t>
+              <a:t>Koji Web — Cahier des charges</a:t>
             </a:r>
             <a:endParaRPr lang="en-US" sz="850" dirty="0"/>
           </a:p>
@@ -43955,7 +43955,7 @@
                 <a:ea typeface="Segoe UI" pitchFamily="34" charset="-122"/>
                 <a:cs typeface="Segoe UI" pitchFamily="34" charset="-120"/>
               </a:rPr>
-              <a:t>Trois formules (Kôji GO, Premium, Business) présentées avec leur liste de fonctionnalités.</a:t>
+              <a:t>Trois formules (Koji GO, Premium, Business) présentées avec leur liste de fonctionnalités.</a:t>
             </a:r>
             <a:endParaRPr lang="en-US" sz="1150" dirty="0"/>
           </a:p>
@@ -44203,7 +44203,7 @@
                 <a:ea typeface="Segoe UI" pitchFamily="34" charset="-122"/>
                 <a:cs typeface="Segoe UI" pitchFamily="34" charset="-120"/>
               </a:rPr>
-              <a:t>Kôji Web — Cahier des charges</a:t>
+              <a:t>Koji Web — Cahier des charges</a:t>
             </a:r>
             <a:endParaRPr lang="en-US" sz="850" dirty="0"/>
           </a:p>
@@ -44453,7 +44453,7 @@
                 <a:ea typeface="Segoe UI" pitchFamily="34" charset="-122"/>
                 <a:cs typeface="Segoe UI" pitchFamily="34" charset="-120"/>
               </a:rPr>
-              <a:t>Kôji Web — Cahier des charges</a:t>
+              <a:t>Koji Web — Cahier des charges</a:t>
             </a:r>
             <a:endParaRPr lang="en-US" sz="850" dirty="0"/>
           </a:p>
@@ -44752,7 +44752,7 @@
                 <a:ea typeface="Segoe UI" pitchFamily="34" charset="-122"/>
                 <a:cs typeface="Segoe UI" pitchFamily="34" charset="-120"/>
               </a:rPr>
-              <a:t>Kôji Web — Cahier des charges</a:t>
+              <a:t>Koji Web — Cahier des charges</a:t>
             </a:r>
             <a:endParaRPr lang="en-US" sz="850" dirty="0"/>
           </a:p>
@@ -45002,7 +45002,7 @@
                 <a:ea typeface="Segoe UI" pitchFamily="34" charset="-122"/>
                 <a:cs typeface="Segoe UI" pitchFamily="34" charset="-120"/>
               </a:rPr>
-              <a:t>Kôji Web — Cahier des charges</a:t>
+              <a:t>Koji Web — Cahier des charges</a:t>
             </a:r>
             <a:endParaRPr lang="en-US" sz="850" dirty="0"/>
           </a:p>
@@ -45390,7 +45390,7 @@
                 <a:ea typeface="Segoe UI" pitchFamily="34" charset="-122"/>
                 <a:cs typeface="Segoe UI" pitchFamily="34" charset="-120"/>
               </a:rPr>
-              <a:t>Les devis, chantiers et comptes sont stockés dans une base commune avec l'application mobile Kôji, pour que les deux applications restent synchronisées.</a:t>
+              <a:t>Les devis, chantiers et comptes sont stockés dans une base commune avec l'application mobile Koji, pour que les deux applications restent synchronisées.</a:t>
             </a:r>
             <a:endParaRPr lang="en-US" sz="1150" dirty="0"/>
           </a:p>
@@ -45429,7 +45429,7 @@
                 <a:ea typeface="Segoe UI" pitchFamily="34" charset="-122"/>
                 <a:cs typeface="Segoe UI" pitchFamily="34" charset="-120"/>
               </a:rPr>
-              <a:t>Kôji Web — Cahier des charges</a:t>
+              <a:t>Koji Web — Cahier des charges</a:t>
             </a:r>
             <a:endParaRPr lang="en-US" sz="850" dirty="0"/>
           </a:p>
@@ -45856,7 +45856,7 @@
                 <a:ea typeface="Segoe UI" pitchFamily="34" charset="-122"/>
                 <a:cs typeface="Segoe UI" pitchFamily="34" charset="-120"/>
               </a:rPr>
-              <a:t>Kôji Web — Cahier des charges</a:t>
+              <a:t>Koji Web — Cahier des charges</a:t>
             </a:r>
             <a:endParaRPr lang="en-US" sz="850" dirty="0"/>
           </a:p>
@@ -46155,7 +46155,7 @@
                 <a:ea typeface="Segoe UI" pitchFamily="34" charset="-122"/>
                 <a:cs typeface="Segoe UI" pitchFamily="34" charset="-120"/>
               </a:rPr>
-              <a:t>Kôji Web — Cahier des charges</a:t>
+              <a:t>Koji Web — Cahier des charges</a:t>
             </a:r>
             <a:endParaRPr lang="en-US" sz="850" dirty="0"/>
           </a:p>
@@ -46307,7 +46307,7 @@
                 <a:ea typeface="Segoe UI" pitchFamily="34" charset="-122"/>
                 <a:cs typeface="Segoe UI" pitchFamily="34" charset="-120"/>
               </a:rPr>
-              <a:t>Ce document liste l'ensemble des fonctionnalités de l'application Kôji Web telles que développées à ce jour. Il est mis à jour à chaque évolution notable de l'application.</a:t>
+              <a:t>Ce document liste l'ensemble des fonctionnalités de l'application Koji Web telles que développées à ce jour. Il est mis à jour à chaque évolution notable de l'application.</a:t>
             </a:r>
             <a:endParaRPr lang="en-US" sz="1300" dirty="0"/>
           </a:p>
@@ -46385,7 +46385,7 @@
                 <a:ea typeface="Segoe UI" pitchFamily="34" charset="-122"/>
                 <a:cs typeface="Segoe UI" pitchFamily="34" charset="-120"/>
               </a:rPr>
-              <a:t>Application Kôji Web développée par : BOUHOUCHI Amira</a:t>
+              <a:t>Application Koji Web développée par : BOUHOUCHI Amira</a:t>
             </a:r>
             <a:endParaRPr lang="en-US" sz="1200" dirty="0"/>
           </a:p>
@@ -46596,7 +46596,7 @@
                 <a:ea typeface="Segoe UI" pitchFamily="34" charset="-122"/>
                 <a:cs typeface="Segoe UI" pitchFamily="34" charset="-120"/>
               </a:rPr>
-              <a:t>Kôji Web — Cahier des charges</a:t>
+              <a:t>Koji Web — Cahier des charges</a:t>
             </a:r>
             <a:endParaRPr lang="en-US" sz="850" dirty="0"/>
           </a:p>

--- a/docs/cahier-des-charges/Cahier-des-charges-Koji-Web.pptx
+++ b/docs/cahier-des-charges/Cahier-des-charges-Koji-Web.pptx
@@ -94,9 +94,11 @@
     <p:sldId id="342" r:id="rId88"/>
     <p:sldId id="343" r:id="rId89"/>
     <p:sldId id="344" r:id="rId90"/>
+    <p:sldId id="345" r:id="rId91"/>
+    <p:sldId id="346" r:id="rId92"/>
   </p:sldIdLst>
   <p:notesMasterIdLst>
-    <p:notesMasterId r:id="rId91"/>
+    <p:notesMasterId r:id="rId93"/>
   </p:notesMasterIdLst>
   <p:sldSz cx="12191695" cy="6858000"/>
   <p:notesSz cx="6858000" cy="12191695"/>
@@ -8358,6 +8360,182 @@
             <a:fld id="{F7021451-1387-4CA6-816F-3879F97B5CBC}" type="slidenum">
               <a:rPr lang="en-US"/>
               <a:t>9</a:t>
+            </a:fld>
+            <a:endParaRPr lang="en-US"/>
+          </a:p>
+        </p:txBody>
+      </p:sp>
+    </p:spTree>
+    <p:extLst>
+      <p:ext uri="{BB962C8B-B14F-4D97-AF65-F5344CB8AC3E}">
+        <p14:creationId xmlns:p14="http://schemas.microsoft.com/office/powerpoint/2010/main" val="1024086991"/>
+      </p:ext>
+    </p:extLst>
+  </p:cSld>
+  <p:clrMapOvr>
+    <a:masterClrMapping/>
+  </p:clrMapOvr>
+</p:notes>
+</file>
+
+<file path=ppt/notesSlides/notesSlide90.xml><?xml version="1.0" encoding="utf-8"?>
+<p:notes xmlns:a="http://schemas.openxmlformats.org/drawingml/2006/main" xmlns:r="http://schemas.openxmlformats.org/officeDocument/2006/relationships" xmlns:p="http://schemas.openxmlformats.org/presentationml/2006/main">
+  <p:cSld>
+    <p:spTree>
+      <p:nvGrpSpPr>
+        <p:cNvPr id="1" name=""/>
+        <p:cNvGrpSpPr/>
+        <p:nvPr/>
+      </p:nvGrpSpPr>
+      <p:grpSpPr>
+        <a:xfrm>
+          <a:off x="0" y="0"/>
+          <a:ext cx="0" cy="0"/>
+          <a:chOff x="0" y="0"/>
+          <a:chExt cx="0" cy="0"/>
+        </a:xfrm>
+      </p:grpSpPr>
+      <p:sp>
+        <p:nvSpPr>
+          <p:cNvPr id="2" name="Slide Image Placeholder 1"/>
+          <p:cNvSpPr>
+            <a:spLocks noGrp="1" noRot="1" noChangeAspect="1"/>
+          </p:cNvSpPr>
+          <p:nvPr>
+            <p:ph type="sldImg"/>
+          </p:nvPr>
+        </p:nvSpPr>
+        <p:spPr/>
+      </p:sp>
+      <p:sp>
+        <p:nvSpPr>
+          <p:cNvPr id="3" name="Notes Placeholder 2"/>
+          <p:cNvSpPr>
+            <a:spLocks noGrp="1"/>
+          </p:cNvSpPr>
+          <p:nvPr>
+            <p:ph type="body" idx="1"/>
+          </p:nvPr>
+        </p:nvSpPr>
+        <p:spPr/>
+        <p:txBody>
+          <a:bodyPr/>
+          <a:lstStyle/>
+          <a:p>
+            <a:r>
+              <a:rPr lang="en-US" dirty="0"/>
+              <a:t/>
+            </a:r>
+            <a:endParaRPr lang="en-US" dirty="0"/>
+          </a:p>
+        </p:txBody>
+      </p:sp>
+      <p:sp>
+        <p:nvSpPr>
+          <p:cNvPr id="4" name="Slide Number Placeholder 3"/>
+          <p:cNvSpPr>
+            <a:spLocks noGrp="1"/>
+          </p:cNvSpPr>
+          <p:nvPr>
+            <p:ph type="sldNum" sz="quarter" idx="10"/>
+          </p:nvPr>
+        </p:nvSpPr>
+        <p:spPr/>
+        <p:txBody>
+          <a:bodyPr/>
+          <a:lstStyle/>
+          <a:p>
+            <a:fld id="{F7021451-1387-4CA6-816F-3879F97B5CBC}" type="slidenum">
+              <a:rPr lang="en-US"/>
+              <a:t>90</a:t>
+            </a:fld>
+            <a:endParaRPr lang="en-US"/>
+          </a:p>
+        </p:txBody>
+      </p:sp>
+    </p:spTree>
+    <p:extLst>
+      <p:ext uri="{BB962C8B-B14F-4D97-AF65-F5344CB8AC3E}">
+        <p14:creationId xmlns:p14="http://schemas.microsoft.com/office/powerpoint/2010/main" val="1024086991"/>
+      </p:ext>
+    </p:extLst>
+  </p:cSld>
+  <p:clrMapOvr>
+    <a:masterClrMapping/>
+  </p:clrMapOvr>
+</p:notes>
+</file>
+
+<file path=ppt/notesSlides/notesSlide91.xml><?xml version="1.0" encoding="utf-8"?>
+<p:notes xmlns:a="http://schemas.openxmlformats.org/drawingml/2006/main" xmlns:r="http://schemas.openxmlformats.org/officeDocument/2006/relationships" xmlns:p="http://schemas.openxmlformats.org/presentationml/2006/main">
+  <p:cSld>
+    <p:spTree>
+      <p:nvGrpSpPr>
+        <p:cNvPr id="1" name=""/>
+        <p:cNvGrpSpPr/>
+        <p:nvPr/>
+      </p:nvGrpSpPr>
+      <p:grpSpPr>
+        <a:xfrm>
+          <a:off x="0" y="0"/>
+          <a:ext cx="0" cy="0"/>
+          <a:chOff x="0" y="0"/>
+          <a:chExt cx="0" cy="0"/>
+        </a:xfrm>
+      </p:grpSpPr>
+      <p:sp>
+        <p:nvSpPr>
+          <p:cNvPr id="2" name="Slide Image Placeholder 1"/>
+          <p:cNvSpPr>
+            <a:spLocks noGrp="1" noRot="1" noChangeAspect="1"/>
+          </p:cNvSpPr>
+          <p:nvPr>
+            <p:ph type="sldImg"/>
+          </p:nvPr>
+        </p:nvSpPr>
+        <p:spPr/>
+      </p:sp>
+      <p:sp>
+        <p:nvSpPr>
+          <p:cNvPr id="3" name="Notes Placeholder 2"/>
+          <p:cNvSpPr>
+            <a:spLocks noGrp="1"/>
+          </p:cNvSpPr>
+          <p:nvPr>
+            <p:ph type="body" idx="1"/>
+          </p:nvPr>
+        </p:nvSpPr>
+        <p:spPr/>
+        <p:txBody>
+          <a:bodyPr/>
+          <a:lstStyle/>
+          <a:p>
+            <a:r>
+              <a:rPr lang="en-US" dirty="0"/>
+              <a:t/>
+            </a:r>
+            <a:endParaRPr lang="en-US" dirty="0"/>
+          </a:p>
+        </p:txBody>
+      </p:sp>
+      <p:sp>
+        <p:nvSpPr>
+          <p:cNvPr id="4" name="Slide Number Placeholder 3"/>
+          <p:cNvSpPr>
+            <a:spLocks noGrp="1"/>
+          </p:cNvSpPr>
+          <p:nvPr>
+            <p:ph type="sldNum" sz="quarter" idx="10"/>
+          </p:nvPr>
+        </p:nvSpPr>
+        <p:spPr/>
+        <p:txBody>
+          <a:bodyPr/>
+          <a:lstStyle/>
+          <a:p>
+            <a:fld id="{F7021451-1387-4CA6-816F-3879F97B5CBC}" type="slidenum">
+              <a:rPr lang="en-US"/>
+              <a:t>91</a:t>
             </a:fld>
             <a:endParaRPr lang="en-US"/>
           </a:p>
@@ -11532,7 +11710,7 @@
                 <a:ea typeface="Segoe UI" pitchFamily="34" charset="-122"/>
                 <a:cs typeface="Segoe UI" pitchFamily="34" charset="-120"/>
               </a:rPr>
-              <a:t>Période d'essai de 14 jours ; à l'expiration, l'entreprise est redirigée vers une page présentant 3 formules (Koji GO / Premium / Business).</a:t>
+              <a:t>Période d'essai limitée à 1 devis ; l'entreprise est ensuite invitée à souscrire à la formule unique Koji Pro (devis/chantiers illimités, suivi de chantiers et d'équipe, pointage, calendrier, facturation, signature électronique, carte de visite offerte...), avec une option payante additionnelle 'Site web Koji' et un accès Marketplace annoncé 'bientôt disponible'.</a:t>
             </a:r>
             <a:endParaRPr lang="en-US" sz="1150" dirty="0"/>
           </a:p>
@@ -11613,7 +11791,7 @@
                 <a:ea typeface="Segoe UI" pitchFamily="34" charset="-122"/>
                 <a:cs typeface="Segoe UI" pitchFamily="34" charset="-120"/>
               </a:rPr>
-              <a:t>Page /abonnement ; calcul de la date de fin d'essai dans components/Shell.jsx ; la mise en paiement réelle n'est pas encore branchée (à connecter à un prestataire de paiement).</a:t>
+              <a:t>Page /abonnement (choix mensuel/annuel + option Site web) ; paiement réel via Stripe Checkout (lib/stripe.js, /api/billing/checkout) ; formule et statut suivis via webhook Stripe (/api/webhooks/stripe) et stockés dans business_info ; gestion/résiliation via le Customer Portal Stripe (/api/billing/portal) ; les comptes créés avant ce système gardent un accès illimité ('grandfathered').</a:t>
             </a:r>
             <a:endParaRPr lang="en-US" sz="1000" dirty="0"/>
           </a:p>
@@ -43656,7 +43834,7 @@
                 <a:ea typeface="Segoe UI" pitchFamily="34" charset="-122"/>
                 <a:cs typeface="Segoe UI" pitchFamily="34" charset="-120"/>
               </a:rPr>
-              <a:t>Présentation des formules d'abonnement à l'application, affichée automatiquement à la fin de la période d'essai.</a:t>
+              <a:t>Formule unique Koji Pro avec paiement réel via Stripe, plus une option payante et une fonctionnalité annoncée à venir.</a:t>
             </a:r>
             <a:endParaRPr lang="en-US" sz="1300" dirty="0"/>
           </a:p>
@@ -43913,7 +44091,7 @@
                 <a:ea typeface="Georgia" pitchFamily="34" charset="-122"/>
                 <a:cs typeface="Georgia" pitchFamily="34" charset="-120"/>
               </a:rPr>
-              <a:t>Formules</a:t>
+              <a:t>Koji Pro (formule unique)</a:t>
             </a:r>
             <a:endParaRPr lang="en-US" sz="1500" dirty="0"/>
           </a:p>
@@ -43955,7 +44133,7 @@
                 <a:ea typeface="Segoe UI" pitchFamily="34" charset="-122"/>
                 <a:cs typeface="Segoe UI" pitchFamily="34" charset="-120"/>
               </a:rPr>
-              <a:t>Trois formules (Koji GO, Premium, Business) présentées avec leur liste de fonctionnalités.</a:t>
+              <a:t>Devis et chantiers illimités, suivi de chantiers en temps réel, suivi des travaux et de l'équipe, pointage des ouvriers, calendrier &amp; planning, génération de devis PDF &amp; Word, signature électronique, facturation (acomptes/intermédiaires/finales), espace client dédié, bibliothèque d'ouvrages &amp; fournisseurs, carte de visite Koji offerte. Choix mensuel ou annuel (2 mois offerts à l'année).</a:t>
             </a:r>
             <a:endParaRPr lang="en-US" sz="1150" dirty="0"/>
           </a:p>
@@ -44036,7 +44214,7 @@
                 <a:ea typeface="Segoe UI" pitchFamily="34" charset="-122"/>
                 <a:cs typeface="Segoe UI" pitchFamily="34" charset="-120"/>
               </a:rPr>
-              <a:t>Page /abonnement.</a:t>
+              <a:t>Page /abonnement ; paiement Stripe Checkout ; prix définis via scripts/stripe-setup.js.</a:t>
             </a:r>
             <a:endParaRPr lang="en-US" sz="1000" dirty="0"/>
           </a:p>
@@ -44051,11 +44229,11 @@
         <p:spPr>
           <a:xfrm>
             <a:off x="640080" y="3813048"/>
-            <a:ext cx="10881360" cy="1737360"/>
+            <a:ext cx="10881360" cy="2606040"/>
           </a:xfrm>
           <a:prstGeom prst="roundRect">
             <a:avLst>
-              <a:gd name="adj" fmla="val 3158"/>
+              <a:gd name="adj" fmla="val 2105"/>
             </a:avLst>
           </a:prstGeom>
           <a:solidFill>
@@ -44078,7 +44256,7 @@
         <p:spPr>
           <a:xfrm>
             <a:off x="640080" y="3813048"/>
-            <a:ext cx="54864" cy="1737360"/>
+            <a:ext cx="54864" cy="2606040"/>
           </a:xfrm>
           <a:prstGeom prst="rect">
             <a:avLst/>
@@ -44122,7 +44300,7 @@
                 <a:ea typeface="Georgia" pitchFamily="34" charset="-122"/>
                 <a:cs typeface="Georgia" pitchFamily="34" charset="-120"/>
               </a:rPr>
-              <a:t>Redirection automatique</a:t>
+              <a:t>Option Site web Koji</a:t>
             </a:r>
             <a:endParaRPr lang="en-US" sz="1500" dirty="0"/>
           </a:p>
@@ -44137,7 +44315,7 @@
         <p:spPr>
           <a:xfrm>
             <a:off x="914400" y="4343400"/>
-            <a:ext cx="10332720" cy="1005840"/>
+            <a:ext cx="10332720" cy="1051560"/>
           </a:xfrm>
           <a:prstGeom prst="rect">
             <a:avLst/>
@@ -44164,7 +44342,7 @@
                 <a:ea typeface="Segoe UI" pitchFamily="34" charset="-122"/>
                 <a:cs typeface="Segoe UI" pitchFamily="34" charset="-120"/>
               </a:rPr>
-              <a:t>À l'expiration des 14 jours d'essai gratuit, l'entreprise est automatiquement redirigée vers cette page tant qu'elle n'a pas souscrit.</a:t>
+              <a:t>Option payante additionnelle (14,99€/mois, ou tarif annuel équivalent), activable à la souscription ou ajoutée/retirée ensuite depuis Paramètres &gt; Abonnement.</a:t>
             </a:r>
             <a:endParaRPr lang="en-US" sz="1150" dirty="0"/>
           </a:p>
@@ -44173,6 +44351,87 @@
       <p:sp>
         <p:nvSpPr>
           <p:cNvPr id="14" name="Text 12"/>
+          <p:cNvSpPr/>
+          <p:nvPr/>
+        </p:nvSpPr>
+        <p:spPr>
+          <a:xfrm>
+            <a:off x="914400" y="5550408"/>
+            <a:ext cx="10332720" cy="228600"/>
+          </a:xfrm>
+          <a:prstGeom prst="rect">
+            <a:avLst/>
+          </a:prstGeom>
+          <a:noFill/>
+          <a:ln/>
+        </p:spPr>
+        <p:txBody>
+          <a:bodyPr wrap="square" rtlCol="0" anchor="ctr"/>
+          <a:lstStyle/>
+          <a:p>
+            <a:pPr indent="0" marL="0">
+              <a:buNone/>
+            </a:pPr>
+            <a:r>
+              <a:rPr lang="en-US" sz="800" b="1" spc="100" kern="0" dirty="0">
+                <a:solidFill>
+                  <a:srgbClr val="9A7C5C"/>
+                </a:solidFill>
+                <a:latin typeface="Segoe UI" pitchFamily="34" charset="0"/>
+                <a:ea typeface="Segoe UI" pitchFamily="34" charset="-122"/>
+                <a:cs typeface="Segoe UI" pitchFamily="34" charset="-120"/>
+              </a:rPr>
+              <a:t>RÉALISATION TECHNIQUE</a:t>
+            </a:r>
+            <a:endParaRPr lang="en-US" sz="800" dirty="0"/>
+          </a:p>
+        </p:txBody>
+      </p:sp>
+      <p:sp>
+        <p:nvSpPr>
+          <p:cNvPr id="15" name="Text 13"/>
+          <p:cNvSpPr/>
+          <p:nvPr/>
+        </p:nvSpPr>
+        <p:spPr>
+          <a:xfrm>
+            <a:off x="914400" y="5797296"/>
+            <a:ext cx="10332720" cy="548640"/>
+          </a:xfrm>
+          <a:prstGeom prst="rect">
+            <a:avLst/>
+          </a:prstGeom>
+          <a:noFill/>
+          <a:ln/>
+        </p:spPr>
+        <p:txBody>
+          <a:bodyPr wrap="square" rtlCol="0" anchor="ctr"/>
+          <a:lstStyle/>
+          <a:p>
+            <a:pPr indent="0" marL="0">
+              <a:lnSpc>
+                <a:spcPts val="1400"/>
+              </a:lnSpc>
+              <a:buNone/>
+            </a:pPr>
+            <a:r>
+              <a:rPr lang="en-US" sz="1000" i="1" dirty="0">
+                <a:solidFill>
+                  <a:srgbClr val="8A7C68"/>
+                </a:solidFill>
+                <a:latin typeface="Segoe UI" pitchFamily="34" charset="0"/>
+                <a:ea typeface="Segoe UI" pitchFamily="34" charset="-122"/>
+                <a:cs typeface="Segoe UI" pitchFamily="34" charset="-120"/>
+              </a:rPr>
+              <a:t>Ligne Stripe supplémentaire sur le même abonnement (facture détaillée) ; ajout/retrait via /api/billing/addon (Stripe Subscription Items API).</a:t>
+            </a:r>
+            <a:endParaRPr lang="en-US" sz="1000" dirty="0"/>
+          </a:p>
+        </p:txBody>
+      </p:sp>
+      <p:sp>
+        <p:nvSpPr>
+          <p:cNvPr id="16" name="Text 14"/>
           <p:cNvSpPr/>
           <p:nvPr/>
         </p:nvSpPr>
@@ -44211,7 +44470,7 @@
       </p:sp>
       <p:sp>
         <p:nvSpPr>
-          <p:cNvPr id="15" name="Text 13"/>
+          <p:cNvPr id="17" name="Text 15"/>
           <p:cNvSpPr/>
           <p:nvPr/>
         </p:nvSpPr>
@@ -44262,7 +44521,7 @@
     <p:bg>
       <p:bgPr>
         <a:solidFill>
-          <a:srgbClr val="0B1030"/>
+          <a:srgbClr val="F3EEE3"/>
         </a:solidFill>
       </p:bgPr>
     </p:bg>
@@ -44288,14 +44547,16 @@
         </p:nvSpPr>
         <p:spPr>
           <a:xfrm>
-            <a:off x="0" y="3246120"/>
-            <a:ext cx="12191695" cy="54864"/>
-          </a:xfrm>
-          <a:prstGeom prst="rect">
-            <a:avLst/>
+            <a:off x="640080" y="411480"/>
+            <a:ext cx="3108960" cy="365760"/>
+          </a:xfrm>
+          <a:prstGeom prst="roundRect">
+            <a:avLst>
+              <a:gd name="adj" fmla="val 50000"/>
+            </a:avLst>
           </a:prstGeom>
           <a:solidFill>
-            <a:srgbClr val="C9A96A"/>
+            <a:srgbClr val="F7EADF"/>
           </a:solidFill>
           <a:ln/>
         </p:spPr>
@@ -44308,8 +44569,94 @@
         </p:nvSpPr>
         <p:spPr>
           <a:xfrm>
-            <a:off x="640080" y="1920240"/>
-            <a:ext cx="2743200" cy="548640"/>
+            <a:off x="640080" y="411480"/>
+            <a:ext cx="3108960" cy="365760"/>
+          </a:xfrm>
+          <a:prstGeom prst="rect">
+            <a:avLst/>
+          </a:prstGeom>
+          <a:noFill/>
+          <a:ln/>
+        </p:spPr>
+        <p:txBody>
+          <a:bodyPr wrap="square" rtlCol="0" anchor="ctr"/>
+          <a:lstStyle/>
+          <a:p>
+            <a:pPr algn="ctr" indent="0" marL="0">
+              <a:buNone/>
+            </a:pPr>
+            <a:r>
+              <a:rPr lang="en-US" sz="950" b="1" spc="100" kern="0" dirty="0">
+                <a:solidFill>
+                  <a:srgbClr val="9A7C5C"/>
+                </a:solidFill>
+                <a:latin typeface="Segoe UI" pitchFamily="34" charset="0"/>
+                <a:ea typeface="Segoe UI" pitchFamily="34" charset="-122"/>
+                <a:cs typeface="Segoe UI" pitchFamily="34" charset="-120"/>
+              </a:rPr>
+              <a:t>ABONNEMENT</a:t>
+            </a:r>
+            <a:endParaRPr lang="en-US" sz="950" dirty="0"/>
+          </a:p>
+        </p:txBody>
+      </p:sp>
+      <p:sp>
+        <p:nvSpPr>
+          <p:cNvPr id="4" name="Shape 2"/>
+          <p:cNvSpPr/>
+          <p:nvPr/>
+        </p:nvSpPr>
+        <p:spPr>
+          <a:xfrm>
+            <a:off x="640080" y="1005840"/>
+            <a:ext cx="10881360" cy="2606040"/>
+          </a:xfrm>
+          <a:prstGeom prst="roundRect">
+            <a:avLst>
+              <a:gd name="adj" fmla="val 2105"/>
+            </a:avLst>
+          </a:prstGeom>
+          <a:solidFill>
+            <a:srgbClr val="FFFFFF"/>
+          </a:solidFill>
+          <a:ln w="12700">
+            <a:solidFill>
+              <a:srgbClr val="E4DCCB"/>
+            </a:solidFill>
+            <a:prstDash val="solid"/>
+          </a:ln>
+        </p:spPr>
+      </p:sp>
+      <p:sp>
+        <p:nvSpPr>
+          <p:cNvPr id="5" name="Shape 3"/>
+          <p:cNvSpPr/>
+          <p:nvPr/>
+        </p:nvSpPr>
+        <p:spPr>
+          <a:xfrm>
+            <a:off x="640080" y="1005840"/>
+            <a:ext cx="54864" cy="2606040"/>
+          </a:xfrm>
+          <a:prstGeom prst="rect">
+            <a:avLst/>
+          </a:prstGeom>
+          <a:solidFill>
+            <a:srgbClr val="1D6FE0"/>
+          </a:solidFill>
+          <a:ln/>
+        </p:spPr>
+      </p:sp>
+      <p:sp>
+        <p:nvSpPr>
+          <p:cNvPr id="6" name="Text 4"/>
+          <p:cNvSpPr/>
+          <p:nvPr/>
+        </p:nvSpPr>
+        <p:spPr>
+          <a:xfrm>
+            <a:off x="914400" y="1133856"/>
+            <a:ext cx="10332720" cy="365760"/>
           </a:xfrm>
           <a:prstGeom prst="rect">
             <a:avLst/>
@@ -44327,46 +44674,7 @@
             <a:r>
               <a:rPr lang="en-US" sz="1500" b="1" dirty="0">
                 <a:solidFill>
-                  <a:srgbClr val="C9A96A"/>
-                </a:solidFill>
-                <a:latin typeface="Segoe UI" pitchFamily="34" charset="0"/>
-                <a:ea typeface="Segoe UI" pitchFamily="34" charset="-122"/>
-                <a:cs typeface="Segoe UI" pitchFamily="34" charset="-120"/>
-              </a:rPr>
-              <a:t>19</a:t>
-            </a:r>
-            <a:endParaRPr lang="en-US" sz="1500" dirty="0"/>
-          </a:p>
-        </p:txBody>
-      </p:sp>
-      <p:sp>
-        <p:nvSpPr>
-          <p:cNvPr id="4" name="Text 2"/>
-          <p:cNvSpPr/>
-          <p:nvPr/>
-        </p:nvSpPr>
-        <p:spPr>
-          <a:xfrm>
-            <a:off x="640080" y="2377440"/>
-            <a:ext cx="10515600" cy="914400"/>
-          </a:xfrm>
-          <a:prstGeom prst="rect">
-            <a:avLst/>
-          </a:prstGeom>
-          <a:noFill/>
-          <a:ln/>
-        </p:spPr>
-        <p:txBody>
-          <a:bodyPr wrap="square" rtlCol="0" anchor="ctr"/>
-          <a:lstStyle/>
-          <a:p>
-            <a:pPr indent="0" marL="0">
-              <a:buNone/>
-            </a:pPr>
-            <a:r>
-              <a:rPr lang="en-US" sz="3400" b="1" dirty="0">
-                <a:solidFill>
-                  <a:srgbClr val="FFFFFF"/>
+                  <a:srgbClr val="1B1F3B"/>
                 </a:solidFill>
                 <a:latin typeface="Georgia" pitchFamily="34" charset="0"/>
                 <a:ea typeface="Georgia" pitchFamily="34" charset="-122"/>
@@ -44374,20 +44682,20 @@
               </a:rPr>
               <a:t>Marketplace</a:t>
             </a:r>
-            <a:endParaRPr lang="en-US" sz="3400" dirty="0"/>
-          </a:p>
-        </p:txBody>
-      </p:sp>
-      <p:sp>
-        <p:nvSpPr>
-          <p:cNvPr id="5" name="Text 3"/>
-          <p:cNvSpPr/>
-          <p:nvPr/>
-        </p:nvSpPr>
-        <p:spPr>
-          <a:xfrm>
-            <a:off x="640080" y="3429000"/>
-            <a:ext cx="10058400" cy="1188720"/>
+            <a:endParaRPr lang="en-US" sz="1500" dirty="0"/>
+          </a:p>
+        </p:txBody>
+      </p:sp>
+      <p:sp>
+        <p:nvSpPr>
+          <p:cNvPr id="7" name="Text 5"/>
+          <p:cNvSpPr/>
+          <p:nvPr/>
+        </p:nvSpPr>
+        <p:spPr>
+          <a:xfrm>
+            <a:off x="914400" y="1536192"/>
+            <a:ext cx="10332720" cy="1051560"/>
           </a:xfrm>
           <a:prstGeom prst="rect">
             <a:avLst/>
@@ -44401,28 +44709,318 @@
           <a:p>
             <a:pPr indent="0" marL="0">
               <a:lnSpc>
-                <a:spcPts val="1800"/>
+                <a:spcPts val="1600"/>
               </a:lnSpc>
               <a:buNone/>
             </a:pPr>
             <a:r>
-              <a:rPr lang="en-US" sz="1300" dirty="0">
-                <a:solidFill>
-                  <a:srgbClr val="C7C9E0"/>
-                </a:solidFill>
-                <a:latin typeface="Segoe UI" pitchFamily="34" charset="0"/>
-                <a:ea typeface="Segoe UI" pitchFamily="34" charset="-122"/>
-                <a:cs typeface="Segoe UI" pitchFamily="34" charset="-120"/>
-              </a:rPr>
-              <a:t>Emplacement réservé pour une future fonctionnalité de mise en relation.</a:t>
-            </a:r>
-            <a:endParaRPr lang="en-US" sz="1300" dirty="0"/>
-          </a:p>
-        </p:txBody>
-      </p:sp>
-      <p:sp>
-        <p:nvSpPr>
-          <p:cNvPr id="6" name="Text 4"/>
+              <a:rPr lang="en-US" sz="1150" dirty="0">
+                <a:solidFill>
+                  <a:srgbClr val="1B1F3B"/>
+                </a:solidFill>
+                <a:latin typeface="Segoe UI" pitchFamily="34" charset="0"/>
+                <a:ea typeface="Segoe UI" pitchFamily="34" charset="-122"/>
+                <a:cs typeface="Segoe UI" pitchFamily="34" charset="-120"/>
+              </a:rPr>
+              <a:t>Annoncée dans la liste des fonctionnalités comme 'Bientôt disponible' ; tarif non encore défini, non vendable pour l'instant.</a:t>
+            </a:r>
+            <a:endParaRPr lang="en-US" sz="1150" dirty="0"/>
+          </a:p>
+        </p:txBody>
+      </p:sp>
+      <p:sp>
+        <p:nvSpPr>
+          <p:cNvPr id="8" name="Text 6"/>
+          <p:cNvSpPr/>
+          <p:nvPr/>
+        </p:nvSpPr>
+        <p:spPr>
+          <a:xfrm>
+            <a:off x="914400" y="2743200"/>
+            <a:ext cx="10332720" cy="228600"/>
+          </a:xfrm>
+          <a:prstGeom prst="rect">
+            <a:avLst/>
+          </a:prstGeom>
+          <a:noFill/>
+          <a:ln/>
+        </p:spPr>
+        <p:txBody>
+          <a:bodyPr wrap="square" rtlCol="0" anchor="ctr"/>
+          <a:lstStyle/>
+          <a:p>
+            <a:pPr indent="0" marL="0">
+              <a:buNone/>
+            </a:pPr>
+            <a:r>
+              <a:rPr lang="en-US" sz="800" b="1" spc="100" kern="0" dirty="0">
+                <a:solidFill>
+                  <a:srgbClr val="9A7C5C"/>
+                </a:solidFill>
+                <a:latin typeface="Segoe UI" pitchFamily="34" charset="0"/>
+                <a:ea typeface="Segoe UI" pitchFamily="34" charset="-122"/>
+                <a:cs typeface="Segoe UI" pitchFamily="34" charset="-120"/>
+              </a:rPr>
+              <a:t>RÉALISATION TECHNIQUE</a:t>
+            </a:r>
+            <a:endParaRPr lang="en-US" sz="800" dirty="0"/>
+          </a:p>
+        </p:txBody>
+      </p:sp>
+      <p:sp>
+        <p:nvSpPr>
+          <p:cNvPr id="9" name="Text 7"/>
+          <p:cNvSpPr/>
+          <p:nvPr/>
+        </p:nvSpPr>
+        <p:spPr>
+          <a:xfrm>
+            <a:off x="914400" y="2990088"/>
+            <a:ext cx="10332720" cy="548640"/>
+          </a:xfrm>
+          <a:prstGeom prst="rect">
+            <a:avLst/>
+          </a:prstGeom>
+          <a:noFill/>
+          <a:ln/>
+        </p:spPr>
+        <p:txBody>
+          <a:bodyPr wrap="square" rtlCol="0" anchor="ctr"/>
+          <a:lstStyle/>
+          <a:p>
+            <a:pPr indent="0" marL="0">
+              <a:lnSpc>
+                <a:spcPts val="1400"/>
+              </a:lnSpc>
+              <a:buNone/>
+            </a:pPr>
+            <a:r>
+              <a:rPr lang="en-US" sz="1000" i="1" dirty="0">
+                <a:solidFill>
+                  <a:srgbClr val="8A7C68"/>
+                </a:solidFill>
+                <a:latin typeface="Segoe UI" pitchFamily="34" charset="0"/>
+                <a:ea typeface="Segoe UI" pitchFamily="34" charset="-122"/>
+                <a:cs typeface="Segoe UI" pitchFamily="34" charset="-120"/>
+              </a:rPr>
+              <a:t>Affichage informatif uniquement sur /abonnement et /parametres/abonnement, sans prix Stripe associé.</a:t>
+            </a:r>
+            <a:endParaRPr lang="en-US" sz="1000" dirty="0"/>
+          </a:p>
+        </p:txBody>
+      </p:sp>
+      <p:sp>
+        <p:nvSpPr>
+          <p:cNvPr id="10" name="Shape 8"/>
+          <p:cNvSpPr/>
+          <p:nvPr/>
+        </p:nvSpPr>
+        <p:spPr>
+          <a:xfrm>
+            <a:off x="640080" y="3813048"/>
+            <a:ext cx="10881360" cy="2606040"/>
+          </a:xfrm>
+          <a:prstGeom prst="roundRect">
+            <a:avLst>
+              <a:gd name="adj" fmla="val 2105"/>
+            </a:avLst>
+          </a:prstGeom>
+          <a:solidFill>
+            <a:srgbClr val="FFFFFF"/>
+          </a:solidFill>
+          <a:ln w="12700">
+            <a:solidFill>
+              <a:srgbClr val="E4DCCB"/>
+            </a:solidFill>
+            <a:prstDash val="solid"/>
+          </a:ln>
+        </p:spPr>
+      </p:sp>
+      <p:sp>
+        <p:nvSpPr>
+          <p:cNvPr id="11" name="Shape 9"/>
+          <p:cNvSpPr/>
+          <p:nvPr/>
+        </p:nvSpPr>
+        <p:spPr>
+          <a:xfrm>
+            <a:off x="640080" y="3813048"/>
+            <a:ext cx="54864" cy="2606040"/>
+          </a:xfrm>
+          <a:prstGeom prst="rect">
+            <a:avLst/>
+          </a:prstGeom>
+          <a:solidFill>
+            <a:srgbClr val="1D6FE0"/>
+          </a:solidFill>
+          <a:ln/>
+        </p:spPr>
+      </p:sp>
+      <p:sp>
+        <p:nvSpPr>
+          <p:cNvPr id="12" name="Text 10"/>
+          <p:cNvSpPr/>
+          <p:nvPr/>
+        </p:nvSpPr>
+        <p:spPr>
+          <a:xfrm>
+            <a:off x="914400" y="3941064"/>
+            <a:ext cx="10332720" cy="365760"/>
+          </a:xfrm>
+          <a:prstGeom prst="rect">
+            <a:avLst/>
+          </a:prstGeom>
+          <a:noFill/>
+          <a:ln/>
+        </p:spPr>
+        <p:txBody>
+          <a:bodyPr wrap="square" rtlCol="0" anchor="ctr"/>
+          <a:lstStyle/>
+          <a:p>
+            <a:pPr indent="0" marL="0">
+              <a:buNone/>
+            </a:pPr>
+            <a:r>
+              <a:rPr lang="en-US" sz="1500" b="1" dirty="0">
+                <a:solidFill>
+                  <a:srgbClr val="1B1F3B"/>
+                </a:solidFill>
+                <a:latin typeface="Georgia" pitchFamily="34" charset="0"/>
+                <a:ea typeface="Georgia" pitchFamily="34" charset="-122"/>
+                <a:cs typeface="Georgia" pitchFamily="34" charset="-120"/>
+              </a:rPr>
+              <a:t>Gestion de l'abonnement</a:t>
+            </a:r>
+            <a:endParaRPr lang="en-US" sz="1500" dirty="0"/>
+          </a:p>
+        </p:txBody>
+      </p:sp>
+      <p:sp>
+        <p:nvSpPr>
+          <p:cNvPr id="13" name="Text 11"/>
+          <p:cNvSpPr/>
+          <p:nvPr/>
+        </p:nvSpPr>
+        <p:spPr>
+          <a:xfrm>
+            <a:off x="914400" y="4343400"/>
+            <a:ext cx="10332720" cy="1051560"/>
+          </a:xfrm>
+          <a:prstGeom prst="rect">
+            <a:avLst/>
+          </a:prstGeom>
+          <a:noFill/>
+          <a:ln/>
+        </p:spPr>
+        <p:txBody>
+          <a:bodyPr wrap="square" rtlCol="0" anchor="ctr"/>
+          <a:lstStyle/>
+          <a:p>
+            <a:pPr indent="0" marL="0">
+              <a:lnSpc>
+                <a:spcPts val="1600"/>
+              </a:lnSpc>
+              <a:buNone/>
+            </a:pPr>
+            <a:r>
+              <a:rPr lang="en-US" sz="1150" dirty="0">
+                <a:solidFill>
+                  <a:srgbClr val="1B1F3B"/>
+                </a:solidFill>
+                <a:latin typeface="Segoe UI" pitchFamily="34" charset="0"/>
+                <a:ea typeface="Segoe UI" pitchFamily="34" charset="-122"/>
+                <a:cs typeface="Segoe UI" pitchFamily="34" charset="-120"/>
+              </a:rPr>
+              <a:t>Depuis Paramètres &gt; Abonnement : formule et statut actuels, bouton 'Gérer mon abonnement' ouvrant l'espace Stripe (moyen de paiement, factures, résiliation).</a:t>
+            </a:r>
+            <a:endParaRPr lang="en-US" sz="1150" dirty="0"/>
+          </a:p>
+        </p:txBody>
+      </p:sp>
+      <p:sp>
+        <p:nvSpPr>
+          <p:cNvPr id="14" name="Text 12"/>
+          <p:cNvSpPr/>
+          <p:nvPr/>
+        </p:nvSpPr>
+        <p:spPr>
+          <a:xfrm>
+            <a:off x="914400" y="5550408"/>
+            <a:ext cx="10332720" cy="228600"/>
+          </a:xfrm>
+          <a:prstGeom prst="rect">
+            <a:avLst/>
+          </a:prstGeom>
+          <a:noFill/>
+          <a:ln/>
+        </p:spPr>
+        <p:txBody>
+          <a:bodyPr wrap="square" rtlCol="0" anchor="ctr"/>
+          <a:lstStyle/>
+          <a:p>
+            <a:pPr indent="0" marL="0">
+              <a:buNone/>
+            </a:pPr>
+            <a:r>
+              <a:rPr lang="en-US" sz="800" b="1" spc="100" kern="0" dirty="0">
+                <a:solidFill>
+                  <a:srgbClr val="9A7C5C"/>
+                </a:solidFill>
+                <a:latin typeface="Segoe UI" pitchFamily="34" charset="0"/>
+                <a:ea typeface="Segoe UI" pitchFamily="34" charset="-122"/>
+                <a:cs typeface="Segoe UI" pitchFamily="34" charset="-120"/>
+              </a:rPr>
+              <a:t>RÉALISATION TECHNIQUE</a:t>
+            </a:r>
+            <a:endParaRPr lang="en-US" sz="800" dirty="0"/>
+          </a:p>
+        </p:txBody>
+      </p:sp>
+      <p:sp>
+        <p:nvSpPr>
+          <p:cNvPr id="15" name="Text 13"/>
+          <p:cNvSpPr/>
+          <p:nvPr/>
+        </p:nvSpPr>
+        <p:spPr>
+          <a:xfrm>
+            <a:off x="914400" y="5797296"/>
+            <a:ext cx="10332720" cy="548640"/>
+          </a:xfrm>
+          <a:prstGeom prst="rect">
+            <a:avLst/>
+          </a:prstGeom>
+          <a:noFill/>
+          <a:ln/>
+        </p:spPr>
+        <p:txBody>
+          <a:bodyPr wrap="square" rtlCol="0" anchor="ctr"/>
+          <a:lstStyle/>
+          <a:p>
+            <a:pPr indent="0" marL="0">
+              <a:lnSpc>
+                <a:spcPts val="1400"/>
+              </a:lnSpc>
+              <a:buNone/>
+            </a:pPr>
+            <a:r>
+              <a:rPr lang="en-US" sz="1000" i="1" dirty="0">
+                <a:solidFill>
+                  <a:srgbClr val="8A7C68"/>
+                </a:solidFill>
+                <a:latin typeface="Segoe UI" pitchFamily="34" charset="0"/>
+                <a:ea typeface="Segoe UI" pitchFamily="34" charset="-122"/>
+                <a:cs typeface="Segoe UI" pitchFamily="34" charset="-120"/>
+              </a:rPr>
+              <a:t>/api/billing/portal (Stripe Customer Portal).</a:t>
+            </a:r>
+            <a:endParaRPr lang="en-US" sz="1000" dirty="0"/>
+          </a:p>
+        </p:txBody>
+      </p:sp>
+      <p:sp>
+        <p:nvSpPr>
+          <p:cNvPr id="16" name="Text 14"/>
           <p:cNvSpPr/>
           <p:nvPr/>
         </p:nvSpPr>
@@ -44461,7 +45059,7 @@
       </p:sp>
       <p:sp>
         <p:nvSpPr>
-          <p:cNvPr id="7" name="Text 5"/>
+          <p:cNvPr id="17" name="Text 15"/>
           <p:cNvSpPr/>
           <p:nvPr/>
         </p:nvSpPr>
@@ -44585,7 +45183,7 @@
                 <a:ea typeface="Segoe UI" pitchFamily="34" charset="-122"/>
                 <a:cs typeface="Segoe UI" pitchFamily="34" charset="-120"/>
               </a:rPr>
-              <a:t>MARKETPLACE</a:t>
+              <a:t>ABONNEMENT</a:t>
             </a:r>
             <a:endParaRPr lang="en-US" sz="950" dirty="0"/>
           </a:p>
@@ -44671,7 +45269,7 @@
                 <a:ea typeface="Georgia" pitchFamily="34" charset="-122"/>
                 <a:cs typeface="Georgia" pitchFamily="34" charset="-120"/>
               </a:rPr>
-              <a:t>Statut actuel</a:t>
+              <a:t>Comptes existants préservés</a:t>
             </a:r>
             <a:endParaRPr lang="en-US" sz="1500" dirty="0"/>
           </a:p>
@@ -44713,7 +45311,7 @@
                 <a:ea typeface="Segoe UI" pitchFamily="34" charset="-122"/>
                 <a:cs typeface="Segoe UI" pitchFamily="34" charset="-120"/>
               </a:rPr>
-              <a:t>Page "bientôt disponible" — accessible depuis le menu, sans fonctionnalité active pour le moment.</a:t>
+              <a:t>Les comptes créés avant la mise en place du paiement réel gardent un accès illimité ; seuls les nouveaux comptes sont réellement soumis à la période d'essai limitée tant qu'ils n'ont pas souscrit.</a:t>
             </a:r>
             <a:endParaRPr lang="en-US" sz="1150" dirty="0"/>
           </a:p>
@@ -44882,7 +45480,7 @@
                 <a:ea typeface="Segoe UI" pitchFamily="34" charset="-122"/>
                 <a:cs typeface="Segoe UI" pitchFamily="34" charset="-120"/>
               </a:rPr>
-              <a:t>20</a:t>
+              <a:t>19</a:t>
             </a:r>
             <a:endParaRPr lang="en-US" sz="1500" dirty="0"/>
           </a:p>
@@ -44921,7 +45519,7 @@
                 <a:ea typeface="Georgia" pitchFamily="34" charset="-122"/>
                 <a:cs typeface="Georgia" pitchFamily="34" charset="-120"/>
               </a:rPr>
-              <a:t>Sécurité, données et multilinguisme</a:t>
+              <a:t>Marketplace</a:t>
             </a:r>
             <a:endParaRPr lang="en-US" sz="3400" dirty="0"/>
           </a:p>
@@ -44963,7 +45561,7 @@
                 <a:ea typeface="Segoe UI" pitchFamily="34" charset="-122"/>
                 <a:cs typeface="Segoe UI" pitchFamily="34" charset="-120"/>
               </a:rPr>
-              <a:t>Éléments transverses garantissant la cohérence, la sécurité et l'accessibilité de l'application à travers tous les modules.</a:t>
+              <a:t>Emplacement réservé pour une future fonctionnalité de mise en relation.</a:t>
             </a:r>
             <a:endParaRPr lang="en-US" sz="1300" dirty="0"/>
           </a:p>
@@ -45134,7 +45732,7 @@
                 <a:ea typeface="Segoe UI" pitchFamily="34" charset="-122"/>
                 <a:cs typeface="Segoe UI" pitchFamily="34" charset="-120"/>
               </a:rPr>
-              <a:t>SÉCURITÉ, DONNÉES ET MULTILINGUISME</a:t>
+              <a:t>MARKETPLACE</a:t>
             </a:r>
             <a:endParaRPr lang="en-US" sz="950" dirty="0"/>
           </a:p>
@@ -45220,7 +45818,7 @@
                 <a:ea typeface="Georgia" pitchFamily="34" charset="-122"/>
                 <a:cs typeface="Georgia" pitchFamily="34" charset="-120"/>
               </a:rPr>
-              <a:t>Cloisonnement des données</a:t>
+              <a:t>Statut actuel</a:t>
             </a:r>
             <a:endParaRPr lang="en-US" sz="1500" dirty="0"/>
           </a:p>
@@ -45262,7 +45860,7 @@
                 <a:ea typeface="Segoe UI" pitchFamily="34" charset="-122"/>
                 <a:cs typeface="Segoe UI" pitchFamily="34" charset="-120"/>
               </a:rPr>
-              <a:t>Chaque entreprise ne voit que ses propres devis, chantiers, équipe et documents.</a:t>
+              <a:t>Page "bientôt disponible" — accessible depuis le menu, sans fonctionnalité active pour le moment.</a:t>
             </a:r>
             <a:endParaRPr lang="en-US" sz="1150" dirty="0"/>
           </a:p>
@@ -45270,135 +45868,7 @@
       </p:sp>
       <p:sp>
         <p:nvSpPr>
-          <p:cNvPr id="8" name="Shape 6"/>
-          <p:cNvSpPr/>
-          <p:nvPr/>
-        </p:nvSpPr>
-        <p:spPr>
-          <a:xfrm>
-            <a:off x="640080" y="2944368"/>
-            <a:ext cx="10881360" cy="1737360"/>
-          </a:xfrm>
-          <a:prstGeom prst="roundRect">
-            <a:avLst>
-              <a:gd name="adj" fmla="val 3158"/>
-            </a:avLst>
-          </a:prstGeom>
-          <a:solidFill>
-            <a:srgbClr val="FFFFFF"/>
-          </a:solidFill>
-          <a:ln w="12700">
-            <a:solidFill>
-              <a:srgbClr val="E4DCCB"/>
-            </a:solidFill>
-            <a:prstDash val="solid"/>
-          </a:ln>
-        </p:spPr>
-      </p:sp>
-      <p:sp>
-        <p:nvSpPr>
-          <p:cNvPr id="9" name="Shape 7"/>
-          <p:cNvSpPr/>
-          <p:nvPr/>
-        </p:nvSpPr>
-        <p:spPr>
-          <a:xfrm>
-            <a:off x="640080" y="2944368"/>
-            <a:ext cx="54864" cy="1737360"/>
-          </a:xfrm>
-          <a:prstGeom prst="rect">
-            <a:avLst/>
-          </a:prstGeom>
-          <a:solidFill>
-            <a:srgbClr val="1D6FE0"/>
-          </a:solidFill>
-          <a:ln/>
-        </p:spPr>
-      </p:sp>
-      <p:sp>
-        <p:nvSpPr>
-          <p:cNvPr id="10" name="Text 8"/>
-          <p:cNvSpPr/>
-          <p:nvPr/>
-        </p:nvSpPr>
-        <p:spPr>
-          <a:xfrm>
-            <a:off x="914400" y="3072384"/>
-            <a:ext cx="10332720" cy="365760"/>
-          </a:xfrm>
-          <a:prstGeom prst="rect">
-            <a:avLst/>
-          </a:prstGeom>
-          <a:noFill/>
-          <a:ln/>
-        </p:spPr>
-        <p:txBody>
-          <a:bodyPr wrap="square" rtlCol="0" anchor="ctr"/>
-          <a:lstStyle/>
-          <a:p>
-            <a:pPr indent="0" marL="0">
-              <a:buNone/>
-            </a:pPr>
-            <a:r>
-              <a:rPr lang="en-US" sz="1500" b="1" dirty="0">
-                <a:solidFill>
-                  <a:srgbClr val="1B1F3B"/>
-                </a:solidFill>
-                <a:latin typeface="Georgia" pitchFamily="34" charset="0"/>
-                <a:ea typeface="Georgia" pitchFamily="34" charset="-122"/>
-                <a:cs typeface="Georgia" pitchFamily="34" charset="-120"/>
-              </a:rPr>
-              <a:t>Partage avec l'application mobile</a:t>
-            </a:r>
-            <a:endParaRPr lang="en-US" sz="1500" dirty="0"/>
-          </a:p>
-        </p:txBody>
-      </p:sp>
-      <p:sp>
-        <p:nvSpPr>
-          <p:cNvPr id="11" name="Text 9"/>
-          <p:cNvSpPr/>
-          <p:nvPr/>
-        </p:nvSpPr>
-        <p:spPr>
-          <a:xfrm>
-            <a:off x="914400" y="3474720"/>
-            <a:ext cx="10332720" cy="1005840"/>
-          </a:xfrm>
-          <a:prstGeom prst="rect">
-            <a:avLst/>
-          </a:prstGeom>
-          <a:noFill/>
-          <a:ln/>
-        </p:spPr>
-        <p:txBody>
-          <a:bodyPr wrap="square" rtlCol="0" anchor="ctr"/>
-          <a:lstStyle/>
-          <a:p>
-            <a:pPr indent="0" marL="0">
-              <a:lnSpc>
-                <a:spcPts val="1600"/>
-              </a:lnSpc>
-              <a:buNone/>
-            </a:pPr>
-            <a:r>
-              <a:rPr lang="en-US" sz="1150" dirty="0">
-                <a:solidFill>
-                  <a:srgbClr val="1B1F3B"/>
-                </a:solidFill>
-                <a:latin typeface="Segoe UI" pitchFamily="34" charset="0"/>
-                <a:ea typeface="Segoe UI" pitchFamily="34" charset="-122"/>
-                <a:cs typeface="Segoe UI" pitchFamily="34" charset="-120"/>
-              </a:rPr>
-              <a:t>Les devis, chantiers et comptes sont stockés dans une base commune avec l'application mobile Koji, pour que les deux applications restent synchronisées.</a:t>
-            </a:r>
-            <a:endParaRPr lang="en-US" sz="1150" dirty="0"/>
-          </a:p>
-        </p:txBody>
-      </p:sp>
-      <p:sp>
-        <p:nvSpPr>
-          <p:cNvPr id="12" name="Text 10"/>
+          <p:cNvPr id="8" name="Text 6"/>
           <p:cNvSpPr/>
           <p:nvPr/>
         </p:nvSpPr>
@@ -45437,7 +45907,7 @@
       </p:sp>
       <p:sp>
         <p:nvSpPr>
-          <p:cNvPr id="13" name="Text 11"/>
+          <p:cNvPr id="9" name="Text 7"/>
           <p:cNvSpPr/>
           <p:nvPr/>
         </p:nvSpPr>
@@ -45488,7 +45958,7 @@
     <p:bg>
       <p:bgPr>
         <a:solidFill>
-          <a:srgbClr val="F3EEE3"/>
+          <a:srgbClr val="0B1030"/>
         </a:solidFill>
       </p:bgPr>
     </p:bg>
@@ -45514,16 +45984,14 @@
         </p:nvSpPr>
         <p:spPr>
           <a:xfrm>
-            <a:off x="640080" y="411480"/>
-            <a:ext cx="3108960" cy="365760"/>
-          </a:xfrm>
-          <a:prstGeom prst="roundRect">
-            <a:avLst>
-              <a:gd name="adj" fmla="val 50000"/>
-            </a:avLst>
+            <a:off x="0" y="3246120"/>
+            <a:ext cx="12191695" cy="54864"/>
+          </a:xfrm>
+          <a:prstGeom prst="rect">
+            <a:avLst/>
           </a:prstGeom>
           <a:solidFill>
-            <a:srgbClr val="F7EADF"/>
+            <a:srgbClr val="C9A96A"/>
           </a:solidFill>
           <a:ln/>
         </p:spPr>
@@ -45536,94 +46004,8 @@
         </p:nvSpPr>
         <p:spPr>
           <a:xfrm>
-            <a:off x="640080" y="411480"/>
-            <a:ext cx="3108960" cy="365760"/>
-          </a:xfrm>
-          <a:prstGeom prst="rect">
-            <a:avLst/>
-          </a:prstGeom>
-          <a:noFill/>
-          <a:ln/>
-        </p:spPr>
-        <p:txBody>
-          <a:bodyPr wrap="square" rtlCol="0" anchor="ctr"/>
-          <a:lstStyle/>
-          <a:p>
-            <a:pPr algn="ctr" indent="0" marL="0">
-              <a:buNone/>
-            </a:pPr>
-            <a:r>
-              <a:rPr lang="en-US" sz="950" b="1" spc="100" kern="0" dirty="0">
-                <a:solidFill>
-                  <a:srgbClr val="9A7C5C"/>
-                </a:solidFill>
-                <a:latin typeface="Segoe UI" pitchFamily="34" charset="0"/>
-                <a:ea typeface="Segoe UI" pitchFamily="34" charset="-122"/>
-                <a:cs typeface="Segoe UI" pitchFamily="34" charset="-120"/>
-              </a:rPr>
-              <a:t>SÉCURITÉ, DONNÉES ET MULTILINGUISME</a:t>
-            </a:r>
-            <a:endParaRPr lang="en-US" sz="950" dirty="0"/>
-          </a:p>
-        </p:txBody>
-      </p:sp>
-      <p:sp>
-        <p:nvSpPr>
-          <p:cNvPr id="4" name="Shape 2"/>
-          <p:cNvSpPr/>
-          <p:nvPr/>
-        </p:nvSpPr>
-        <p:spPr>
-          <a:xfrm>
-            <a:off x="640080" y="1005840"/>
-            <a:ext cx="10881360" cy="1737360"/>
-          </a:xfrm>
-          <a:prstGeom prst="roundRect">
-            <a:avLst>
-              <a:gd name="adj" fmla="val 3158"/>
-            </a:avLst>
-          </a:prstGeom>
-          <a:solidFill>
-            <a:srgbClr val="FFFFFF"/>
-          </a:solidFill>
-          <a:ln w="12700">
-            <a:solidFill>
-              <a:srgbClr val="E4DCCB"/>
-            </a:solidFill>
-            <a:prstDash val="solid"/>
-          </a:ln>
-        </p:spPr>
-      </p:sp>
-      <p:sp>
-        <p:nvSpPr>
-          <p:cNvPr id="5" name="Shape 3"/>
-          <p:cNvSpPr/>
-          <p:nvPr/>
-        </p:nvSpPr>
-        <p:spPr>
-          <a:xfrm>
-            <a:off x="640080" y="1005840"/>
-            <a:ext cx="54864" cy="1737360"/>
-          </a:xfrm>
-          <a:prstGeom prst="rect">
-            <a:avLst/>
-          </a:prstGeom>
-          <a:solidFill>
-            <a:srgbClr val="1D6FE0"/>
-          </a:solidFill>
-          <a:ln/>
-        </p:spPr>
-      </p:sp>
-      <p:sp>
-        <p:nvSpPr>
-          <p:cNvPr id="6" name="Text 4"/>
-          <p:cNvSpPr/>
-          <p:nvPr/>
-        </p:nvSpPr>
-        <p:spPr>
-          <a:xfrm>
-            <a:off x="914400" y="1133856"/>
-            <a:ext cx="10332720" cy="365760"/>
+            <a:off x="640080" y="1920240"/>
+            <a:ext cx="2743200" cy="548640"/>
           </a:xfrm>
           <a:prstGeom prst="rect">
             <a:avLst/>
@@ -45641,28 +46023,67 @@
             <a:r>
               <a:rPr lang="en-US" sz="1500" b="1" dirty="0">
                 <a:solidFill>
-                  <a:srgbClr val="1B1F3B"/>
+                  <a:srgbClr val="C9A96A"/>
+                </a:solidFill>
+                <a:latin typeface="Segoe UI" pitchFamily="34" charset="0"/>
+                <a:ea typeface="Segoe UI" pitchFamily="34" charset="-122"/>
+                <a:cs typeface="Segoe UI" pitchFamily="34" charset="-120"/>
+              </a:rPr>
+              <a:t>20</a:t>
+            </a:r>
+            <a:endParaRPr lang="en-US" sz="1500" dirty="0"/>
+          </a:p>
+        </p:txBody>
+      </p:sp>
+      <p:sp>
+        <p:nvSpPr>
+          <p:cNvPr id="4" name="Text 2"/>
+          <p:cNvSpPr/>
+          <p:nvPr/>
+        </p:nvSpPr>
+        <p:spPr>
+          <a:xfrm>
+            <a:off x="640080" y="2377440"/>
+            <a:ext cx="10515600" cy="914400"/>
+          </a:xfrm>
+          <a:prstGeom prst="rect">
+            <a:avLst/>
+          </a:prstGeom>
+          <a:noFill/>
+          <a:ln/>
+        </p:spPr>
+        <p:txBody>
+          <a:bodyPr wrap="square" rtlCol="0" anchor="ctr"/>
+          <a:lstStyle/>
+          <a:p>
+            <a:pPr indent="0" marL="0">
+              <a:buNone/>
+            </a:pPr>
+            <a:r>
+              <a:rPr lang="en-US" sz="3400" b="1" dirty="0">
+                <a:solidFill>
+                  <a:srgbClr val="FFFFFF"/>
                 </a:solidFill>
                 <a:latin typeface="Georgia" pitchFamily="34" charset="0"/>
                 <a:ea typeface="Georgia" pitchFamily="34" charset="-122"/>
                 <a:cs typeface="Georgia" pitchFamily="34" charset="-120"/>
               </a:rPr>
-              <a:t>Mots de passe</a:t>
-            </a:r>
-            <a:endParaRPr lang="en-US" sz="1500" dirty="0"/>
-          </a:p>
-        </p:txBody>
-      </p:sp>
-      <p:sp>
-        <p:nvSpPr>
-          <p:cNvPr id="7" name="Text 5"/>
-          <p:cNvSpPr/>
-          <p:nvPr/>
-        </p:nvSpPr>
-        <p:spPr>
-          <a:xfrm>
-            <a:off x="914400" y="1536192"/>
-            <a:ext cx="10332720" cy="1005840"/>
+              <a:t>Sécurité, données et multilinguisme</a:t>
+            </a:r>
+            <a:endParaRPr lang="en-US" sz="3400" dirty="0"/>
+          </a:p>
+        </p:txBody>
+      </p:sp>
+      <p:sp>
+        <p:nvSpPr>
+          <p:cNvPr id="5" name="Text 3"/>
+          <p:cNvSpPr/>
+          <p:nvPr/>
+        </p:nvSpPr>
+        <p:spPr>
+          <a:xfrm>
+            <a:off x="640080" y="3429000"/>
+            <a:ext cx="10058400" cy="1188720"/>
           </a:xfrm>
           <a:prstGeom prst="rect">
             <a:avLst/>
@@ -45676,156 +46097,28 @@
           <a:p>
             <a:pPr indent="0" marL="0">
               <a:lnSpc>
-                <a:spcPts val="1600"/>
+                <a:spcPts val="1800"/>
               </a:lnSpc>
               <a:buNone/>
             </a:pPr>
             <a:r>
-              <a:rPr lang="en-US" sz="1150" dirty="0">
-                <a:solidFill>
-                  <a:srgbClr val="1B1F3B"/>
-                </a:solidFill>
-                <a:latin typeface="Segoe UI" pitchFamily="34" charset="0"/>
-                <a:ea typeface="Segoe UI" pitchFamily="34" charset="-122"/>
-                <a:cs typeface="Segoe UI" pitchFamily="34" charset="-120"/>
-              </a:rPr>
-              <a:t>Mots de passe des ouvriers hachés (jamais stockés en clair) ; mots de passe entreprise/particulier gérés par Supabase Auth.</a:t>
-            </a:r>
-            <a:endParaRPr lang="en-US" sz="1150" dirty="0"/>
-          </a:p>
-        </p:txBody>
-      </p:sp>
-      <p:sp>
-        <p:nvSpPr>
-          <p:cNvPr id="8" name="Shape 6"/>
-          <p:cNvSpPr/>
-          <p:nvPr/>
-        </p:nvSpPr>
-        <p:spPr>
-          <a:xfrm>
-            <a:off x="640080" y="2944368"/>
-            <a:ext cx="10881360" cy="1737360"/>
-          </a:xfrm>
-          <a:prstGeom prst="roundRect">
-            <a:avLst>
-              <a:gd name="adj" fmla="val 3158"/>
-            </a:avLst>
-          </a:prstGeom>
-          <a:solidFill>
-            <a:srgbClr val="FFFFFF"/>
-          </a:solidFill>
-          <a:ln w="12700">
-            <a:solidFill>
-              <a:srgbClr val="E4DCCB"/>
-            </a:solidFill>
-            <a:prstDash val="solid"/>
-          </a:ln>
-        </p:spPr>
-      </p:sp>
-      <p:sp>
-        <p:nvSpPr>
-          <p:cNvPr id="9" name="Shape 7"/>
-          <p:cNvSpPr/>
-          <p:nvPr/>
-        </p:nvSpPr>
-        <p:spPr>
-          <a:xfrm>
-            <a:off x="640080" y="2944368"/>
-            <a:ext cx="54864" cy="1737360"/>
-          </a:xfrm>
-          <a:prstGeom prst="rect">
-            <a:avLst/>
-          </a:prstGeom>
-          <a:solidFill>
-            <a:srgbClr val="1D6FE0"/>
-          </a:solidFill>
-          <a:ln/>
-        </p:spPr>
-      </p:sp>
-      <p:sp>
-        <p:nvSpPr>
-          <p:cNvPr id="10" name="Text 8"/>
-          <p:cNvSpPr/>
-          <p:nvPr/>
-        </p:nvSpPr>
-        <p:spPr>
-          <a:xfrm>
-            <a:off x="914400" y="3072384"/>
-            <a:ext cx="10332720" cy="365760"/>
-          </a:xfrm>
-          <a:prstGeom prst="rect">
-            <a:avLst/>
-          </a:prstGeom>
-          <a:noFill/>
-          <a:ln/>
-        </p:spPr>
-        <p:txBody>
-          <a:bodyPr wrap="square" rtlCol="0" anchor="ctr"/>
-          <a:lstStyle/>
-          <a:p>
-            <a:pPr indent="0" marL="0">
-              <a:buNone/>
-            </a:pPr>
-            <a:r>
-              <a:rPr lang="en-US" sz="1500" b="1" dirty="0">
-                <a:solidFill>
-                  <a:srgbClr val="1B1F3B"/>
-                </a:solidFill>
-                <a:latin typeface="Georgia" pitchFamily="34" charset="0"/>
-                <a:ea typeface="Georgia" pitchFamily="34" charset="-122"/>
-                <a:cs typeface="Georgia" pitchFamily="34" charset="-120"/>
-              </a:rPr>
-              <a:t>Multilingue</a:t>
-            </a:r>
-            <a:endParaRPr lang="en-US" sz="1500" dirty="0"/>
-          </a:p>
-        </p:txBody>
-      </p:sp>
-      <p:sp>
-        <p:nvSpPr>
-          <p:cNvPr id="11" name="Text 9"/>
-          <p:cNvSpPr/>
-          <p:nvPr/>
-        </p:nvSpPr>
-        <p:spPr>
-          <a:xfrm>
-            <a:off x="914400" y="3474720"/>
-            <a:ext cx="10332720" cy="1005840"/>
-          </a:xfrm>
-          <a:prstGeom prst="rect">
-            <a:avLst/>
-          </a:prstGeom>
-          <a:noFill/>
-          <a:ln/>
-        </p:spPr>
-        <p:txBody>
-          <a:bodyPr wrap="square" rtlCol="0" anchor="ctr"/>
-          <a:lstStyle/>
-          <a:p>
-            <a:pPr indent="0" marL="0">
-              <a:lnSpc>
-                <a:spcPts val="1600"/>
-              </a:lnSpc>
-              <a:buNone/>
-            </a:pPr>
-            <a:r>
-              <a:rPr lang="en-US" sz="1150" dirty="0">
-                <a:solidFill>
-                  <a:srgbClr val="1B1F3B"/>
-                </a:solidFill>
-                <a:latin typeface="Segoe UI" pitchFamily="34" charset="0"/>
-                <a:ea typeface="Segoe UI" pitchFamily="34" charset="-122"/>
-                <a:cs typeface="Segoe UI" pitchFamily="34" charset="-120"/>
-              </a:rPr>
-              <a:t>5 langues disponibles (français, anglais, arabe, allemand, italien), avec adaptation du sens de lecture pour l'arabe.</a:t>
-            </a:r>
-            <a:endParaRPr lang="en-US" sz="1150" dirty="0"/>
-          </a:p>
-        </p:txBody>
-      </p:sp>
-      <p:sp>
-        <p:nvSpPr>
-          <p:cNvPr id="12" name="Text 10"/>
+              <a:rPr lang="en-US" sz="1300" dirty="0">
+                <a:solidFill>
+                  <a:srgbClr val="C7C9E0"/>
+                </a:solidFill>
+                <a:latin typeface="Segoe UI" pitchFamily="34" charset="0"/>
+                <a:ea typeface="Segoe UI" pitchFamily="34" charset="-122"/>
+                <a:cs typeface="Segoe UI" pitchFamily="34" charset="-120"/>
+              </a:rPr>
+              <a:t>Éléments transverses garantissant la cohérence, la sécurité et l'accessibilité de l'application à travers tous les modules.</a:t>
+            </a:r>
+            <a:endParaRPr lang="en-US" sz="1300" dirty="0"/>
+          </a:p>
+        </p:txBody>
+      </p:sp>
+      <p:sp>
+        <p:nvSpPr>
+          <p:cNvPr id="6" name="Text 4"/>
           <p:cNvSpPr/>
           <p:nvPr/>
         </p:nvSpPr>
@@ -45864,7 +46157,7 @@
       </p:sp>
       <p:sp>
         <p:nvSpPr>
-          <p:cNvPr id="13" name="Text 11"/>
+          <p:cNvPr id="7" name="Text 5"/>
           <p:cNvSpPr/>
           <p:nvPr/>
         </p:nvSpPr>
@@ -46074,7 +46367,7 @@
                 <a:ea typeface="Georgia" pitchFamily="34" charset="-122"/>
                 <a:cs typeface="Georgia" pitchFamily="34" charset="-120"/>
               </a:rPr>
-              <a:t>Historique des actions</a:t>
+              <a:t>Cloisonnement des données</a:t>
             </a:r>
             <a:endParaRPr lang="en-US" sz="1500" dirty="0"/>
           </a:p>
@@ -46116,7 +46409,7 @@
                 <a:ea typeface="Segoe UI" pitchFamily="34" charset="-122"/>
                 <a:cs typeface="Segoe UI" pitchFamily="34" charset="-120"/>
               </a:rPr>
-              <a:t>Chaque action importante (création, modification, suppression) est journalisée pour garder une trace de l'activité.</a:t>
+              <a:t>Chaque entreprise ne voit que ses propres devis, chantiers, équipe et documents.</a:t>
             </a:r>
             <a:endParaRPr lang="en-US" sz="1150" dirty="0"/>
           </a:p>
@@ -46124,7 +46417,135 @@
       </p:sp>
       <p:sp>
         <p:nvSpPr>
-          <p:cNvPr id="8" name="Text 6"/>
+          <p:cNvPr id="8" name="Shape 6"/>
+          <p:cNvSpPr/>
+          <p:nvPr/>
+        </p:nvSpPr>
+        <p:spPr>
+          <a:xfrm>
+            <a:off x="640080" y="2944368"/>
+            <a:ext cx="10881360" cy="1737360"/>
+          </a:xfrm>
+          <a:prstGeom prst="roundRect">
+            <a:avLst>
+              <a:gd name="adj" fmla="val 3158"/>
+            </a:avLst>
+          </a:prstGeom>
+          <a:solidFill>
+            <a:srgbClr val="FFFFFF"/>
+          </a:solidFill>
+          <a:ln w="12700">
+            <a:solidFill>
+              <a:srgbClr val="E4DCCB"/>
+            </a:solidFill>
+            <a:prstDash val="solid"/>
+          </a:ln>
+        </p:spPr>
+      </p:sp>
+      <p:sp>
+        <p:nvSpPr>
+          <p:cNvPr id="9" name="Shape 7"/>
+          <p:cNvSpPr/>
+          <p:nvPr/>
+        </p:nvSpPr>
+        <p:spPr>
+          <a:xfrm>
+            <a:off x="640080" y="2944368"/>
+            <a:ext cx="54864" cy="1737360"/>
+          </a:xfrm>
+          <a:prstGeom prst="rect">
+            <a:avLst/>
+          </a:prstGeom>
+          <a:solidFill>
+            <a:srgbClr val="1D6FE0"/>
+          </a:solidFill>
+          <a:ln/>
+        </p:spPr>
+      </p:sp>
+      <p:sp>
+        <p:nvSpPr>
+          <p:cNvPr id="10" name="Text 8"/>
+          <p:cNvSpPr/>
+          <p:nvPr/>
+        </p:nvSpPr>
+        <p:spPr>
+          <a:xfrm>
+            <a:off x="914400" y="3072384"/>
+            <a:ext cx="10332720" cy="365760"/>
+          </a:xfrm>
+          <a:prstGeom prst="rect">
+            <a:avLst/>
+          </a:prstGeom>
+          <a:noFill/>
+          <a:ln/>
+        </p:spPr>
+        <p:txBody>
+          <a:bodyPr wrap="square" rtlCol="0" anchor="ctr"/>
+          <a:lstStyle/>
+          <a:p>
+            <a:pPr indent="0" marL="0">
+              <a:buNone/>
+            </a:pPr>
+            <a:r>
+              <a:rPr lang="en-US" sz="1500" b="1" dirty="0">
+                <a:solidFill>
+                  <a:srgbClr val="1B1F3B"/>
+                </a:solidFill>
+                <a:latin typeface="Georgia" pitchFamily="34" charset="0"/>
+                <a:ea typeface="Georgia" pitchFamily="34" charset="-122"/>
+                <a:cs typeface="Georgia" pitchFamily="34" charset="-120"/>
+              </a:rPr>
+              <a:t>Partage avec l'application mobile</a:t>
+            </a:r>
+            <a:endParaRPr lang="en-US" sz="1500" dirty="0"/>
+          </a:p>
+        </p:txBody>
+      </p:sp>
+      <p:sp>
+        <p:nvSpPr>
+          <p:cNvPr id="11" name="Text 9"/>
+          <p:cNvSpPr/>
+          <p:nvPr/>
+        </p:nvSpPr>
+        <p:spPr>
+          <a:xfrm>
+            <a:off x="914400" y="3474720"/>
+            <a:ext cx="10332720" cy="1005840"/>
+          </a:xfrm>
+          <a:prstGeom prst="rect">
+            <a:avLst/>
+          </a:prstGeom>
+          <a:noFill/>
+          <a:ln/>
+        </p:spPr>
+        <p:txBody>
+          <a:bodyPr wrap="square" rtlCol="0" anchor="ctr"/>
+          <a:lstStyle/>
+          <a:p>
+            <a:pPr indent="0" marL="0">
+              <a:lnSpc>
+                <a:spcPts val="1600"/>
+              </a:lnSpc>
+              <a:buNone/>
+            </a:pPr>
+            <a:r>
+              <a:rPr lang="en-US" sz="1150" dirty="0">
+                <a:solidFill>
+                  <a:srgbClr val="1B1F3B"/>
+                </a:solidFill>
+                <a:latin typeface="Segoe UI" pitchFamily="34" charset="0"/>
+                <a:ea typeface="Segoe UI" pitchFamily="34" charset="-122"/>
+                <a:cs typeface="Segoe UI" pitchFamily="34" charset="-120"/>
+              </a:rPr>
+              <a:t>Les devis, chantiers et comptes sont stockés dans une base commune avec l'application mobile Koji, pour que les deux applications restent synchronisées.</a:t>
+            </a:r>
+            <a:endParaRPr lang="en-US" sz="1150" dirty="0"/>
+          </a:p>
+        </p:txBody>
+      </p:sp>
+      <p:sp>
+        <p:nvSpPr>
+          <p:cNvPr id="12" name="Text 10"/>
           <p:cNvSpPr/>
           <p:nvPr/>
         </p:nvSpPr>
@@ -46163,7 +46584,7 @@
       </p:sp>
       <p:sp>
         <p:nvSpPr>
-          <p:cNvPr id="9" name="Text 7"/>
+          <p:cNvPr id="13" name="Text 11"/>
           <p:cNvSpPr/>
           <p:nvPr/>
         </p:nvSpPr>
@@ -46214,7 +46635,7 @@
     <p:bg>
       <p:bgPr>
         <a:solidFill>
-          <a:srgbClr val="0B1030"/>
+          <a:srgbClr val="F3EEE3"/>
         </a:solidFill>
       </p:bgPr>
     </p:bg>
@@ -46234,53 +46655,161 @@
       </p:grpSpPr>
       <p:sp>
         <p:nvSpPr>
-          <p:cNvPr id="2" name="Text 0"/>
-          <p:cNvSpPr/>
-          <p:nvPr/>
-        </p:nvSpPr>
-        <p:spPr>
-          <a:xfrm>
-            <a:off x="640080" y="2286000"/>
-            <a:ext cx="9144000" cy="822960"/>
-          </a:xfrm>
-          <a:prstGeom prst="rect">
-            <a:avLst/>
-          </a:prstGeom>
-          <a:noFill/>
-          <a:ln/>
-        </p:spPr>
-        <p:txBody>
-          <a:bodyPr wrap="square" rtlCol="0" anchor="ctr"/>
-          <a:lstStyle/>
-          <a:p>
-            <a:pPr indent="0" marL="0">
-              <a:buNone/>
-            </a:pPr>
-            <a:r>
-              <a:rPr lang="en-US" sz="3400" b="1" dirty="0">
-                <a:solidFill>
-                  <a:srgbClr val="FFFFFF"/>
+          <p:cNvPr id="2" name="Shape 0"/>
+          <p:cNvSpPr/>
+          <p:nvPr/>
+        </p:nvSpPr>
+        <p:spPr>
+          <a:xfrm>
+            <a:off x="640080" y="411480"/>
+            <a:ext cx="3108960" cy="365760"/>
+          </a:xfrm>
+          <a:prstGeom prst="roundRect">
+            <a:avLst>
+              <a:gd name="adj" fmla="val 50000"/>
+            </a:avLst>
+          </a:prstGeom>
+          <a:solidFill>
+            <a:srgbClr val="F7EADF"/>
+          </a:solidFill>
+          <a:ln/>
+        </p:spPr>
+      </p:sp>
+      <p:sp>
+        <p:nvSpPr>
+          <p:cNvPr id="3" name="Text 1"/>
+          <p:cNvSpPr/>
+          <p:nvPr/>
+        </p:nvSpPr>
+        <p:spPr>
+          <a:xfrm>
+            <a:off x="640080" y="411480"/>
+            <a:ext cx="3108960" cy="365760"/>
+          </a:xfrm>
+          <a:prstGeom prst="rect">
+            <a:avLst/>
+          </a:prstGeom>
+          <a:noFill/>
+          <a:ln/>
+        </p:spPr>
+        <p:txBody>
+          <a:bodyPr wrap="square" rtlCol="0" anchor="ctr"/>
+          <a:lstStyle/>
+          <a:p>
+            <a:pPr algn="ctr" indent="0" marL="0">
+              <a:buNone/>
+            </a:pPr>
+            <a:r>
+              <a:rPr lang="en-US" sz="950" b="1" spc="100" kern="0" dirty="0">
+                <a:solidFill>
+                  <a:srgbClr val="9A7C5C"/>
+                </a:solidFill>
+                <a:latin typeface="Segoe UI" pitchFamily="34" charset="0"/>
+                <a:ea typeface="Segoe UI" pitchFamily="34" charset="-122"/>
+                <a:cs typeface="Segoe UI" pitchFamily="34" charset="-120"/>
+              </a:rPr>
+              <a:t>SÉCURITÉ, DONNÉES ET MULTILINGUISME</a:t>
+            </a:r>
+            <a:endParaRPr lang="en-US" sz="950" dirty="0"/>
+          </a:p>
+        </p:txBody>
+      </p:sp>
+      <p:sp>
+        <p:nvSpPr>
+          <p:cNvPr id="4" name="Shape 2"/>
+          <p:cNvSpPr/>
+          <p:nvPr/>
+        </p:nvSpPr>
+        <p:spPr>
+          <a:xfrm>
+            <a:off x="640080" y="1005840"/>
+            <a:ext cx="10881360" cy="1737360"/>
+          </a:xfrm>
+          <a:prstGeom prst="roundRect">
+            <a:avLst>
+              <a:gd name="adj" fmla="val 3158"/>
+            </a:avLst>
+          </a:prstGeom>
+          <a:solidFill>
+            <a:srgbClr val="FFFFFF"/>
+          </a:solidFill>
+          <a:ln w="12700">
+            <a:solidFill>
+              <a:srgbClr val="E4DCCB"/>
+            </a:solidFill>
+            <a:prstDash val="solid"/>
+          </a:ln>
+        </p:spPr>
+      </p:sp>
+      <p:sp>
+        <p:nvSpPr>
+          <p:cNvPr id="5" name="Shape 3"/>
+          <p:cNvSpPr/>
+          <p:nvPr/>
+        </p:nvSpPr>
+        <p:spPr>
+          <a:xfrm>
+            <a:off x="640080" y="1005840"/>
+            <a:ext cx="54864" cy="1737360"/>
+          </a:xfrm>
+          <a:prstGeom prst="rect">
+            <a:avLst/>
+          </a:prstGeom>
+          <a:solidFill>
+            <a:srgbClr val="1D6FE0"/>
+          </a:solidFill>
+          <a:ln/>
+        </p:spPr>
+      </p:sp>
+      <p:sp>
+        <p:nvSpPr>
+          <p:cNvPr id="6" name="Text 4"/>
+          <p:cNvSpPr/>
+          <p:nvPr/>
+        </p:nvSpPr>
+        <p:spPr>
+          <a:xfrm>
+            <a:off x="914400" y="1133856"/>
+            <a:ext cx="10332720" cy="365760"/>
+          </a:xfrm>
+          <a:prstGeom prst="rect">
+            <a:avLst/>
+          </a:prstGeom>
+          <a:noFill/>
+          <a:ln/>
+        </p:spPr>
+        <p:txBody>
+          <a:bodyPr wrap="square" rtlCol="0" anchor="ctr"/>
+          <a:lstStyle/>
+          <a:p>
+            <a:pPr indent="0" marL="0">
+              <a:buNone/>
+            </a:pPr>
+            <a:r>
+              <a:rPr lang="en-US" sz="1500" b="1" dirty="0">
+                <a:solidFill>
+                  <a:srgbClr val="1B1F3B"/>
                 </a:solidFill>
                 <a:latin typeface="Georgia" pitchFamily="34" charset="0"/>
                 <a:ea typeface="Georgia" pitchFamily="34" charset="-122"/>
                 <a:cs typeface="Georgia" pitchFamily="34" charset="-120"/>
               </a:rPr>
-              <a:t>Fin du cahier des charges</a:t>
-            </a:r>
-            <a:endParaRPr lang="en-US" sz="3400" dirty="0"/>
-          </a:p>
-        </p:txBody>
-      </p:sp>
-      <p:sp>
-        <p:nvSpPr>
-          <p:cNvPr id="3" name="Text 1"/>
-          <p:cNvSpPr/>
-          <p:nvPr/>
-        </p:nvSpPr>
-        <p:spPr>
-          <a:xfrm>
-            <a:off x="640080" y="3200400"/>
-            <a:ext cx="9144000" cy="822960"/>
+              <a:t>Mots de passe</a:t>
+            </a:r>
+            <a:endParaRPr lang="en-US" sz="1500" dirty="0"/>
+          </a:p>
+        </p:txBody>
+      </p:sp>
+      <p:sp>
+        <p:nvSpPr>
+          <p:cNvPr id="7" name="Text 5"/>
+          <p:cNvSpPr/>
+          <p:nvPr/>
+        </p:nvSpPr>
+        <p:spPr>
+          <a:xfrm>
+            <a:off x="914400" y="1536192"/>
+            <a:ext cx="10332720" cy="1005840"/>
           </a:xfrm>
           <a:prstGeom prst="rect">
             <a:avLst/>
@@ -46294,100 +46823,228 @@
           <a:p>
             <a:pPr indent="0" marL="0">
               <a:lnSpc>
-                <a:spcPts val="1800"/>
+                <a:spcPts val="1600"/>
               </a:lnSpc>
               <a:buNone/>
             </a:pPr>
             <a:r>
-              <a:rPr lang="en-US" sz="1300" dirty="0">
-                <a:solidFill>
-                  <a:srgbClr val="C7C9E0"/>
-                </a:solidFill>
-                <a:latin typeface="Segoe UI" pitchFamily="34" charset="0"/>
-                <a:ea typeface="Segoe UI" pitchFamily="34" charset="-122"/>
-                <a:cs typeface="Segoe UI" pitchFamily="34" charset="-120"/>
-              </a:rPr>
-              <a:t>Ce document liste l'ensemble des fonctionnalités de l'application Koji Web telles que développées à ce jour. Il est mis à jour à chaque évolution notable de l'application.</a:t>
-            </a:r>
-            <a:endParaRPr lang="en-US" sz="1300" dirty="0"/>
-          </a:p>
-        </p:txBody>
-      </p:sp>
-      <p:sp>
-        <p:nvSpPr>
-          <p:cNvPr id="4" name="Text 2"/>
-          <p:cNvSpPr/>
-          <p:nvPr/>
-        </p:nvSpPr>
-        <p:spPr>
-          <a:xfrm>
-            <a:off x="640080" y="4846320"/>
-            <a:ext cx="7315200" cy="320040"/>
-          </a:xfrm>
-          <a:prstGeom prst="rect">
-            <a:avLst/>
-          </a:prstGeom>
-          <a:noFill/>
-          <a:ln/>
-        </p:spPr>
-        <p:txBody>
-          <a:bodyPr wrap="square" rtlCol="0" anchor="ctr"/>
-          <a:lstStyle/>
-          <a:p>
-            <a:pPr indent="0" marL="0">
-              <a:buNone/>
-            </a:pPr>
-            <a:r>
-              <a:rPr lang="en-US" sz="1200" b="1" dirty="0">
-                <a:solidFill>
-                  <a:srgbClr val="C9A96A"/>
-                </a:solidFill>
-                <a:latin typeface="Segoe UI" pitchFamily="34" charset="0"/>
-                <a:ea typeface="Segoe UI" pitchFamily="34" charset="-122"/>
-                <a:cs typeface="Segoe UI" pitchFamily="34" charset="-120"/>
-              </a:rPr>
-              <a:t>Cahier des charges préparé par : BOUHOUCHI Amira</a:t>
-            </a:r>
-            <a:endParaRPr lang="en-US" sz="1200" dirty="0"/>
-          </a:p>
-        </p:txBody>
-      </p:sp>
-      <p:sp>
-        <p:nvSpPr>
-          <p:cNvPr id="5" name="Text 3"/>
-          <p:cNvSpPr/>
-          <p:nvPr/>
-        </p:nvSpPr>
-        <p:spPr>
-          <a:xfrm>
-            <a:off x="640080" y="5193792"/>
-            <a:ext cx="7315200" cy="320040"/>
-          </a:xfrm>
-          <a:prstGeom prst="rect">
-            <a:avLst/>
-          </a:prstGeom>
-          <a:noFill/>
-          <a:ln/>
-        </p:spPr>
-        <p:txBody>
-          <a:bodyPr wrap="square" rtlCol="0" anchor="ctr"/>
-          <a:lstStyle/>
-          <a:p>
-            <a:pPr indent="0" marL="0">
-              <a:buNone/>
-            </a:pPr>
-            <a:r>
-              <a:rPr lang="en-US" sz="1200" b="1" dirty="0">
-                <a:solidFill>
-                  <a:srgbClr val="C9A96A"/>
-                </a:solidFill>
-                <a:latin typeface="Segoe UI" pitchFamily="34" charset="0"/>
-                <a:ea typeface="Segoe UI" pitchFamily="34" charset="-122"/>
-                <a:cs typeface="Segoe UI" pitchFamily="34" charset="-120"/>
-              </a:rPr>
-              <a:t>Application Koji Web développée par : BOUHOUCHI Amira</a:t>
-            </a:r>
-            <a:endParaRPr lang="en-US" sz="1200" dirty="0"/>
+              <a:rPr lang="en-US" sz="1150" dirty="0">
+                <a:solidFill>
+                  <a:srgbClr val="1B1F3B"/>
+                </a:solidFill>
+                <a:latin typeface="Segoe UI" pitchFamily="34" charset="0"/>
+                <a:ea typeface="Segoe UI" pitchFamily="34" charset="-122"/>
+                <a:cs typeface="Segoe UI" pitchFamily="34" charset="-120"/>
+              </a:rPr>
+              <a:t>Mots de passe des ouvriers hachés (jamais stockés en clair) ; mots de passe entreprise/particulier gérés par Supabase Auth.</a:t>
+            </a:r>
+            <a:endParaRPr lang="en-US" sz="1150" dirty="0"/>
+          </a:p>
+        </p:txBody>
+      </p:sp>
+      <p:sp>
+        <p:nvSpPr>
+          <p:cNvPr id="8" name="Shape 6"/>
+          <p:cNvSpPr/>
+          <p:nvPr/>
+        </p:nvSpPr>
+        <p:spPr>
+          <a:xfrm>
+            <a:off x="640080" y="2944368"/>
+            <a:ext cx="10881360" cy="1737360"/>
+          </a:xfrm>
+          <a:prstGeom prst="roundRect">
+            <a:avLst>
+              <a:gd name="adj" fmla="val 3158"/>
+            </a:avLst>
+          </a:prstGeom>
+          <a:solidFill>
+            <a:srgbClr val="FFFFFF"/>
+          </a:solidFill>
+          <a:ln w="12700">
+            <a:solidFill>
+              <a:srgbClr val="E4DCCB"/>
+            </a:solidFill>
+            <a:prstDash val="solid"/>
+          </a:ln>
+        </p:spPr>
+      </p:sp>
+      <p:sp>
+        <p:nvSpPr>
+          <p:cNvPr id="9" name="Shape 7"/>
+          <p:cNvSpPr/>
+          <p:nvPr/>
+        </p:nvSpPr>
+        <p:spPr>
+          <a:xfrm>
+            <a:off x="640080" y="2944368"/>
+            <a:ext cx="54864" cy="1737360"/>
+          </a:xfrm>
+          <a:prstGeom prst="rect">
+            <a:avLst/>
+          </a:prstGeom>
+          <a:solidFill>
+            <a:srgbClr val="1D6FE0"/>
+          </a:solidFill>
+          <a:ln/>
+        </p:spPr>
+      </p:sp>
+      <p:sp>
+        <p:nvSpPr>
+          <p:cNvPr id="10" name="Text 8"/>
+          <p:cNvSpPr/>
+          <p:nvPr/>
+        </p:nvSpPr>
+        <p:spPr>
+          <a:xfrm>
+            <a:off x="914400" y="3072384"/>
+            <a:ext cx="10332720" cy="365760"/>
+          </a:xfrm>
+          <a:prstGeom prst="rect">
+            <a:avLst/>
+          </a:prstGeom>
+          <a:noFill/>
+          <a:ln/>
+        </p:spPr>
+        <p:txBody>
+          <a:bodyPr wrap="square" rtlCol="0" anchor="ctr"/>
+          <a:lstStyle/>
+          <a:p>
+            <a:pPr indent="0" marL="0">
+              <a:buNone/>
+            </a:pPr>
+            <a:r>
+              <a:rPr lang="en-US" sz="1500" b="1" dirty="0">
+                <a:solidFill>
+                  <a:srgbClr val="1B1F3B"/>
+                </a:solidFill>
+                <a:latin typeface="Georgia" pitchFamily="34" charset="0"/>
+                <a:ea typeface="Georgia" pitchFamily="34" charset="-122"/>
+                <a:cs typeface="Georgia" pitchFamily="34" charset="-120"/>
+              </a:rPr>
+              <a:t>Multilingue</a:t>
+            </a:r>
+            <a:endParaRPr lang="en-US" sz="1500" dirty="0"/>
+          </a:p>
+        </p:txBody>
+      </p:sp>
+      <p:sp>
+        <p:nvSpPr>
+          <p:cNvPr id="11" name="Text 9"/>
+          <p:cNvSpPr/>
+          <p:nvPr/>
+        </p:nvSpPr>
+        <p:spPr>
+          <a:xfrm>
+            <a:off x="914400" y="3474720"/>
+            <a:ext cx="10332720" cy="1005840"/>
+          </a:xfrm>
+          <a:prstGeom prst="rect">
+            <a:avLst/>
+          </a:prstGeom>
+          <a:noFill/>
+          <a:ln/>
+        </p:spPr>
+        <p:txBody>
+          <a:bodyPr wrap="square" rtlCol="0" anchor="ctr"/>
+          <a:lstStyle/>
+          <a:p>
+            <a:pPr indent="0" marL="0">
+              <a:lnSpc>
+                <a:spcPts val="1600"/>
+              </a:lnSpc>
+              <a:buNone/>
+            </a:pPr>
+            <a:r>
+              <a:rPr lang="en-US" sz="1150" dirty="0">
+                <a:solidFill>
+                  <a:srgbClr val="1B1F3B"/>
+                </a:solidFill>
+                <a:latin typeface="Segoe UI" pitchFamily="34" charset="0"/>
+                <a:ea typeface="Segoe UI" pitchFamily="34" charset="-122"/>
+                <a:cs typeface="Segoe UI" pitchFamily="34" charset="-120"/>
+              </a:rPr>
+              <a:t>5 langues disponibles (français, anglais, arabe, allemand, italien), avec adaptation du sens de lecture pour l'arabe.</a:t>
+            </a:r>
+            <a:endParaRPr lang="en-US" sz="1150" dirty="0"/>
+          </a:p>
+        </p:txBody>
+      </p:sp>
+      <p:sp>
+        <p:nvSpPr>
+          <p:cNvPr id="12" name="Text 10"/>
+          <p:cNvSpPr/>
+          <p:nvPr/>
+        </p:nvSpPr>
+        <p:spPr>
+          <a:xfrm>
+            <a:off x="365760" y="6510528"/>
+            <a:ext cx="5486400" cy="274320"/>
+          </a:xfrm>
+          <a:prstGeom prst="rect">
+            <a:avLst/>
+          </a:prstGeom>
+          <a:noFill/>
+          <a:ln/>
+        </p:spPr>
+        <p:txBody>
+          <a:bodyPr wrap="square" rtlCol="0" anchor="ctr"/>
+          <a:lstStyle/>
+          <a:p>
+            <a:pPr indent="0" marL="0">
+              <a:buNone/>
+            </a:pPr>
+            <a:r>
+              <a:rPr lang="en-US" sz="850" dirty="0">
+                <a:solidFill>
+                  <a:srgbClr val="8A7C68"/>
+                </a:solidFill>
+                <a:latin typeface="Segoe UI" pitchFamily="34" charset="0"/>
+                <a:ea typeface="Segoe UI" pitchFamily="34" charset="-122"/>
+                <a:cs typeface="Segoe UI" pitchFamily="34" charset="-120"/>
+              </a:rPr>
+              <a:t>Koji Web — Cahier des charges</a:t>
+            </a:r>
+            <a:endParaRPr lang="en-US" sz="850" dirty="0"/>
+          </a:p>
+        </p:txBody>
+      </p:sp>
+      <p:sp>
+        <p:nvSpPr>
+          <p:cNvPr id="13" name="Text 11"/>
+          <p:cNvSpPr/>
+          <p:nvPr/>
+        </p:nvSpPr>
+        <p:spPr>
+          <a:xfrm>
+            <a:off x="9601200" y="6510528"/>
+            <a:ext cx="2194560" cy="274320"/>
+          </a:xfrm>
+          <a:prstGeom prst="rect">
+            <a:avLst/>
+          </a:prstGeom>
+          <a:noFill/>
+          <a:ln/>
+        </p:spPr>
+        <p:txBody>
+          <a:bodyPr wrap="square" rtlCol="0" anchor="ctr"/>
+          <a:lstStyle/>
+          <a:p>
+            <a:pPr algn="r" indent="0" marL="0">
+              <a:buNone/>
+            </a:pPr>
+            <a:r>
+              <a:rPr lang="en-US" sz="850" dirty="0">
+                <a:solidFill>
+                  <a:srgbClr val="8A7C68"/>
+                </a:solidFill>
+                <a:latin typeface="Segoe UI" pitchFamily="34" charset="0"/>
+                <a:ea typeface="Segoe UI" pitchFamily="34" charset="-122"/>
+                <a:cs typeface="Segoe UI" pitchFamily="34" charset="-120"/>
+              </a:rPr>
+              <a:t>88</a:t>
+            </a:r>
+            <a:endParaRPr lang="en-US" sz="850" dirty="0"/>
           </a:p>
         </p:txBody>
       </p:sp>
@@ -46638,6 +47295,496 @@
               <a:t>8</a:t>
             </a:r>
             <a:endParaRPr lang="en-US" sz="850" dirty="0"/>
+          </a:p>
+        </p:txBody>
+      </p:sp>
+    </p:spTree>
+  </p:cSld>
+  <p:clrMapOvr>
+    <a:masterClrMapping/>
+  </p:clrMapOvr>
+</p:sld>
+</file>
+
+<file path=ppt/slides/slide90.xml><?xml version="1.0" encoding="utf-8"?>
+<p:sld xmlns:a="http://schemas.openxmlformats.org/drawingml/2006/main" xmlns:r="http://schemas.openxmlformats.org/officeDocument/2006/relationships" xmlns:p="http://schemas.openxmlformats.org/presentationml/2006/main">
+  <p:cSld name="Slide 90">
+    <p:bg>
+      <p:bgPr>
+        <a:solidFill>
+          <a:srgbClr val="F3EEE3"/>
+        </a:solidFill>
+      </p:bgPr>
+    </p:bg>
+    <p:spTree>
+      <p:nvGrpSpPr>
+        <p:cNvPr id="1" name=""/>
+        <p:cNvGrpSpPr/>
+        <p:nvPr/>
+      </p:nvGrpSpPr>
+      <p:grpSpPr>
+        <a:xfrm>
+          <a:off x="0" y="0"/>
+          <a:ext cx="0" cy="0"/>
+          <a:chOff x="0" y="0"/>
+          <a:chExt cx="0" cy="0"/>
+        </a:xfrm>
+      </p:grpSpPr>
+      <p:sp>
+        <p:nvSpPr>
+          <p:cNvPr id="2" name="Shape 0"/>
+          <p:cNvSpPr/>
+          <p:nvPr/>
+        </p:nvSpPr>
+        <p:spPr>
+          <a:xfrm>
+            <a:off x="640080" y="411480"/>
+            <a:ext cx="3108960" cy="365760"/>
+          </a:xfrm>
+          <a:prstGeom prst="roundRect">
+            <a:avLst>
+              <a:gd name="adj" fmla="val 50000"/>
+            </a:avLst>
+          </a:prstGeom>
+          <a:solidFill>
+            <a:srgbClr val="F7EADF"/>
+          </a:solidFill>
+          <a:ln/>
+        </p:spPr>
+      </p:sp>
+      <p:sp>
+        <p:nvSpPr>
+          <p:cNvPr id="3" name="Text 1"/>
+          <p:cNvSpPr/>
+          <p:nvPr/>
+        </p:nvSpPr>
+        <p:spPr>
+          <a:xfrm>
+            <a:off x="640080" y="411480"/>
+            <a:ext cx="3108960" cy="365760"/>
+          </a:xfrm>
+          <a:prstGeom prst="rect">
+            <a:avLst/>
+          </a:prstGeom>
+          <a:noFill/>
+          <a:ln/>
+        </p:spPr>
+        <p:txBody>
+          <a:bodyPr wrap="square" rtlCol="0" anchor="ctr"/>
+          <a:lstStyle/>
+          <a:p>
+            <a:pPr algn="ctr" indent="0" marL="0">
+              <a:buNone/>
+            </a:pPr>
+            <a:r>
+              <a:rPr lang="en-US" sz="950" b="1" spc="100" kern="0" dirty="0">
+                <a:solidFill>
+                  <a:srgbClr val="9A7C5C"/>
+                </a:solidFill>
+                <a:latin typeface="Segoe UI" pitchFamily="34" charset="0"/>
+                <a:ea typeface="Segoe UI" pitchFamily="34" charset="-122"/>
+                <a:cs typeface="Segoe UI" pitchFamily="34" charset="-120"/>
+              </a:rPr>
+              <a:t>SÉCURITÉ, DONNÉES ET MULTILINGUISME</a:t>
+            </a:r>
+            <a:endParaRPr lang="en-US" sz="950" dirty="0"/>
+          </a:p>
+        </p:txBody>
+      </p:sp>
+      <p:sp>
+        <p:nvSpPr>
+          <p:cNvPr id="4" name="Shape 2"/>
+          <p:cNvSpPr/>
+          <p:nvPr/>
+        </p:nvSpPr>
+        <p:spPr>
+          <a:xfrm>
+            <a:off x="640080" y="1005840"/>
+            <a:ext cx="10881360" cy="1737360"/>
+          </a:xfrm>
+          <a:prstGeom prst="roundRect">
+            <a:avLst>
+              <a:gd name="adj" fmla="val 3158"/>
+            </a:avLst>
+          </a:prstGeom>
+          <a:solidFill>
+            <a:srgbClr val="FFFFFF"/>
+          </a:solidFill>
+          <a:ln w="12700">
+            <a:solidFill>
+              <a:srgbClr val="E4DCCB"/>
+            </a:solidFill>
+            <a:prstDash val="solid"/>
+          </a:ln>
+        </p:spPr>
+      </p:sp>
+      <p:sp>
+        <p:nvSpPr>
+          <p:cNvPr id="5" name="Shape 3"/>
+          <p:cNvSpPr/>
+          <p:nvPr/>
+        </p:nvSpPr>
+        <p:spPr>
+          <a:xfrm>
+            <a:off x="640080" y="1005840"/>
+            <a:ext cx="54864" cy="1737360"/>
+          </a:xfrm>
+          <a:prstGeom prst="rect">
+            <a:avLst/>
+          </a:prstGeom>
+          <a:solidFill>
+            <a:srgbClr val="1D6FE0"/>
+          </a:solidFill>
+          <a:ln/>
+        </p:spPr>
+      </p:sp>
+      <p:sp>
+        <p:nvSpPr>
+          <p:cNvPr id="6" name="Text 4"/>
+          <p:cNvSpPr/>
+          <p:nvPr/>
+        </p:nvSpPr>
+        <p:spPr>
+          <a:xfrm>
+            <a:off x="914400" y="1133856"/>
+            <a:ext cx="10332720" cy="365760"/>
+          </a:xfrm>
+          <a:prstGeom prst="rect">
+            <a:avLst/>
+          </a:prstGeom>
+          <a:noFill/>
+          <a:ln/>
+        </p:spPr>
+        <p:txBody>
+          <a:bodyPr wrap="square" rtlCol="0" anchor="ctr"/>
+          <a:lstStyle/>
+          <a:p>
+            <a:pPr indent="0" marL="0">
+              <a:buNone/>
+            </a:pPr>
+            <a:r>
+              <a:rPr lang="en-US" sz="1500" b="1" dirty="0">
+                <a:solidFill>
+                  <a:srgbClr val="1B1F3B"/>
+                </a:solidFill>
+                <a:latin typeface="Georgia" pitchFamily="34" charset="0"/>
+                <a:ea typeface="Georgia" pitchFamily="34" charset="-122"/>
+                <a:cs typeface="Georgia" pitchFamily="34" charset="-120"/>
+              </a:rPr>
+              <a:t>Historique des actions</a:t>
+            </a:r>
+            <a:endParaRPr lang="en-US" sz="1500" dirty="0"/>
+          </a:p>
+        </p:txBody>
+      </p:sp>
+      <p:sp>
+        <p:nvSpPr>
+          <p:cNvPr id="7" name="Text 5"/>
+          <p:cNvSpPr/>
+          <p:nvPr/>
+        </p:nvSpPr>
+        <p:spPr>
+          <a:xfrm>
+            <a:off x="914400" y="1536192"/>
+            <a:ext cx="10332720" cy="1005840"/>
+          </a:xfrm>
+          <a:prstGeom prst="rect">
+            <a:avLst/>
+          </a:prstGeom>
+          <a:noFill/>
+          <a:ln/>
+        </p:spPr>
+        <p:txBody>
+          <a:bodyPr wrap="square" rtlCol="0" anchor="ctr"/>
+          <a:lstStyle/>
+          <a:p>
+            <a:pPr indent="0" marL="0">
+              <a:lnSpc>
+                <a:spcPts val="1600"/>
+              </a:lnSpc>
+              <a:buNone/>
+            </a:pPr>
+            <a:r>
+              <a:rPr lang="en-US" sz="1150" dirty="0">
+                <a:solidFill>
+                  <a:srgbClr val="1B1F3B"/>
+                </a:solidFill>
+                <a:latin typeface="Segoe UI" pitchFamily="34" charset="0"/>
+                <a:ea typeface="Segoe UI" pitchFamily="34" charset="-122"/>
+                <a:cs typeface="Segoe UI" pitchFamily="34" charset="-120"/>
+              </a:rPr>
+              <a:t>Chaque action importante (création, modification, suppression) est journalisée pour garder une trace de l'activité.</a:t>
+            </a:r>
+            <a:endParaRPr lang="en-US" sz="1150" dirty="0"/>
+          </a:p>
+        </p:txBody>
+      </p:sp>
+      <p:sp>
+        <p:nvSpPr>
+          <p:cNvPr id="8" name="Text 6"/>
+          <p:cNvSpPr/>
+          <p:nvPr/>
+        </p:nvSpPr>
+        <p:spPr>
+          <a:xfrm>
+            <a:off x="365760" y="6510528"/>
+            <a:ext cx="5486400" cy="274320"/>
+          </a:xfrm>
+          <a:prstGeom prst="rect">
+            <a:avLst/>
+          </a:prstGeom>
+          <a:noFill/>
+          <a:ln/>
+        </p:spPr>
+        <p:txBody>
+          <a:bodyPr wrap="square" rtlCol="0" anchor="ctr"/>
+          <a:lstStyle/>
+          <a:p>
+            <a:pPr indent="0" marL="0">
+              <a:buNone/>
+            </a:pPr>
+            <a:r>
+              <a:rPr lang="en-US" sz="850" dirty="0">
+                <a:solidFill>
+                  <a:srgbClr val="8A7C68"/>
+                </a:solidFill>
+                <a:latin typeface="Segoe UI" pitchFamily="34" charset="0"/>
+                <a:ea typeface="Segoe UI" pitchFamily="34" charset="-122"/>
+                <a:cs typeface="Segoe UI" pitchFamily="34" charset="-120"/>
+              </a:rPr>
+              <a:t>Koji Web — Cahier des charges</a:t>
+            </a:r>
+            <a:endParaRPr lang="en-US" sz="850" dirty="0"/>
+          </a:p>
+        </p:txBody>
+      </p:sp>
+      <p:sp>
+        <p:nvSpPr>
+          <p:cNvPr id="9" name="Text 7"/>
+          <p:cNvSpPr/>
+          <p:nvPr/>
+        </p:nvSpPr>
+        <p:spPr>
+          <a:xfrm>
+            <a:off x="9601200" y="6510528"/>
+            <a:ext cx="2194560" cy="274320"/>
+          </a:xfrm>
+          <a:prstGeom prst="rect">
+            <a:avLst/>
+          </a:prstGeom>
+          <a:noFill/>
+          <a:ln/>
+        </p:spPr>
+        <p:txBody>
+          <a:bodyPr wrap="square" rtlCol="0" anchor="ctr"/>
+          <a:lstStyle/>
+          <a:p>
+            <a:pPr algn="r" indent="0" marL="0">
+              <a:buNone/>
+            </a:pPr>
+            <a:r>
+              <a:rPr lang="en-US" sz="850" dirty="0">
+                <a:solidFill>
+                  <a:srgbClr val="8A7C68"/>
+                </a:solidFill>
+                <a:latin typeface="Segoe UI" pitchFamily="34" charset="0"/>
+                <a:ea typeface="Segoe UI" pitchFamily="34" charset="-122"/>
+                <a:cs typeface="Segoe UI" pitchFamily="34" charset="-120"/>
+              </a:rPr>
+              <a:t>89</a:t>
+            </a:r>
+            <a:endParaRPr lang="en-US" sz="850" dirty="0"/>
+          </a:p>
+        </p:txBody>
+      </p:sp>
+    </p:spTree>
+  </p:cSld>
+  <p:clrMapOvr>
+    <a:masterClrMapping/>
+  </p:clrMapOvr>
+</p:sld>
+</file>
+
+<file path=ppt/slides/slide91.xml><?xml version="1.0" encoding="utf-8"?>
+<p:sld xmlns:a="http://schemas.openxmlformats.org/drawingml/2006/main" xmlns:r="http://schemas.openxmlformats.org/officeDocument/2006/relationships" xmlns:p="http://schemas.openxmlformats.org/presentationml/2006/main">
+  <p:cSld name="Slide 91">
+    <p:bg>
+      <p:bgPr>
+        <a:solidFill>
+          <a:srgbClr val="0B1030"/>
+        </a:solidFill>
+      </p:bgPr>
+    </p:bg>
+    <p:spTree>
+      <p:nvGrpSpPr>
+        <p:cNvPr id="1" name=""/>
+        <p:cNvGrpSpPr/>
+        <p:nvPr/>
+      </p:nvGrpSpPr>
+      <p:grpSpPr>
+        <a:xfrm>
+          <a:off x="0" y="0"/>
+          <a:ext cx="0" cy="0"/>
+          <a:chOff x="0" y="0"/>
+          <a:chExt cx="0" cy="0"/>
+        </a:xfrm>
+      </p:grpSpPr>
+      <p:sp>
+        <p:nvSpPr>
+          <p:cNvPr id="2" name="Text 0"/>
+          <p:cNvSpPr/>
+          <p:nvPr/>
+        </p:nvSpPr>
+        <p:spPr>
+          <a:xfrm>
+            <a:off x="640080" y="2286000"/>
+            <a:ext cx="9144000" cy="822960"/>
+          </a:xfrm>
+          <a:prstGeom prst="rect">
+            <a:avLst/>
+          </a:prstGeom>
+          <a:noFill/>
+          <a:ln/>
+        </p:spPr>
+        <p:txBody>
+          <a:bodyPr wrap="square" rtlCol="0" anchor="ctr"/>
+          <a:lstStyle/>
+          <a:p>
+            <a:pPr indent="0" marL="0">
+              <a:buNone/>
+            </a:pPr>
+            <a:r>
+              <a:rPr lang="en-US" sz="3400" b="1" dirty="0">
+                <a:solidFill>
+                  <a:srgbClr val="FFFFFF"/>
+                </a:solidFill>
+                <a:latin typeface="Georgia" pitchFamily="34" charset="0"/>
+                <a:ea typeface="Georgia" pitchFamily="34" charset="-122"/>
+                <a:cs typeface="Georgia" pitchFamily="34" charset="-120"/>
+              </a:rPr>
+              <a:t>Fin du cahier des charges</a:t>
+            </a:r>
+            <a:endParaRPr lang="en-US" sz="3400" dirty="0"/>
+          </a:p>
+        </p:txBody>
+      </p:sp>
+      <p:sp>
+        <p:nvSpPr>
+          <p:cNvPr id="3" name="Text 1"/>
+          <p:cNvSpPr/>
+          <p:nvPr/>
+        </p:nvSpPr>
+        <p:spPr>
+          <a:xfrm>
+            <a:off x="640080" y="3200400"/>
+            <a:ext cx="9144000" cy="822960"/>
+          </a:xfrm>
+          <a:prstGeom prst="rect">
+            <a:avLst/>
+          </a:prstGeom>
+          <a:noFill/>
+          <a:ln/>
+        </p:spPr>
+        <p:txBody>
+          <a:bodyPr wrap="square" rtlCol="0" anchor="ctr"/>
+          <a:lstStyle/>
+          <a:p>
+            <a:pPr indent="0" marL="0">
+              <a:lnSpc>
+                <a:spcPts val="1800"/>
+              </a:lnSpc>
+              <a:buNone/>
+            </a:pPr>
+            <a:r>
+              <a:rPr lang="en-US" sz="1300" dirty="0">
+                <a:solidFill>
+                  <a:srgbClr val="C7C9E0"/>
+                </a:solidFill>
+                <a:latin typeface="Segoe UI" pitchFamily="34" charset="0"/>
+                <a:ea typeface="Segoe UI" pitchFamily="34" charset="-122"/>
+                <a:cs typeface="Segoe UI" pitchFamily="34" charset="-120"/>
+              </a:rPr>
+              <a:t>Ce document liste l'ensemble des fonctionnalités de l'application Koji Web telles que développées à ce jour. Il est mis à jour à chaque évolution notable de l'application.</a:t>
+            </a:r>
+            <a:endParaRPr lang="en-US" sz="1300" dirty="0"/>
+          </a:p>
+        </p:txBody>
+      </p:sp>
+      <p:sp>
+        <p:nvSpPr>
+          <p:cNvPr id="4" name="Text 2"/>
+          <p:cNvSpPr/>
+          <p:nvPr/>
+        </p:nvSpPr>
+        <p:spPr>
+          <a:xfrm>
+            <a:off x="640080" y="4846320"/>
+            <a:ext cx="7315200" cy="320040"/>
+          </a:xfrm>
+          <a:prstGeom prst="rect">
+            <a:avLst/>
+          </a:prstGeom>
+          <a:noFill/>
+          <a:ln/>
+        </p:spPr>
+        <p:txBody>
+          <a:bodyPr wrap="square" rtlCol="0" anchor="ctr"/>
+          <a:lstStyle/>
+          <a:p>
+            <a:pPr indent="0" marL="0">
+              <a:buNone/>
+            </a:pPr>
+            <a:r>
+              <a:rPr lang="en-US" sz="1200" b="1" dirty="0">
+                <a:solidFill>
+                  <a:srgbClr val="C9A96A"/>
+                </a:solidFill>
+                <a:latin typeface="Segoe UI" pitchFamily="34" charset="0"/>
+                <a:ea typeface="Segoe UI" pitchFamily="34" charset="-122"/>
+                <a:cs typeface="Segoe UI" pitchFamily="34" charset="-120"/>
+              </a:rPr>
+              <a:t>Cahier des charges préparé par : BOUHOUCHI Amira</a:t>
+            </a:r>
+            <a:endParaRPr lang="en-US" sz="1200" dirty="0"/>
+          </a:p>
+        </p:txBody>
+      </p:sp>
+      <p:sp>
+        <p:nvSpPr>
+          <p:cNvPr id="5" name="Text 3"/>
+          <p:cNvSpPr/>
+          <p:nvPr/>
+        </p:nvSpPr>
+        <p:spPr>
+          <a:xfrm>
+            <a:off x="640080" y="5193792"/>
+            <a:ext cx="7315200" cy="320040"/>
+          </a:xfrm>
+          <a:prstGeom prst="rect">
+            <a:avLst/>
+          </a:prstGeom>
+          <a:noFill/>
+          <a:ln/>
+        </p:spPr>
+        <p:txBody>
+          <a:bodyPr wrap="square" rtlCol="0" anchor="ctr"/>
+          <a:lstStyle/>
+          <a:p>
+            <a:pPr indent="0" marL="0">
+              <a:buNone/>
+            </a:pPr>
+            <a:r>
+              <a:rPr lang="en-US" sz="1200" b="1" dirty="0">
+                <a:solidFill>
+                  <a:srgbClr val="C9A96A"/>
+                </a:solidFill>
+                <a:latin typeface="Segoe UI" pitchFamily="34" charset="0"/>
+                <a:ea typeface="Segoe UI" pitchFamily="34" charset="-122"/>
+                <a:cs typeface="Segoe UI" pitchFamily="34" charset="-120"/>
+              </a:rPr>
+              <a:t>Application Koji Web développée par : BOUHOUCHI Amira</a:t>
+            </a:r>
+            <a:endParaRPr lang="en-US" sz="1200" dirty="0"/>
           </a:p>
         </p:txBody>
       </p:sp>

--- a/docs/cahier-des-charges/Cahier-des-charges-Koji-Web.pptx
+++ b/docs/cahier-des-charges/Cahier-des-charges-Koji-Web.pptx
@@ -96,9 +96,12 @@
     <p:sldId id="344" r:id="rId90"/>
     <p:sldId id="345" r:id="rId91"/>
     <p:sldId id="346" r:id="rId92"/>
+    <p:sldId id="347" r:id="rId93"/>
+    <p:sldId id="348" r:id="rId94"/>
+    <p:sldId id="349" r:id="rId95"/>
   </p:sldIdLst>
   <p:notesMasterIdLst>
-    <p:notesMasterId r:id="rId93"/>
+    <p:notesMasterId r:id="rId96"/>
   </p:notesMasterIdLst>
   <p:sldSz cx="12191695" cy="6858000"/>
   <p:notesSz cx="6858000" cy="12191695"/>
@@ -8536,6 +8539,270 @@
             <a:fld id="{F7021451-1387-4CA6-816F-3879F97B5CBC}" type="slidenum">
               <a:rPr lang="en-US"/>
               <a:t>91</a:t>
+            </a:fld>
+            <a:endParaRPr lang="en-US"/>
+          </a:p>
+        </p:txBody>
+      </p:sp>
+    </p:spTree>
+    <p:extLst>
+      <p:ext uri="{BB962C8B-B14F-4D97-AF65-F5344CB8AC3E}">
+        <p14:creationId xmlns:p14="http://schemas.microsoft.com/office/powerpoint/2010/main" val="1024086991"/>
+      </p:ext>
+    </p:extLst>
+  </p:cSld>
+  <p:clrMapOvr>
+    <a:masterClrMapping/>
+  </p:clrMapOvr>
+</p:notes>
+</file>
+
+<file path=ppt/notesSlides/notesSlide92.xml><?xml version="1.0" encoding="utf-8"?>
+<p:notes xmlns:a="http://schemas.openxmlformats.org/drawingml/2006/main" xmlns:r="http://schemas.openxmlformats.org/officeDocument/2006/relationships" xmlns:p="http://schemas.openxmlformats.org/presentationml/2006/main">
+  <p:cSld>
+    <p:spTree>
+      <p:nvGrpSpPr>
+        <p:cNvPr id="1" name=""/>
+        <p:cNvGrpSpPr/>
+        <p:nvPr/>
+      </p:nvGrpSpPr>
+      <p:grpSpPr>
+        <a:xfrm>
+          <a:off x="0" y="0"/>
+          <a:ext cx="0" cy="0"/>
+          <a:chOff x="0" y="0"/>
+          <a:chExt cx="0" cy="0"/>
+        </a:xfrm>
+      </p:grpSpPr>
+      <p:sp>
+        <p:nvSpPr>
+          <p:cNvPr id="2" name="Slide Image Placeholder 1"/>
+          <p:cNvSpPr>
+            <a:spLocks noGrp="1" noRot="1" noChangeAspect="1"/>
+          </p:cNvSpPr>
+          <p:nvPr>
+            <p:ph type="sldImg"/>
+          </p:nvPr>
+        </p:nvSpPr>
+        <p:spPr/>
+      </p:sp>
+      <p:sp>
+        <p:nvSpPr>
+          <p:cNvPr id="3" name="Notes Placeholder 2"/>
+          <p:cNvSpPr>
+            <a:spLocks noGrp="1"/>
+          </p:cNvSpPr>
+          <p:nvPr>
+            <p:ph type="body" idx="1"/>
+          </p:nvPr>
+        </p:nvSpPr>
+        <p:spPr/>
+        <p:txBody>
+          <a:bodyPr/>
+          <a:lstStyle/>
+          <a:p>
+            <a:r>
+              <a:rPr lang="en-US" dirty="0"/>
+              <a:t/>
+            </a:r>
+            <a:endParaRPr lang="en-US" dirty="0"/>
+          </a:p>
+        </p:txBody>
+      </p:sp>
+      <p:sp>
+        <p:nvSpPr>
+          <p:cNvPr id="4" name="Slide Number Placeholder 3"/>
+          <p:cNvSpPr>
+            <a:spLocks noGrp="1"/>
+          </p:cNvSpPr>
+          <p:nvPr>
+            <p:ph type="sldNum" sz="quarter" idx="10"/>
+          </p:nvPr>
+        </p:nvSpPr>
+        <p:spPr/>
+        <p:txBody>
+          <a:bodyPr/>
+          <a:lstStyle/>
+          <a:p>
+            <a:fld id="{F7021451-1387-4CA6-816F-3879F97B5CBC}" type="slidenum">
+              <a:rPr lang="en-US"/>
+              <a:t>92</a:t>
+            </a:fld>
+            <a:endParaRPr lang="en-US"/>
+          </a:p>
+        </p:txBody>
+      </p:sp>
+    </p:spTree>
+    <p:extLst>
+      <p:ext uri="{BB962C8B-B14F-4D97-AF65-F5344CB8AC3E}">
+        <p14:creationId xmlns:p14="http://schemas.microsoft.com/office/powerpoint/2010/main" val="1024086991"/>
+      </p:ext>
+    </p:extLst>
+  </p:cSld>
+  <p:clrMapOvr>
+    <a:masterClrMapping/>
+  </p:clrMapOvr>
+</p:notes>
+</file>
+
+<file path=ppt/notesSlides/notesSlide93.xml><?xml version="1.0" encoding="utf-8"?>
+<p:notes xmlns:a="http://schemas.openxmlformats.org/drawingml/2006/main" xmlns:r="http://schemas.openxmlformats.org/officeDocument/2006/relationships" xmlns:p="http://schemas.openxmlformats.org/presentationml/2006/main">
+  <p:cSld>
+    <p:spTree>
+      <p:nvGrpSpPr>
+        <p:cNvPr id="1" name=""/>
+        <p:cNvGrpSpPr/>
+        <p:nvPr/>
+      </p:nvGrpSpPr>
+      <p:grpSpPr>
+        <a:xfrm>
+          <a:off x="0" y="0"/>
+          <a:ext cx="0" cy="0"/>
+          <a:chOff x="0" y="0"/>
+          <a:chExt cx="0" cy="0"/>
+        </a:xfrm>
+      </p:grpSpPr>
+      <p:sp>
+        <p:nvSpPr>
+          <p:cNvPr id="2" name="Slide Image Placeholder 1"/>
+          <p:cNvSpPr>
+            <a:spLocks noGrp="1" noRot="1" noChangeAspect="1"/>
+          </p:cNvSpPr>
+          <p:nvPr>
+            <p:ph type="sldImg"/>
+          </p:nvPr>
+        </p:nvSpPr>
+        <p:spPr/>
+      </p:sp>
+      <p:sp>
+        <p:nvSpPr>
+          <p:cNvPr id="3" name="Notes Placeholder 2"/>
+          <p:cNvSpPr>
+            <a:spLocks noGrp="1"/>
+          </p:cNvSpPr>
+          <p:nvPr>
+            <p:ph type="body" idx="1"/>
+          </p:nvPr>
+        </p:nvSpPr>
+        <p:spPr/>
+        <p:txBody>
+          <a:bodyPr/>
+          <a:lstStyle/>
+          <a:p>
+            <a:r>
+              <a:rPr lang="en-US" dirty="0"/>
+              <a:t/>
+            </a:r>
+            <a:endParaRPr lang="en-US" dirty="0"/>
+          </a:p>
+        </p:txBody>
+      </p:sp>
+      <p:sp>
+        <p:nvSpPr>
+          <p:cNvPr id="4" name="Slide Number Placeholder 3"/>
+          <p:cNvSpPr>
+            <a:spLocks noGrp="1"/>
+          </p:cNvSpPr>
+          <p:nvPr>
+            <p:ph type="sldNum" sz="quarter" idx="10"/>
+          </p:nvPr>
+        </p:nvSpPr>
+        <p:spPr/>
+        <p:txBody>
+          <a:bodyPr/>
+          <a:lstStyle/>
+          <a:p>
+            <a:fld id="{F7021451-1387-4CA6-816F-3879F97B5CBC}" type="slidenum">
+              <a:rPr lang="en-US"/>
+              <a:t>93</a:t>
+            </a:fld>
+            <a:endParaRPr lang="en-US"/>
+          </a:p>
+        </p:txBody>
+      </p:sp>
+    </p:spTree>
+    <p:extLst>
+      <p:ext uri="{BB962C8B-B14F-4D97-AF65-F5344CB8AC3E}">
+        <p14:creationId xmlns:p14="http://schemas.microsoft.com/office/powerpoint/2010/main" val="1024086991"/>
+      </p:ext>
+    </p:extLst>
+  </p:cSld>
+  <p:clrMapOvr>
+    <a:masterClrMapping/>
+  </p:clrMapOvr>
+</p:notes>
+</file>
+
+<file path=ppt/notesSlides/notesSlide94.xml><?xml version="1.0" encoding="utf-8"?>
+<p:notes xmlns:a="http://schemas.openxmlformats.org/drawingml/2006/main" xmlns:r="http://schemas.openxmlformats.org/officeDocument/2006/relationships" xmlns:p="http://schemas.openxmlformats.org/presentationml/2006/main">
+  <p:cSld>
+    <p:spTree>
+      <p:nvGrpSpPr>
+        <p:cNvPr id="1" name=""/>
+        <p:cNvGrpSpPr/>
+        <p:nvPr/>
+      </p:nvGrpSpPr>
+      <p:grpSpPr>
+        <a:xfrm>
+          <a:off x="0" y="0"/>
+          <a:ext cx="0" cy="0"/>
+          <a:chOff x="0" y="0"/>
+          <a:chExt cx="0" cy="0"/>
+        </a:xfrm>
+      </p:grpSpPr>
+      <p:sp>
+        <p:nvSpPr>
+          <p:cNvPr id="2" name="Slide Image Placeholder 1"/>
+          <p:cNvSpPr>
+            <a:spLocks noGrp="1" noRot="1" noChangeAspect="1"/>
+          </p:cNvSpPr>
+          <p:nvPr>
+            <p:ph type="sldImg"/>
+          </p:nvPr>
+        </p:nvSpPr>
+        <p:spPr/>
+      </p:sp>
+      <p:sp>
+        <p:nvSpPr>
+          <p:cNvPr id="3" name="Notes Placeholder 2"/>
+          <p:cNvSpPr>
+            <a:spLocks noGrp="1"/>
+          </p:cNvSpPr>
+          <p:nvPr>
+            <p:ph type="body" idx="1"/>
+          </p:nvPr>
+        </p:nvSpPr>
+        <p:spPr/>
+        <p:txBody>
+          <a:bodyPr/>
+          <a:lstStyle/>
+          <a:p>
+            <a:r>
+              <a:rPr lang="en-US" dirty="0"/>
+              <a:t/>
+            </a:r>
+            <a:endParaRPr lang="en-US" dirty="0"/>
+          </a:p>
+        </p:txBody>
+      </p:sp>
+      <p:sp>
+        <p:nvSpPr>
+          <p:cNvPr id="4" name="Slide Number Placeholder 3"/>
+          <p:cNvSpPr>
+            <a:spLocks noGrp="1"/>
+          </p:cNvSpPr>
+          <p:nvPr>
+            <p:ph type="sldNum" sz="quarter" idx="10"/>
+          </p:nvPr>
+        </p:nvSpPr>
+        <p:spPr/>
+        <p:txBody>
+          <a:bodyPr/>
+          <a:lstStyle/>
+          <a:p>
+            <a:fld id="{F7021451-1387-4CA6-816F-3879F97B5CBC}" type="slidenum">
+              <a:rPr lang="en-US"/>
+              <a:t>94</a:t>
             </a:fld>
             <a:endParaRPr lang="en-US"/>
           </a:p>
@@ -20010,7 +20277,7 @@
         </p:nvSpPr>
         <p:spPr>
           <a:xfrm>
-            <a:off x="6217920" y="1280160"/>
+            <a:off x="640080" y="6949440"/>
             <a:ext cx="457200" cy="457200"/>
           </a:xfrm>
           <a:prstGeom prst="rect">
@@ -20049,7 +20316,7 @@
         </p:nvSpPr>
         <p:spPr>
           <a:xfrm>
-            <a:off x="6720840" y="1280160"/>
+            <a:off x="1143000" y="6949440"/>
             <a:ext cx="4846320" cy="457200"/>
           </a:xfrm>
           <a:prstGeom prst="rect">
@@ -20088,7 +20355,7 @@
         </p:nvSpPr>
         <p:spPr>
           <a:xfrm>
-            <a:off x="6217920" y="1847088"/>
+            <a:off x="6217920" y="1280160"/>
             <a:ext cx="457200" cy="457200"/>
           </a:xfrm>
           <a:prstGeom prst="rect">
@@ -20127,7 +20394,7 @@
         </p:nvSpPr>
         <p:spPr>
           <a:xfrm>
-            <a:off x="6720840" y="1847088"/>
+            <a:off x="6720840" y="1280160"/>
             <a:ext cx="4846320" cy="457200"/>
           </a:xfrm>
           <a:prstGeom prst="rect">
@@ -20166,7 +20433,7 @@
         </p:nvSpPr>
         <p:spPr>
           <a:xfrm>
-            <a:off x="6217920" y="2414016"/>
+            <a:off x="6217920" y="1847088"/>
             <a:ext cx="457200" cy="457200"/>
           </a:xfrm>
           <a:prstGeom prst="rect">
@@ -20205,7 +20472,7 @@
         </p:nvSpPr>
         <p:spPr>
           <a:xfrm>
-            <a:off x="6720840" y="2414016"/>
+            <a:off x="6720840" y="1847088"/>
             <a:ext cx="4846320" cy="457200"/>
           </a:xfrm>
           <a:prstGeom prst="rect">
@@ -20244,7 +20511,7 @@
         </p:nvSpPr>
         <p:spPr>
           <a:xfrm>
-            <a:off x="6217920" y="2980944"/>
+            <a:off x="6217920" y="2414016"/>
             <a:ext cx="457200" cy="457200"/>
           </a:xfrm>
           <a:prstGeom prst="rect">
@@ -20283,7 +20550,7 @@
         </p:nvSpPr>
         <p:spPr>
           <a:xfrm>
-            <a:off x="6720840" y="2980944"/>
+            <a:off x="6720840" y="2414016"/>
             <a:ext cx="4846320" cy="457200"/>
           </a:xfrm>
           <a:prstGeom prst="rect">
@@ -20322,7 +20589,7 @@
         </p:nvSpPr>
         <p:spPr>
           <a:xfrm>
-            <a:off x="6217920" y="3547872"/>
+            <a:off x="6217920" y="2980944"/>
             <a:ext cx="457200" cy="457200"/>
           </a:xfrm>
           <a:prstGeom prst="rect">
@@ -20361,7 +20628,7 @@
         </p:nvSpPr>
         <p:spPr>
           <a:xfrm>
-            <a:off x="6720840" y="3547872"/>
+            <a:off x="6720840" y="2980944"/>
             <a:ext cx="4846320" cy="457200"/>
           </a:xfrm>
           <a:prstGeom prst="rect">
@@ -20400,7 +20667,7 @@
         </p:nvSpPr>
         <p:spPr>
           <a:xfrm>
-            <a:off x="6217920" y="4114800"/>
+            <a:off x="6217920" y="3547872"/>
             <a:ext cx="457200" cy="457200"/>
           </a:xfrm>
           <a:prstGeom prst="rect">
@@ -20439,7 +20706,7 @@
         </p:nvSpPr>
         <p:spPr>
           <a:xfrm>
-            <a:off x="6720840" y="4114800"/>
+            <a:off x="6720840" y="3547872"/>
             <a:ext cx="4846320" cy="457200"/>
           </a:xfrm>
           <a:prstGeom prst="rect">
@@ -20478,7 +20745,7 @@
         </p:nvSpPr>
         <p:spPr>
           <a:xfrm>
-            <a:off x="6217920" y="4681728"/>
+            <a:off x="6217920" y="4114800"/>
             <a:ext cx="457200" cy="457200"/>
           </a:xfrm>
           <a:prstGeom prst="rect">
@@ -20517,7 +20784,7 @@
         </p:nvSpPr>
         <p:spPr>
           <a:xfrm>
-            <a:off x="6720840" y="4681728"/>
+            <a:off x="6720840" y="4114800"/>
             <a:ext cx="4846320" cy="457200"/>
           </a:xfrm>
           <a:prstGeom prst="rect">
@@ -20556,7 +20823,7 @@
         </p:nvSpPr>
         <p:spPr>
           <a:xfrm>
-            <a:off x="6217920" y="5248656"/>
+            <a:off x="6217920" y="4681728"/>
             <a:ext cx="457200" cy="457200"/>
           </a:xfrm>
           <a:prstGeom prst="rect">
@@ -20595,7 +20862,7 @@
         </p:nvSpPr>
         <p:spPr>
           <a:xfrm>
-            <a:off x="6720840" y="5248656"/>
+            <a:off x="6720840" y="4681728"/>
             <a:ext cx="4846320" cy="457200"/>
           </a:xfrm>
           <a:prstGeom prst="rect">
@@ -20634,7 +20901,7 @@
         </p:nvSpPr>
         <p:spPr>
           <a:xfrm>
-            <a:off x="6217920" y="5815584"/>
+            <a:off x="6217920" y="5248656"/>
             <a:ext cx="457200" cy="457200"/>
           </a:xfrm>
           <a:prstGeom prst="rect">
@@ -20673,7 +20940,7 @@
         </p:nvSpPr>
         <p:spPr>
           <a:xfrm>
-            <a:off x="6720840" y="5815584"/>
+            <a:off x="6720840" y="5248656"/>
             <a:ext cx="4846320" cy="457200"/>
           </a:xfrm>
           <a:prstGeom prst="rect">
@@ -20712,7 +20979,7 @@
         </p:nvSpPr>
         <p:spPr>
           <a:xfrm>
-            <a:off x="6217920" y="6382512"/>
+            <a:off x="6217920" y="5815584"/>
             <a:ext cx="457200" cy="457200"/>
           </a:xfrm>
           <a:prstGeom prst="rect">
@@ -20751,6 +21018,84 @@
         </p:nvSpPr>
         <p:spPr>
           <a:xfrm>
+            <a:off x="6720840" y="5815584"/>
+            <a:ext cx="4846320" cy="457200"/>
+          </a:xfrm>
+          <a:prstGeom prst="rect">
+            <a:avLst/>
+          </a:prstGeom>
+          <a:noFill/>
+          <a:ln/>
+        </p:spPr>
+        <p:txBody>
+          <a:bodyPr wrap="square" rtlCol="0" anchor="t"/>
+          <a:lstStyle/>
+          <a:p>
+            <a:pPr indent="0" marL="0">
+              <a:buNone/>
+            </a:pPr>
+            <a:r>
+              <a:rPr lang="en-US" sz="1300" dirty="0">
+                <a:solidFill>
+                  <a:srgbClr val="1B1F3B"/>
+                </a:solidFill>
+                <a:latin typeface="Segoe UI" pitchFamily="34" charset="0"/>
+                <a:ea typeface="Segoe UI" pitchFamily="34" charset="-122"/>
+                <a:cs typeface="Segoe UI" pitchFamily="34" charset="-120"/>
+              </a:rPr>
+              <a:t>Sécurité, données et multilinguisme</a:t>
+            </a:r>
+            <a:endParaRPr lang="en-US" sz="1300" dirty="0"/>
+          </a:p>
+        </p:txBody>
+      </p:sp>
+      <p:sp>
+        <p:nvSpPr>
+          <p:cNvPr id="43" name="Text 41"/>
+          <p:cNvSpPr/>
+          <p:nvPr/>
+        </p:nvSpPr>
+        <p:spPr>
+          <a:xfrm>
+            <a:off x="6217920" y="6382512"/>
+            <a:ext cx="457200" cy="457200"/>
+          </a:xfrm>
+          <a:prstGeom prst="rect">
+            <a:avLst/>
+          </a:prstGeom>
+          <a:noFill/>
+          <a:ln/>
+        </p:spPr>
+        <p:txBody>
+          <a:bodyPr wrap="square" rtlCol="0" anchor="ctr"/>
+          <a:lstStyle/>
+          <a:p>
+            <a:pPr indent="0" marL="0">
+              <a:buNone/>
+            </a:pPr>
+            <a:r>
+              <a:rPr lang="en-US" sz="1300" b="1" dirty="0">
+                <a:solidFill>
+                  <a:srgbClr val="C9A96A"/>
+                </a:solidFill>
+                <a:latin typeface="Georgia" pitchFamily="34" charset="0"/>
+                <a:ea typeface="Georgia" pitchFamily="34" charset="-122"/>
+                <a:cs typeface="Georgia" pitchFamily="34" charset="-120"/>
+              </a:rPr>
+              <a:t>21</a:t>
+            </a:r>
+            <a:endParaRPr lang="en-US" sz="1300" dirty="0"/>
+          </a:p>
+        </p:txBody>
+      </p:sp>
+      <p:sp>
+        <p:nvSpPr>
+          <p:cNvPr id="44" name="Text 42"/>
+          <p:cNvSpPr/>
+          <p:nvPr/>
+        </p:nvSpPr>
+        <p:spPr>
+          <a:xfrm>
             <a:off x="6720840" y="6382512"/>
             <a:ext cx="4846320" cy="457200"/>
           </a:xfrm>
@@ -20776,7 +21121,7 @@
                 <a:ea typeface="Segoe UI" pitchFamily="34" charset="-122"/>
                 <a:cs typeface="Segoe UI" pitchFamily="34" charset="-120"/>
               </a:rPr>
-              <a:t>Sécurité, données et multilinguisme</a:t>
+              <a:t>Évolutions récentes — Koji Pro (Octobre 2026)</a:t>
             </a:r>
             <a:endParaRPr lang="en-US" sz="1300" dirty="0"/>
           </a:p>
@@ -20784,7 +21129,7 @@
       </p:sp>
       <p:sp>
         <p:nvSpPr>
-          <p:cNvPr id="43" name="Text 41"/>
+          <p:cNvPr id="45" name="Text 43"/>
           <p:cNvSpPr/>
           <p:nvPr/>
         </p:nvSpPr>
@@ -20823,7 +21168,7 @@
       </p:sp>
       <p:sp>
         <p:nvSpPr>
-          <p:cNvPr id="44" name="Text 42"/>
+          <p:cNvPr id="46" name="Text 44"/>
           <p:cNvSpPr/>
           <p:nvPr/>
         </p:nvSpPr>
@@ -47608,6 +47953,982 @@
 <file path=ppt/slides/slide91.xml><?xml version="1.0" encoding="utf-8"?>
 <p:sld xmlns:a="http://schemas.openxmlformats.org/drawingml/2006/main" xmlns:r="http://schemas.openxmlformats.org/officeDocument/2006/relationships" xmlns:p="http://schemas.openxmlformats.org/presentationml/2006/main">
   <p:cSld name="Slide 91">
+    <p:bg>
+      <p:bgPr>
+        <a:solidFill>
+          <a:srgbClr val="0B1030"/>
+        </a:solidFill>
+      </p:bgPr>
+    </p:bg>
+    <p:spTree>
+      <p:nvGrpSpPr>
+        <p:cNvPr id="1" name=""/>
+        <p:cNvGrpSpPr/>
+        <p:nvPr/>
+      </p:nvGrpSpPr>
+      <p:grpSpPr>
+        <a:xfrm>
+          <a:off x="0" y="0"/>
+          <a:ext cx="0" cy="0"/>
+          <a:chOff x="0" y="0"/>
+          <a:chExt cx="0" cy="0"/>
+        </a:xfrm>
+      </p:grpSpPr>
+      <p:sp>
+        <p:nvSpPr>
+          <p:cNvPr id="2" name="Shape 0"/>
+          <p:cNvSpPr/>
+          <p:nvPr/>
+        </p:nvSpPr>
+        <p:spPr>
+          <a:xfrm>
+            <a:off x="0" y="3246120"/>
+            <a:ext cx="12191695" cy="54864"/>
+          </a:xfrm>
+          <a:prstGeom prst="rect">
+            <a:avLst/>
+          </a:prstGeom>
+          <a:solidFill>
+            <a:srgbClr val="C9A96A"/>
+          </a:solidFill>
+          <a:ln/>
+        </p:spPr>
+      </p:sp>
+      <p:sp>
+        <p:nvSpPr>
+          <p:cNvPr id="3" name="Text 1"/>
+          <p:cNvSpPr/>
+          <p:nvPr/>
+        </p:nvSpPr>
+        <p:spPr>
+          <a:xfrm>
+            <a:off x="640080" y="1920240"/>
+            <a:ext cx="2743200" cy="548640"/>
+          </a:xfrm>
+          <a:prstGeom prst="rect">
+            <a:avLst/>
+          </a:prstGeom>
+          <a:noFill/>
+          <a:ln/>
+        </p:spPr>
+        <p:txBody>
+          <a:bodyPr wrap="square" rtlCol="0" anchor="ctr"/>
+          <a:lstStyle/>
+          <a:p>
+            <a:pPr indent="0" marL="0">
+              <a:buNone/>
+            </a:pPr>
+            <a:r>
+              <a:rPr lang="en-US" sz="1500" b="1" dirty="0">
+                <a:solidFill>
+                  <a:srgbClr val="C9A96A"/>
+                </a:solidFill>
+                <a:latin typeface="Segoe UI" pitchFamily="34" charset="0"/>
+                <a:ea typeface="Segoe UI" pitchFamily="34" charset="-122"/>
+                <a:cs typeface="Segoe UI" pitchFamily="34" charset="-120"/>
+              </a:rPr>
+              <a:t>21</a:t>
+            </a:r>
+            <a:endParaRPr lang="en-US" sz="1500" dirty="0"/>
+          </a:p>
+        </p:txBody>
+      </p:sp>
+      <p:sp>
+        <p:nvSpPr>
+          <p:cNvPr id="4" name="Text 2"/>
+          <p:cNvSpPr/>
+          <p:nvPr/>
+        </p:nvSpPr>
+        <p:spPr>
+          <a:xfrm>
+            <a:off x="640080" y="2377440"/>
+            <a:ext cx="10515600" cy="914400"/>
+          </a:xfrm>
+          <a:prstGeom prst="rect">
+            <a:avLst/>
+          </a:prstGeom>
+          <a:noFill/>
+          <a:ln/>
+        </p:spPr>
+        <p:txBody>
+          <a:bodyPr wrap="square" rtlCol="0" anchor="ctr"/>
+          <a:lstStyle/>
+          <a:p>
+            <a:pPr indent="0" marL="0">
+              <a:buNone/>
+            </a:pPr>
+            <a:r>
+              <a:rPr lang="en-US" sz="3400" b="1" dirty="0">
+                <a:solidFill>
+                  <a:srgbClr val="FFFFFF"/>
+                </a:solidFill>
+                <a:latin typeface="Georgia" pitchFamily="34" charset="0"/>
+                <a:ea typeface="Georgia" pitchFamily="34" charset="-122"/>
+                <a:cs typeface="Georgia" pitchFamily="34" charset="-120"/>
+              </a:rPr>
+              <a:t>Évolutions récentes — Koji Pro (Octobre 2026)</a:t>
+            </a:r>
+            <a:endParaRPr lang="en-US" sz="3400" dirty="0"/>
+          </a:p>
+        </p:txBody>
+      </p:sp>
+      <p:sp>
+        <p:nvSpPr>
+          <p:cNvPr id="5" name="Text 3"/>
+          <p:cNvSpPr/>
+          <p:nvPr/>
+        </p:nvSpPr>
+        <p:spPr>
+          <a:xfrm>
+            <a:off x="640080" y="3429000"/>
+            <a:ext cx="10058400" cy="1188720"/>
+          </a:xfrm>
+          <a:prstGeom prst="rect">
+            <a:avLst/>
+          </a:prstGeom>
+          <a:noFill/>
+          <a:ln/>
+        </p:spPr>
+        <p:txBody>
+          <a:bodyPr wrap="square" rtlCol="0" anchor="ctr"/>
+          <a:lstStyle/>
+          <a:p>
+            <a:pPr indent="0" marL="0">
+              <a:lnSpc>
+                <a:spcPts val="1800"/>
+              </a:lnSpc>
+              <a:buNone/>
+            </a:pPr>
+            <a:r>
+              <a:rPr lang="en-US" sz="1300" dirty="0">
+                <a:solidFill>
+                  <a:srgbClr val="C7C9E0"/>
+                </a:solidFill>
+                <a:latin typeface="Segoe UI" pitchFamily="34" charset="0"/>
+                <a:ea typeface="Segoe UI" pitchFamily="34" charset="-122"/>
+                <a:cs typeface="Segoe UI" pitchFamily="34" charset="-120"/>
+              </a:rPr>
+              <a:t>Refonte complète de l'interface Koji Pro réalisée en octobre 2026, incluant la redesign du dashboard web et de l'application mobile.</a:t>
+            </a:r>
+            <a:endParaRPr lang="en-US" sz="1300" dirty="0"/>
+          </a:p>
+        </p:txBody>
+      </p:sp>
+      <p:sp>
+        <p:nvSpPr>
+          <p:cNvPr id="6" name="Text 4"/>
+          <p:cNvSpPr/>
+          <p:nvPr/>
+        </p:nvSpPr>
+        <p:spPr>
+          <a:xfrm>
+            <a:off x="365760" y="6510528"/>
+            <a:ext cx="5486400" cy="274320"/>
+          </a:xfrm>
+          <a:prstGeom prst="rect">
+            <a:avLst/>
+          </a:prstGeom>
+          <a:noFill/>
+          <a:ln/>
+        </p:spPr>
+        <p:txBody>
+          <a:bodyPr wrap="square" rtlCol="0" anchor="ctr"/>
+          <a:lstStyle/>
+          <a:p>
+            <a:pPr indent="0" marL="0">
+              <a:buNone/>
+            </a:pPr>
+            <a:r>
+              <a:rPr lang="en-US" sz="850" dirty="0">
+                <a:solidFill>
+                  <a:srgbClr val="8A7C68"/>
+                </a:solidFill>
+                <a:latin typeface="Segoe UI" pitchFamily="34" charset="0"/>
+                <a:ea typeface="Segoe UI" pitchFamily="34" charset="-122"/>
+                <a:cs typeface="Segoe UI" pitchFamily="34" charset="-120"/>
+              </a:rPr>
+              <a:t>Koji Web — Cahier des charges</a:t>
+            </a:r>
+            <a:endParaRPr lang="en-US" sz="850" dirty="0"/>
+          </a:p>
+        </p:txBody>
+      </p:sp>
+      <p:sp>
+        <p:nvSpPr>
+          <p:cNvPr id="7" name="Text 5"/>
+          <p:cNvSpPr/>
+          <p:nvPr/>
+        </p:nvSpPr>
+        <p:spPr>
+          <a:xfrm>
+            <a:off x="9601200" y="6510528"/>
+            <a:ext cx="2194560" cy="274320"/>
+          </a:xfrm>
+          <a:prstGeom prst="rect">
+            <a:avLst/>
+          </a:prstGeom>
+          <a:noFill/>
+          <a:ln/>
+        </p:spPr>
+        <p:txBody>
+          <a:bodyPr wrap="square" rtlCol="0" anchor="ctr"/>
+          <a:lstStyle/>
+          <a:p>
+            <a:pPr algn="r" indent="0" marL="0">
+              <a:buNone/>
+            </a:pPr>
+            <a:r>
+              <a:rPr lang="en-US" sz="850" dirty="0">
+                <a:solidFill>
+                  <a:srgbClr val="8A7C68"/>
+                </a:solidFill>
+                <a:latin typeface="Segoe UI" pitchFamily="34" charset="0"/>
+                <a:ea typeface="Segoe UI" pitchFamily="34" charset="-122"/>
+                <a:cs typeface="Segoe UI" pitchFamily="34" charset="-120"/>
+              </a:rPr>
+              <a:t>90</a:t>
+            </a:r>
+            <a:endParaRPr lang="en-US" sz="850" dirty="0"/>
+          </a:p>
+        </p:txBody>
+      </p:sp>
+    </p:spTree>
+  </p:cSld>
+  <p:clrMapOvr>
+    <a:masterClrMapping/>
+  </p:clrMapOvr>
+</p:sld>
+</file>
+
+<file path=ppt/slides/slide92.xml><?xml version="1.0" encoding="utf-8"?>
+<p:sld xmlns:a="http://schemas.openxmlformats.org/drawingml/2006/main" xmlns:r="http://schemas.openxmlformats.org/officeDocument/2006/relationships" xmlns:p="http://schemas.openxmlformats.org/presentationml/2006/main">
+  <p:cSld name="Slide 92">
+    <p:bg>
+      <p:bgPr>
+        <a:solidFill>
+          <a:srgbClr val="F3EEE3"/>
+        </a:solidFill>
+      </p:bgPr>
+    </p:bg>
+    <p:spTree>
+      <p:nvGrpSpPr>
+        <p:cNvPr id="1" name=""/>
+        <p:cNvGrpSpPr/>
+        <p:nvPr/>
+      </p:nvGrpSpPr>
+      <p:grpSpPr>
+        <a:xfrm>
+          <a:off x="0" y="0"/>
+          <a:ext cx="0" cy="0"/>
+          <a:chOff x="0" y="0"/>
+          <a:chExt cx="0" cy="0"/>
+        </a:xfrm>
+      </p:grpSpPr>
+      <p:sp>
+        <p:nvSpPr>
+          <p:cNvPr id="2" name="Shape 0"/>
+          <p:cNvSpPr/>
+          <p:nvPr/>
+        </p:nvSpPr>
+        <p:spPr>
+          <a:xfrm>
+            <a:off x="640080" y="411480"/>
+            <a:ext cx="3108960" cy="365760"/>
+          </a:xfrm>
+          <a:prstGeom prst="roundRect">
+            <a:avLst>
+              <a:gd name="adj" fmla="val 50000"/>
+            </a:avLst>
+          </a:prstGeom>
+          <a:solidFill>
+            <a:srgbClr val="F7EADF"/>
+          </a:solidFill>
+          <a:ln/>
+        </p:spPr>
+      </p:sp>
+      <p:sp>
+        <p:nvSpPr>
+          <p:cNvPr id="3" name="Text 1"/>
+          <p:cNvSpPr/>
+          <p:nvPr/>
+        </p:nvSpPr>
+        <p:spPr>
+          <a:xfrm>
+            <a:off x="640080" y="411480"/>
+            <a:ext cx="3108960" cy="365760"/>
+          </a:xfrm>
+          <a:prstGeom prst="rect">
+            <a:avLst/>
+          </a:prstGeom>
+          <a:noFill/>
+          <a:ln/>
+        </p:spPr>
+        <p:txBody>
+          <a:bodyPr wrap="square" rtlCol="0" anchor="ctr"/>
+          <a:lstStyle/>
+          <a:p>
+            <a:pPr algn="ctr" indent="0" marL="0">
+              <a:buNone/>
+            </a:pPr>
+            <a:r>
+              <a:rPr lang="en-US" sz="950" b="1" spc="100" kern="0" dirty="0">
+                <a:solidFill>
+                  <a:srgbClr val="9A7C5C"/>
+                </a:solidFill>
+                <a:latin typeface="Segoe UI" pitchFamily="34" charset="0"/>
+                <a:ea typeface="Segoe UI" pitchFamily="34" charset="-122"/>
+                <a:cs typeface="Segoe UI" pitchFamily="34" charset="-120"/>
+              </a:rPr>
+              <a:t>ÉVOLUTIONS RÉCENTES — KOJI PRO (OCTOBRE 2026)</a:t>
+            </a:r>
+            <a:endParaRPr lang="en-US" sz="950" dirty="0"/>
+          </a:p>
+        </p:txBody>
+      </p:sp>
+      <p:sp>
+        <p:nvSpPr>
+          <p:cNvPr id="4" name="Shape 2"/>
+          <p:cNvSpPr/>
+          <p:nvPr/>
+        </p:nvSpPr>
+        <p:spPr>
+          <a:xfrm>
+            <a:off x="640080" y="1005840"/>
+            <a:ext cx="10881360" cy="1737360"/>
+          </a:xfrm>
+          <a:prstGeom prst="roundRect">
+            <a:avLst>
+              <a:gd name="adj" fmla="val 3158"/>
+            </a:avLst>
+          </a:prstGeom>
+          <a:solidFill>
+            <a:srgbClr val="FFFFFF"/>
+          </a:solidFill>
+          <a:ln w="12700">
+            <a:solidFill>
+              <a:srgbClr val="E4DCCB"/>
+            </a:solidFill>
+            <a:prstDash val="solid"/>
+          </a:ln>
+        </p:spPr>
+      </p:sp>
+      <p:sp>
+        <p:nvSpPr>
+          <p:cNvPr id="5" name="Shape 3"/>
+          <p:cNvSpPr/>
+          <p:nvPr/>
+        </p:nvSpPr>
+        <p:spPr>
+          <a:xfrm>
+            <a:off x="640080" y="1005840"/>
+            <a:ext cx="54864" cy="1737360"/>
+          </a:xfrm>
+          <a:prstGeom prst="rect">
+            <a:avLst/>
+          </a:prstGeom>
+          <a:solidFill>
+            <a:srgbClr val="1D6FE0"/>
+          </a:solidFill>
+          <a:ln/>
+        </p:spPr>
+      </p:sp>
+      <p:sp>
+        <p:nvSpPr>
+          <p:cNvPr id="6" name="Text 4"/>
+          <p:cNvSpPr/>
+          <p:nvPr/>
+        </p:nvSpPr>
+        <p:spPr>
+          <a:xfrm>
+            <a:off x="914400" y="1133856"/>
+            <a:ext cx="10332720" cy="365760"/>
+          </a:xfrm>
+          <a:prstGeom prst="rect">
+            <a:avLst/>
+          </a:prstGeom>
+          <a:noFill/>
+          <a:ln/>
+        </p:spPr>
+        <p:txBody>
+          <a:bodyPr wrap="square" rtlCol="0" anchor="ctr"/>
+          <a:lstStyle/>
+          <a:p>
+            <a:pPr indent="0" marL="0">
+              <a:buNone/>
+            </a:pPr>
+            <a:r>
+              <a:rPr lang="en-US" sz="1500" b="1" dirty="0">
+                <a:solidFill>
+                  <a:srgbClr val="1B1F3B"/>
+                </a:solidFill>
+                <a:latin typeface="Georgia" pitchFamily="34" charset="0"/>
+                <a:ea typeface="Georgia" pitchFamily="34" charset="-122"/>
+                <a:cs typeface="Georgia" pitchFamily="34" charset="-120"/>
+              </a:rPr>
+              <a:t>Refonte intégrale du dashboard entreprise (50 pages web)</a:t>
+            </a:r>
+            <a:endParaRPr lang="en-US" sz="1500" dirty="0"/>
+          </a:p>
+        </p:txBody>
+      </p:sp>
+      <p:sp>
+        <p:nvSpPr>
+          <p:cNvPr id="7" name="Text 5"/>
+          <p:cNvSpPr/>
+          <p:nvPr/>
+        </p:nvSpPr>
+        <p:spPr>
+          <a:xfrm>
+            <a:off x="914400" y="1536192"/>
+            <a:ext cx="10332720" cy="1005840"/>
+          </a:xfrm>
+          <a:prstGeom prst="rect">
+            <a:avLst/>
+          </a:prstGeom>
+          <a:noFill/>
+          <a:ln/>
+        </p:spPr>
+        <p:txBody>
+          <a:bodyPr wrap="square" rtlCol="0" anchor="ctr"/>
+          <a:lstStyle/>
+          <a:p>
+            <a:pPr indent="0" marL="0">
+              <a:lnSpc>
+                <a:spcPts val="1600"/>
+              </a:lnSpc>
+              <a:buNone/>
+            </a:pPr>
+            <a:r>
+              <a:rPr lang="en-US" sz="1150" dirty="0">
+                <a:solidFill>
+                  <a:srgbClr val="1B1F3B"/>
+                </a:solidFill>
+                <a:latin typeface="Segoe UI" pitchFamily="34" charset="0"/>
+                <a:ea typeface="Segoe UI" pitchFamily="34" charset="-122"/>
+                <a:cs typeface="Segoe UI" pitchFamily="34" charset="-120"/>
+              </a:rPr>
+              <a:t>Le dashboard Koji Pro a été entièrement refondu selon la nouvelle Design Appliqué (DA) : 50 pages répartis sur 12 modules (Chantiers, Devis, Facturation, Fournitures, Bibliothèque, Comptabilité, Contacts, Calendrier, KojiPage, Profil, Équipe, Urgences). Chaque module et sous-page respecte le design system PRO-01 à PRO-17, avec KPIs, listes, fiches détail et formulaires cohérents.</a:t>
+            </a:r>
+            <a:endParaRPr lang="en-US" sz="1150" dirty="0"/>
+          </a:p>
+        </p:txBody>
+      </p:sp>
+      <p:sp>
+        <p:nvSpPr>
+          <p:cNvPr id="8" name="Shape 6"/>
+          <p:cNvSpPr/>
+          <p:nvPr/>
+        </p:nvSpPr>
+        <p:spPr>
+          <a:xfrm>
+            <a:off x="640080" y="2944368"/>
+            <a:ext cx="10881360" cy="1737360"/>
+          </a:xfrm>
+          <a:prstGeom prst="roundRect">
+            <a:avLst>
+              <a:gd name="adj" fmla="val 3158"/>
+            </a:avLst>
+          </a:prstGeom>
+          <a:solidFill>
+            <a:srgbClr val="FFFFFF"/>
+          </a:solidFill>
+          <a:ln w="12700">
+            <a:solidFill>
+              <a:srgbClr val="E4DCCB"/>
+            </a:solidFill>
+            <a:prstDash val="solid"/>
+          </a:ln>
+        </p:spPr>
+      </p:sp>
+      <p:sp>
+        <p:nvSpPr>
+          <p:cNvPr id="9" name="Shape 7"/>
+          <p:cNvSpPr/>
+          <p:nvPr/>
+        </p:nvSpPr>
+        <p:spPr>
+          <a:xfrm>
+            <a:off x="640080" y="2944368"/>
+            <a:ext cx="54864" cy="1737360"/>
+          </a:xfrm>
+          <a:prstGeom prst="rect">
+            <a:avLst/>
+          </a:prstGeom>
+          <a:solidFill>
+            <a:srgbClr val="1D6FE0"/>
+          </a:solidFill>
+          <a:ln/>
+        </p:spPr>
+      </p:sp>
+      <p:sp>
+        <p:nvSpPr>
+          <p:cNvPr id="10" name="Text 8"/>
+          <p:cNvSpPr/>
+          <p:nvPr/>
+        </p:nvSpPr>
+        <p:spPr>
+          <a:xfrm>
+            <a:off x="914400" y="3072384"/>
+            <a:ext cx="10332720" cy="365760"/>
+          </a:xfrm>
+          <a:prstGeom prst="rect">
+            <a:avLst/>
+          </a:prstGeom>
+          <a:noFill/>
+          <a:ln/>
+        </p:spPr>
+        <p:txBody>
+          <a:bodyPr wrap="square" rtlCol="0" anchor="ctr"/>
+          <a:lstStyle/>
+          <a:p>
+            <a:pPr indent="0" marL="0">
+              <a:buNone/>
+            </a:pPr>
+            <a:r>
+              <a:rPr lang="en-US" sz="1500" b="1" dirty="0">
+                <a:solidFill>
+                  <a:srgbClr val="1B1F3B"/>
+                </a:solidFill>
+                <a:latin typeface="Georgia" pitchFamily="34" charset="0"/>
+                <a:ea typeface="Georgia" pitchFamily="34" charset="-122"/>
+                <a:cs typeface="Georgia" pitchFamily="34" charset="-120"/>
+              </a:rPr>
+              <a:t>Refonte intégrale de l'app mobile entreprise (5 fichiers Flutter)</a:t>
+            </a:r>
+            <a:endParaRPr lang="en-US" sz="1500" dirty="0"/>
+          </a:p>
+        </p:txBody>
+      </p:sp>
+      <p:sp>
+        <p:nvSpPr>
+          <p:cNvPr id="11" name="Text 9"/>
+          <p:cNvSpPr/>
+          <p:nvPr/>
+        </p:nvSpPr>
+        <p:spPr>
+          <a:xfrm>
+            <a:off x="914400" y="3474720"/>
+            <a:ext cx="10332720" cy="1005840"/>
+          </a:xfrm>
+          <a:prstGeom prst="rect">
+            <a:avLst/>
+          </a:prstGeom>
+          <a:noFill/>
+          <a:ln/>
+        </p:spPr>
+        <p:txBody>
+          <a:bodyPr wrap="square" rtlCol="0" anchor="ctr"/>
+          <a:lstStyle/>
+          <a:p>
+            <a:pPr indent="0" marL="0">
+              <a:lnSpc>
+                <a:spcPts val="1600"/>
+              </a:lnSpc>
+              <a:buNone/>
+            </a:pPr>
+            <a:r>
+              <a:rPr lang="en-US" sz="1150" dirty="0">
+                <a:solidFill>
+                  <a:srgbClr val="1B1F3B"/>
+                </a:solidFill>
+                <a:latin typeface="Segoe UI" pitchFamily="34" charset="0"/>
+                <a:ea typeface="Segoe UI" pitchFamily="34" charset="-122"/>
+                <a:cs typeface="Segoe UI" pitchFamily="34" charset="-120"/>
+              </a:rPr>
+              <a:t>L'application mobile Koji Pro a été refondée sur 5 fichiers (Accueil, Listes Devis/Clients/Équipe/Facturation, Assistant IA Devis, Profil et Paramètres, Options avancées). Tous les écrans utilisent le nouveau design system KOJI Pro (couleurs, composants, KPI cards mobiles, mise en page responsive).</a:t>
+            </a:r>
+            <a:endParaRPr lang="en-US" sz="1150" dirty="0"/>
+          </a:p>
+        </p:txBody>
+      </p:sp>
+      <p:sp>
+        <p:nvSpPr>
+          <p:cNvPr id="12" name="Text 10"/>
+          <p:cNvSpPr/>
+          <p:nvPr/>
+        </p:nvSpPr>
+        <p:spPr>
+          <a:xfrm>
+            <a:off x="365760" y="6510528"/>
+            <a:ext cx="5486400" cy="274320"/>
+          </a:xfrm>
+          <a:prstGeom prst="rect">
+            <a:avLst/>
+          </a:prstGeom>
+          <a:noFill/>
+          <a:ln/>
+        </p:spPr>
+        <p:txBody>
+          <a:bodyPr wrap="square" rtlCol="0" anchor="ctr"/>
+          <a:lstStyle/>
+          <a:p>
+            <a:pPr indent="0" marL="0">
+              <a:buNone/>
+            </a:pPr>
+            <a:r>
+              <a:rPr lang="en-US" sz="850" dirty="0">
+                <a:solidFill>
+                  <a:srgbClr val="8A7C68"/>
+                </a:solidFill>
+                <a:latin typeface="Segoe UI" pitchFamily="34" charset="0"/>
+                <a:ea typeface="Segoe UI" pitchFamily="34" charset="-122"/>
+                <a:cs typeface="Segoe UI" pitchFamily="34" charset="-120"/>
+              </a:rPr>
+              <a:t>Koji Web — Cahier des charges</a:t>
+            </a:r>
+            <a:endParaRPr lang="en-US" sz="850" dirty="0"/>
+          </a:p>
+        </p:txBody>
+      </p:sp>
+      <p:sp>
+        <p:nvSpPr>
+          <p:cNvPr id="13" name="Text 11"/>
+          <p:cNvSpPr/>
+          <p:nvPr/>
+        </p:nvSpPr>
+        <p:spPr>
+          <a:xfrm>
+            <a:off x="9601200" y="6510528"/>
+            <a:ext cx="2194560" cy="274320"/>
+          </a:xfrm>
+          <a:prstGeom prst="rect">
+            <a:avLst/>
+          </a:prstGeom>
+          <a:noFill/>
+          <a:ln/>
+        </p:spPr>
+        <p:txBody>
+          <a:bodyPr wrap="square" rtlCol="0" anchor="ctr"/>
+          <a:lstStyle/>
+          <a:p>
+            <a:pPr algn="r" indent="0" marL="0">
+              <a:buNone/>
+            </a:pPr>
+            <a:r>
+              <a:rPr lang="en-US" sz="850" dirty="0">
+                <a:solidFill>
+                  <a:srgbClr val="8A7C68"/>
+                </a:solidFill>
+                <a:latin typeface="Segoe UI" pitchFamily="34" charset="0"/>
+                <a:ea typeface="Segoe UI" pitchFamily="34" charset="-122"/>
+                <a:cs typeface="Segoe UI" pitchFamily="34" charset="-120"/>
+              </a:rPr>
+              <a:t>91</a:t>
+            </a:r>
+            <a:endParaRPr lang="en-US" sz="850" dirty="0"/>
+          </a:p>
+        </p:txBody>
+      </p:sp>
+    </p:spTree>
+  </p:cSld>
+  <p:clrMapOvr>
+    <a:masterClrMapping/>
+  </p:clrMapOvr>
+</p:sld>
+</file>
+
+<file path=ppt/slides/slide93.xml><?xml version="1.0" encoding="utf-8"?>
+<p:sld xmlns:a="http://schemas.openxmlformats.org/drawingml/2006/main" xmlns:r="http://schemas.openxmlformats.org/officeDocument/2006/relationships" xmlns:p="http://schemas.openxmlformats.org/presentationml/2006/main">
+  <p:cSld name="Slide 93">
+    <p:bg>
+      <p:bgPr>
+        <a:solidFill>
+          <a:srgbClr val="F3EEE3"/>
+        </a:solidFill>
+      </p:bgPr>
+    </p:bg>
+    <p:spTree>
+      <p:nvGrpSpPr>
+        <p:cNvPr id="1" name=""/>
+        <p:cNvGrpSpPr/>
+        <p:nvPr/>
+      </p:nvGrpSpPr>
+      <p:grpSpPr>
+        <a:xfrm>
+          <a:off x="0" y="0"/>
+          <a:ext cx="0" cy="0"/>
+          <a:chOff x="0" y="0"/>
+          <a:chExt cx="0" cy="0"/>
+        </a:xfrm>
+      </p:grpSpPr>
+      <p:sp>
+        <p:nvSpPr>
+          <p:cNvPr id="2" name="Shape 0"/>
+          <p:cNvSpPr/>
+          <p:nvPr/>
+        </p:nvSpPr>
+        <p:spPr>
+          <a:xfrm>
+            <a:off x="640080" y="411480"/>
+            <a:ext cx="3108960" cy="365760"/>
+          </a:xfrm>
+          <a:prstGeom prst="roundRect">
+            <a:avLst>
+              <a:gd name="adj" fmla="val 50000"/>
+            </a:avLst>
+          </a:prstGeom>
+          <a:solidFill>
+            <a:srgbClr val="F7EADF"/>
+          </a:solidFill>
+          <a:ln/>
+        </p:spPr>
+      </p:sp>
+      <p:sp>
+        <p:nvSpPr>
+          <p:cNvPr id="3" name="Text 1"/>
+          <p:cNvSpPr/>
+          <p:nvPr/>
+        </p:nvSpPr>
+        <p:spPr>
+          <a:xfrm>
+            <a:off x="640080" y="411480"/>
+            <a:ext cx="3108960" cy="365760"/>
+          </a:xfrm>
+          <a:prstGeom prst="rect">
+            <a:avLst/>
+          </a:prstGeom>
+          <a:noFill/>
+          <a:ln/>
+        </p:spPr>
+        <p:txBody>
+          <a:bodyPr wrap="square" rtlCol="0" anchor="ctr"/>
+          <a:lstStyle/>
+          <a:p>
+            <a:pPr algn="ctr" indent="0" marL="0">
+              <a:buNone/>
+            </a:pPr>
+            <a:r>
+              <a:rPr lang="en-US" sz="950" b="1" spc="100" kern="0" dirty="0">
+                <a:solidFill>
+                  <a:srgbClr val="9A7C5C"/>
+                </a:solidFill>
+                <a:latin typeface="Segoe UI" pitchFamily="34" charset="0"/>
+                <a:ea typeface="Segoe UI" pitchFamily="34" charset="-122"/>
+                <a:cs typeface="Segoe UI" pitchFamily="34" charset="-120"/>
+              </a:rPr>
+              <a:t>ÉVOLUTIONS RÉCENTES — KOJI PRO (OCTOBRE 2026)</a:t>
+            </a:r>
+            <a:endParaRPr lang="en-US" sz="950" dirty="0"/>
+          </a:p>
+        </p:txBody>
+      </p:sp>
+      <p:sp>
+        <p:nvSpPr>
+          <p:cNvPr id="4" name="Shape 2"/>
+          <p:cNvSpPr/>
+          <p:nvPr/>
+        </p:nvSpPr>
+        <p:spPr>
+          <a:xfrm>
+            <a:off x="640080" y="1005840"/>
+            <a:ext cx="10881360" cy="1737360"/>
+          </a:xfrm>
+          <a:prstGeom prst="roundRect">
+            <a:avLst>
+              <a:gd name="adj" fmla="val 3158"/>
+            </a:avLst>
+          </a:prstGeom>
+          <a:solidFill>
+            <a:srgbClr val="FFFFFF"/>
+          </a:solidFill>
+          <a:ln w="12700">
+            <a:solidFill>
+              <a:srgbClr val="E4DCCB"/>
+            </a:solidFill>
+            <a:prstDash val="solid"/>
+          </a:ln>
+        </p:spPr>
+      </p:sp>
+      <p:sp>
+        <p:nvSpPr>
+          <p:cNvPr id="5" name="Shape 3"/>
+          <p:cNvSpPr/>
+          <p:nvPr/>
+        </p:nvSpPr>
+        <p:spPr>
+          <a:xfrm>
+            <a:off x="640080" y="1005840"/>
+            <a:ext cx="54864" cy="1737360"/>
+          </a:xfrm>
+          <a:prstGeom prst="rect">
+            <a:avLst/>
+          </a:prstGeom>
+          <a:solidFill>
+            <a:srgbClr val="1D6FE0"/>
+          </a:solidFill>
+          <a:ln/>
+        </p:spPr>
+      </p:sp>
+      <p:sp>
+        <p:nvSpPr>
+          <p:cNvPr id="6" name="Text 4"/>
+          <p:cNvSpPr/>
+          <p:nvPr/>
+        </p:nvSpPr>
+        <p:spPr>
+          <a:xfrm>
+            <a:off x="914400" y="1133856"/>
+            <a:ext cx="10332720" cy="365760"/>
+          </a:xfrm>
+          <a:prstGeom prst="rect">
+            <a:avLst/>
+          </a:prstGeom>
+          <a:noFill/>
+          <a:ln/>
+        </p:spPr>
+        <p:txBody>
+          <a:bodyPr wrap="square" rtlCol="0" anchor="ctr"/>
+          <a:lstStyle/>
+          <a:p>
+            <a:pPr indent="0" marL="0">
+              <a:buNone/>
+            </a:pPr>
+            <a:r>
+              <a:rPr lang="en-US" sz="1500" b="1" dirty="0">
+                <a:solidFill>
+                  <a:srgbClr val="1B1F3B"/>
+                </a:solidFill>
+                <a:latin typeface="Georgia" pitchFamily="34" charset="0"/>
+                <a:ea typeface="Georgia" pitchFamily="34" charset="-122"/>
+                <a:cs typeface="Georgia" pitchFamily="34" charset="-120"/>
+              </a:rPr>
+              <a:t>Validation et tests de la refonte Koji Pro</a:t>
+            </a:r>
+            <a:endParaRPr lang="en-US" sz="1500" dirty="0"/>
+          </a:p>
+        </p:txBody>
+      </p:sp>
+      <p:sp>
+        <p:nvSpPr>
+          <p:cNvPr id="7" name="Text 5"/>
+          <p:cNvSpPr/>
+          <p:nvPr/>
+        </p:nvSpPr>
+        <p:spPr>
+          <a:xfrm>
+            <a:off x="914400" y="1536192"/>
+            <a:ext cx="10332720" cy="1005840"/>
+          </a:xfrm>
+          <a:prstGeom prst="rect">
+            <a:avLst/>
+          </a:prstGeom>
+          <a:noFill/>
+          <a:ln/>
+        </p:spPr>
+        <p:txBody>
+          <a:bodyPr wrap="square" rtlCol="0" anchor="ctr"/>
+          <a:lstStyle/>
+          <a:p>
+            <a:pPr indent="0" marL="0">
+              <a:lnSpc>
+                <a:spcPts val="1600"/>
+              </a:lnSpc>
+              <a:buNone/>
+            </a:pPr>
+            <a:r>
+              <a:rPr lang="en-US" sz="1150" dirty="0">
+                <a:solidFill>
+                  <a:srgbClr val="1B1F3B"/>
+                </a:solidFill>
+                <a:latin typeface="Segoe UI" pitchFamily="34" charset="0"/>
+                <a:ea typeface="Segoe UI" pitchFamily="34" charset="-122"/>
+                <a:cs typeface="Segoe UI" pitchFamily="34" charset="-120"/>
+              </a:rPr>
+              <a:t>Tests Playwright pour le web : 16/16 pages PRO passent les validations (sélecteurs CSS, KPIs, listes, formulaires). Tests Flutter : 0 erreurs de compilation (flutter analyze). Tous les composants respectent la DA et les spécifications PRO-01 à PRO-17.</a:t>
+            </a:r>
+            <a:endParaRPr lang="en-US" sz="1150" dirty="0"/>
+          </a:p>
+        </p:txBody>
+      </p:sp>
+      <p:sp>
+        <p:nvSpPr>
+          <p:cNvPr id="8" name="Text 6"/>
+          <p:cNvSpPr/>
+          <p:nvPr/>
+        </p:nvSpPr>
+        <p:spPr>
+          <a:xfrm>
+            <a:off x="365760" y="6510528"/>
+            <a:ext cx="5486400" cy="274320"/>
+          </a:xfrm>
+          <a:prstGeom prst="rect">
+            <a:avLst/>
+          </a:prstGeom>
+          <a:noFill/>
+          <a:ln/>
+        </p:spPr>
+        <p:txBody>
+          <a:bodyPr wrap="square" rtlCol="0" anchor="ctr"/>
+          <a:lstStyle/>
+          <a:p>
+            <a:pPr indent="0" marL="0">
+              <a:buNone/>
+            </a:pPr>
+            <a:r>
+              <a:rPr lang="en-US" sz="850" dirty="0">
+                <a:solidFill>
+                  <a:srgbClr val="8A7C68"/>
+                </a:solidFill>
+                <a:latin typeface="Segoe UI" pitchFamily="34" charset="0"/>
+                <a:ea typeface="Segoe UI" pitchFamily="34" charset="-122"/>
+                <a:cs typeface="Segoe UI" pitchFamily="34" charset="-120"/>
+              </a:rPr>
+              <a:t>Koji Web — Cahier des charges</a:t>
+            </a:r>
+            <a:endParaRPr lang="en-US" sz="850" dirty="0"/>
+          </a:p>
+        </p:txBody>
+      </p:sp>
+      <p:sp>
+        <p:nvSpPr>
+          <p:cNvPr id="9" name="Text 7"/>
+          <p:cNvSpPr/>
+          <p:nvPr/>
+        </p:nvSpPr>
+        <p:spPr>
+          <a:xfrm>
+            <a:off x="9601200" y="6510528"/>
+            <a:ext cx="2194560" cy="274320"/>
+          </a:xfrm>
+          <a:prstGeom prst="rect">
+            <a:avLst/>
+          </a:prstGeom>
+          <a:noFill/>
+          <a:ln/>
+        </p:spPr>
+        <p:txBody>
+          <a:bodyPr wrap="square" rtlCol="0" anchor="ctr"/>
+          <a:lstStyle/>
+          <a:p>
+            <a:pPr algn="r" indent="0" marL="0">
+              <a:buNone/>
+            </a:pPr>
+            <a:r>
+              <a:rPr lang="en-US" sz="850" dirty="0">
+                <a:solidFill>
+                  <a:srgbClr val="8A7C68"/>
+                </a:solidFill>
+                <a:latin typeface="Segoe UI" pitchFamily="34" charset="0"/>
+                <a:ea typeface="Segoe UI" pitchFamily="34" charset="-122"/>
+                <a:cs typeface="Segoe UI" pitchFamily="34" charset="-120"/>
+              </a:rPr>
+              <a:t>92</a:t>
+            </a:r>
+            <a:endParaRPr lang="en-US" sz="850" dirty="0"/>
+          </a:p>
+        </p:txBody>
+      </p:sp>
+    </p:spTree>
+  </p:cSld>
+  <p:clrMapOvr>
+    <a:masterClrMapping/>
+  </p:clrMapOvr>
+</p:sld>
+</file>
+
+<file path=ppt/slides/slide94.xml><?xml version="1.0" encoding="utf-8"?>
+<p:sld xmlns:a="http://schemas.openxmlformats.org/drawingml/2006/main" xmlns:r="http://schemas.openxmlformats.org/officeDocument/2006/relationships" xmlns:p="http://schemas.openxmlformats.org/presentationml/2006/main">
+  <p:cSld name="Slide 94">
     <p:bg>
       <p:bgPr>
         <a:solidFill>
